--- a/BinanotlarSunum.pptx
+++ b/BinanotlarSunum.pptx
@@ -278,7 +278,7 @@
           <a:p>
             <a:fld id="{20A09914-A052-41C0-AB34-A4555936D3D8}" type="datetimeFigureOut">
               <a:rPr lang="tr-TR" smtClean="0"/>
-              <a:t>24.08.2026</a:t>
+              <a:t>29.08.2026</a:t>
             </a:fld>
             <a:endParaRPr lang="tr-TR"/>
           </a:p>
@@ -476,7 +476,7 @@
           <a:p>
             <a:fld id="{20A09914-A052-41C0-AB34-A4555936D3D8}" type="datetimeFigureOut">
               <a:rPr lang="tr-TR" smtClean="0"/>
-              <a:t>24.08.2026</a:t>
+              <a:t>29.08.2026</a:t>
             </a:fld>
             <a:endParaRPr lang="tr-TR"/>
           </a:p>
@@ -684,7 +684,7 @@
           <a:p>
             <a:fld id="{20A09914-A052-41C0-AB34-A4555936D3D8}" type="datetimeFigureOut">
               <a:rPr lang="tr-TR" smtClean="0"/>
-              <a:t>24.08.2026</a:t>
+              <a:t>29.08.2026</a:t>
             </a:fld>
             <a:endParaRPr lang="tr-TR"/>
           </a:p>
@@ -882,7 +882,7 @@
           <a:p>
             <a:fld id="{20A09914-A052-41C0-AB34-A4555936D3D8}" type="datetimeFigureOut">
               <a:rPr lang="tr-TR" smtClean="0"/>
-              <a:t>24.08.2026</a:t>
+              <a:t>29.08.2026</a:t>
             </a:fld>
             <a:endParaRPr lang="tr-TR"/>
           </a:p>
@@ -1157,7 +1157,7 @@
           <a:p>
             <a:fld id="{20A09914-A052-41C0-AB34-A4555936D3D8}" type="datetimeFigureOut">
               <a:rPr lang="tr-TR" smtClean="0"/>
-              <a:t>24.08.2026</a:t>
+              <a:t>29.08.2026</a:t>
             </a:fld>
             <a:endParaRPr lang="tr-TR"/>
           </a:p>
@@ -1422,7 +1422,7 @@
           <a:p>
             <a:fld id="{20A09914-A052-41C0-AB34-A4555936D3D8}" type="datetimeFigureOut">
               <a:rPr lang="tr-TR" smtClean="0"/>
-              <a:t>24.08.2026</a:t>
+              <a:t>29.08.2026</a:t>
             </a:fld>
             <a:endParaRPr lang="tr-TR"/>
           </a:p>
@@ -1834,7 +1834,7 @@
           <a:p>
             <a:fld id="{20A09914-A052-41C0-AB34-A4555936D3D8}" type="datetimeFigureOut">
               <a:rPr lang="tr-TR" smtClean="0"/>
-              <a:t>24.08.2026</a:t>
+              <a:t>29.08.2026</a:t>
             </a:fld>
             <a:endParaRPr lang="tr-TR"/>
           </a:p>
@@ -1975,7 +1975,7 @@
           <a:p>
             <a:fld id="{20A09914-A052-41C0-AB34-A4555936D3D8}" type="datetimeFigureOut">
               <a:rPr lang="tr-TR" smtClean="0"/>
-              <a:t>24.08.2026</a:t>
+              <a:t>29.08.2026</a:t>
             </a:fld>
             <a:endParaRPr lang="tr-TR"/>
           </a:p>
@@ -2088,7 +2088,7 @@
           <a:p>
             <a:fld id="{20A09914-A052-41C0-AB34-A4555936D3D8}" type="datetimeFigureOut">
               <a:rPr lang="tr-TR" smtClean="0"/>
-              <a:t>24.08.2026</a:t>
+              <a:t>29.08.2026</a:t>
             </a:fld>
             <a:endParaRPr lang="tr-TR"/>
           </a:p>
@@ -2399,7 +2399,7 @@
           <a:p>
             <a:fld id="{20A09914-A052-41C0-AB34-A4555936D3D8}" type="datetimeFigureOut">
               <a:rPr lang="tr-TR" smtClean="0"/>
-              <a:t>24.08.2026</a:t>
+              <a:t>29.08.2026</a:t>
             </a:fld>
             <a:endParaRPr lang="tr-TR"/>
           </a:p>
@@ -2687,7 +2687,7 @@
           <a:p>
             <a:fld id="{20A09914-A052-41C0-AB34-A4555936D3D8}" type="datetimeFigureOut">
               <a:rPr lang="tr-TR" smtClean="0"/>
-              <a:t>24.08.2026</a:t>
+              <a:t>29.08.2026</a:t>
             </a:fld>
             <a:endParaRPr lang="tr-TR"/>
           </a:p>
@@ -2928,7 +2928,7 @@
           <a:p>
             <a:fld id="{20A09914-A052-41C0-AB34-A4555936D3D8}" type="datetimeFigureOut">
               <a:rPr lang="tr-TR" smtClean="0"/>
-              <a:t>24.08.2026</a:t>
+              <a:t>29.08.2026</a:t>
             </a:fld>
             <a:endParaRPr lang="tr-TR"/>
           </a:p>
@@ -11622,6 +11622,311 @@
           </a:p>
         </p:txBody>
       </p:sp>
+      <p:sp>
+        <p:nvSpPr>
+          <p:cNvPr id="2" name="İkizkenar Üçgen 1">
+            <a:extLst>
+              <a:ext uri="{FF2B5EF4-FFF2-40B4-BE49-F238E27FC236}">
+                <a16:creationId xmlns:a16="http://schemas.microsoft.com/office/drawing/2014/main" id="{CEEFA296-7024-9D62-DEAD-0C0A771E5960}"/>
+              </a:ext>
+            </a:extLst>
+          </p:cNvPr>
+          <p:cNvSpPr/>
+          <p:nvPr/>
+        </p:nvSpPr>
+        <p:spPr>
+          <a:xfrm rot="18876393">
+            <a:off x="-831487" y="-167882"/>
+            <a:ext cx="2564858" cy="1263088"/>
+          </a:xfrm>
+          <a:prstGeom prst="triangle">
+            <a:avLst>
+              <a:gd name="adj" fmla="val 50246"/>
+            </a:avLst>
+          </a:prstGeom>
+          <a:solidFill>
+            <a:srgbClr val="FFC000"/>
+          </a:solidFill>
+          <a:ln>
+            <a:solidFill>
+              <a:schemeClr val="accent2">
+                <a:lumMod val="60000"/>
+                <a:lumOff val="40000"/>
+              </a:schemeClr>
+            </a:solidFill>
+          </a:ln>
+        </p:spPr>
+        <p:style>
+          <a:lnRef idx="2">
+            <a:schemeClr val="accent1">
+              <a:shade val="15000"/>
+            </a:schemeClr>
+          </a:lnRef>
+          <a:fillRef idx="1">
+            <a:schemeClr val="accent1"/>
+          </a:fillRef>
+          <a:effectRef idx="0">
+            <a:schemeClr val="accent1"/>
+          </a:effectRef>
+          <a:fontRef idx="minor">
+            <a:schemeClr val="lt1"/>
+          </a:fontRef>
+        </p:style>
+        <p:txBody>
+          <a:bodyPr rtlCol="0" anchor="ctr"/>
+          <a:lstStyle/>
+          <a:p>
+            <a:pPr algn="ctr"/>
+            <a:r>
+              <a:rPr lang="tr-TR" sz="1600" b="1" dirty="0">
+                <a:solidFill>
+                  <a:schemeClr val="tx1">
+                    <a:lumMod val="95000"/>
+                    <a:lumOff val="5000"/>
+                  </a:schemeClr>
+                </a:solidFill>
+              </a:rPr>
+              <a:t>SÜLASİ MÜCERRED</a:t>
+            </a:r>
+          </a:p>
+        </p:txBody>
+      </p:sp>
+      <p:sp>
+        <p:nvSpPr>
+          <p:cNvPr id="3" name="Metin kutusu 2">
+            <a:extLst>
+              <a:ext uri="{FF2B5EF4-FFF2-40B4-BE49-F238E27FC236}">
+                <a16:creationId xmlns:a16="http://schemas.microsoft.com/office/drawing/2014/main" id="{2B147125-4E01-CC10-274A-D5377632FF26}"/>
+              </a:ext>
+            </a:extLst>
+          </p:cNvPr>
+          <p:cNvSpPr txBox="1"/>
+          <p:nvPr/>
+        </p:nvSpPr>
+        <p:spPr>
+          <a:xfrm>
+            <a:off x="240820" y="5664681"/>
+            <a:ext cx="1773691" cy="369332"/>
+          </a:xfrm>
+          <a:prstGeom prst="rect">
+            <a:avLst/>
+          </a:prstGeom>
+          <a:noFill/>
+        </p:spPr>
+        <p:txBody>
+          <a:bodyPr wrap="none" rtlCol="0">
+            <a:spAutoFit/>
+          </a:bodyPr>
+          <a:lstStyle/>
+          <a:p>
+            <a:r>
+              <a:rPr lang="tr-TR" dirty="0" err="1">
+                <a:solidFill>
+                  <a:srgbClr val="FF0000"/>
+                </a:solidFill>
+              </a:rPr>
+              <a:t>Müteaddi</a:t>
+            </a:r>
+            <a:r>
+              <a:rPr lang="tr-TR" dirty="0">
+                <a:solidFill>
+                  <a:srgbClr val="FF0000"/>
+                </a:solidFill>
+              </a:rPr>
+              <a:t> Misal:</a:t>
+            </a:r>
+          </a:p>
+        </p:txBody>
+      </p:sp>
+      <p:sp>
+        <p:nvSpPr>
+          <p:cNvPr id="6" name="Metin kutusu 5">
+            <a:extLst>
+              <a:ext uri="{FF2B5EF4-FFF2-40B4-BE49-F238E27FC236}">
+                <a16:creationId xmlns:a16="http://schemas.microsoft.com/office/drawing/2014/main" id="{21D80D77-1A0E-476E-7690-24A16233BE40}"/>
+              </a:ext>
+            </a:extLst>
+          </p:cNvPr>
+          <p:cNvSpPr txBox="1"/>
+          <p:nvPr/>
+        </p:nvSpPr>
+        <p:spPr>
+          <a:xfrm>
+            <a:off x="240820" y="6039766"/>
+            <a:ext cx="1311215" cy="369332"/>
+          </a:xfrm>
+          <a:prstGeom prst="rect">
+            <a:avLst/>
+          </a:prstGeom>
+          <a:noFill/>
+        </p:spPr>
+        <p:txBody>
+          <a:bodyPr wrap="square" rtlCol="0">
+            <a:spAutoFit/>
+          </a:bodyPr>
+          <a:lstStyle/>
+          <a:p>
+            <a:r>
+              <a:rPr lang="ar-AE" dirty="0"/>
+              <a:t>نَصَرَ زَيْدٌ عَمْرًا</a:t>
+            </a:r>
+            <a:endParaRPr lang="tr-TR" dirty="0"/>
+          </a:p>
+        </p:txBody>
+      </p:sp>
+      <p:sp>
+        <p:nvSpPr>
+          <p:cNvPr id="10" name="Metin kutusu 9">
+            <a:extLst>
+              <a:ext uri="{FF2B5EF4-FFF2-40B4-BE49-F238E27FC236}">
+                <a16:creationId xmlns:a16="http://schemas.microsoft.com/office/drawing/2014/main" id="{63C56A1D-40F8-8769-7BC5-B34DBDE05A2B}"/>
+              </a:ext>
+            </a:extLst>
+          </p:cNvPr>
+          <p:cNvSpPr txBox="1"/>
+          <p:nvPr/>
+        </p:nvSpPr>
+        <p:spPr>
+          <a:xfrm>
+            <a:off x="240820" y="6335609"/>
+            <a:ext cx="2695998" cy="369332"/>
+          </a:xfrm>
+          <a:prstGeom prst="rect">
+            <a:avLst/>
+          </a:prstGeom>
+          <a:noFill/>
+        </p:spPr>
+        <p:txBody>
+          <a:bodyPr wrap="square" rtlCol="0">
+            <a:spAutoFit/>
+          </a:bodyPr>
+          <a:lstStyle/>
+          <a:p>
+            <a:r>
+              <a:rPr lang="tr-TR" dirty="0"/>
+              <a:t>Zeyd </a:t>
+            </a:r>
+            <a:r>
+              <a:rPr lang="tr-TR" dirty="0" err="1"/>
+              <a:t>Amr’a</a:t>
+            </a:r>
+            <a:r>
+              <a:rPr lang="tr-TR" dirty="0"/>
+              <a:t> yardım etti</a:t>
+            </a:r>
+          </a:p>
+        </p:txBody>
+      </p:sp>
+      <p:sp>
+        <p:nvSpPr>
+          <p:cNvPr id="11" name="Metin kutusu 10">
+            <a:extLst>
+              <a:ext uri="{FF2B5EF4-FFF2-40B4-BE49-F238E27FC236}">
+                <a16:creationId xmlns:a16="http://schemas.microsoft.com/office/drawing/2014/main" id="{1EBAD8D9-72E5-CC8E-5DD9-7EE4B2638B0F}"/>
+              </a:ext>
+            </a:extLst>
+          </p:cNvPr>
+          <p:cNvSpPr txBox="1"/>
+          <p:nvPr/>
+        </p:nvSpPr>
+        <p:spPr>
+          <a:xfrm>
+            <a:off x="8278605" y="5591192"/>
+            <a:ext cx="1423403" cy="369332"/>
+          </a:xfrm>
+          <a:prstGeom prst="rect">
+            <a:avLst/>
+          </a:prstGeom>
+          <a:noFill/>
+        </p:spPr>
+        <p:txBody>
+          <a:bodyPr wrap="none" rtlCol="0">
+            <a:spAutoFit/>
+          </a:bodyPr>
+          <a:lstStyle/>
+          <a:p>
+            <a:r>
+              <a:rPr lang="tr-TR" dirty="0">
+                <a:solidFill>
+                  <a:srgbClr val="FF0000"/>
+                </a:solidFill>
+              </a:rPr>
+              <a:t>Lazım Misal:</a:t>
+            </a:r>
+          </a:p>
+        </p:txBody>
+      </p:sp>
+      <p:sp>
+        <p:nvSpPr>
+          <p:cNvPr id="12" name="Metin kutusu 11">
+            <a:extLst>
+              <a:ext uri="{FF2B5EF4-FFF2-40B4-BE49-F238E27FC236}">
+                <a16:creationId xmlns:a16="http://schemas.microsoft.com/office/drawing/2014/main" id="{C3A66D21-AB6C-4185-EC74-550458847AFC}"/>
+              </a:ext>
+            </a:extLst>
+          </p:cNvPr>
+          <p:cNvSpPr txBox="1"/>
+          <p:nvPr/>
+        </p:nvSpPr>
+        <p:spPr>
+          <a:xfrm>
+            <a:off x="8278605" y="5966277"/>
+            <a:ext cx="1311215" cy="369332"/>
+          </a:xfrm>
+          <a:prstGeom prst="rect">
+            <a:avLst/>
+          </a:prstGeom>
+          <a:noFill/>
+        </p:spPr>
+        <p:txBody>
+          <a:bodyPr wrap="square" rtlCol="0">
+            <a:spAutoFit/>
+          </a:bodyPr>
+          <a:lstStyle/>
+          <a:p>
+            <a:r>
+              <a:rPr lang="ar-AE" dirty="0"/>
+              <a:t>خَرَجَ زَيْدٌ</a:t>
+            </a:r>
+            <a:endParaRPr lang="tr-TR" dirty="0"/>
+          </a:p>
+        </p:txBody>
+      </p:sp>
+      <p:sp>
+        <p:nvSpPr>
+          <p:cNvPr id="13" name="Metin kutusu 12">
+            <a:extLst>
+              <a:ext uri="{FF2B5EF4-FFF2-40B4-BE49-F238E27FC236}">
+                <a16:creationId xmlns:a16="http://schemas.microsoft.com/office/drawing/2014/main" id="{EAF837B5-5819-F146-BAC1-C41E005577CC}"/>
+              </a:ext>
+            </a:extLst>
+          </p:cNvPr>
+          <p:cNvSpPr txBox="1"/>
+          <p:nvPr/>
+        </p:nvSpPr>
+        <p:spPr>
+          <a:xfrm>
+            <a:off x="8241821" y="6335609"/>
+            <a:ext cx="2695998" cy="369332"/>
+          </a:xfrm>
+          <a:prstGeom prst="rect">
+            <a:avLst/>
+          </a:prstGeom>
+          <a:noFill/>
+        </p:spPr>
+        <p:txBody>
+          <a:bodyPr wrap="square" rtlCol="0">
+            <a:spAutoFit/>
+          </a:bodyPr>
+          <a:lstStyle/>
+          <a:p>
+            <a:r>
+              <a:rPr lang="tr-TR" dirty="0"/>
+              <a:t>Zeyd Çıktı</a:t>
+            </a:r>
+          </a:p>
+        </p:txBody>
+      </p:sp>
     </p:spTree>
     <p:extLst>
       <p:ext uri="{BB962C8B-B14F-4D97-AF65-F5344CB8AC3E}">
@@ -12772,6 +13077,311 @@
           </a:p>
         </p:txBody>
       </p:sp>
+      <p:sp>
+        <p:nvSpPr>
+          <p:cNvPr id="2" name="İkizkenar Üçgen 1">
+            <a:extLst>
+              <a:ext uri="{FF2B5EF4-FFF2-40B4-BE49-F238E27FC236}">
+                <a16:creationId xmlns:a16="http://schemas.microsoft.com/office/drawing/2014/main" id="{22EF7C76-ADD6-F18B-81A1-3D2A86F1E87E}"/>
+              </a:ext>
+            </a:extLst>
+          </p:cNvPr>
+          <p:cNvSpPr/>
+          <p:nvPr/>
+        </p:nvSpPr>
+        <p:spPr>
+          <a:xfrm rot="18876393">
+            <a:off x="-831487" y="-167882"/>
+            <a:ext cx="2564858" cy="1263088"/>
+          </a:xfrm>
+          <a:prstGeom prst="triangle">
+            <a:avLst>
+              <a:gd name="adj" fmla="val 50246"/>
+            </a:avLst>
+          </a:prstGeom>
+          <a:solidFill>
+            <a:srgbClr val="FFC000"/>
+          </a:solidFill>
+          <a:ln>
+            <a:solidFill>
+              <a:schemeClr val="accent2">
+                <a:lumMod val="60000"/>
+                <a:lumOff val="40000"/>
+              </a:schemeClr>
+            </a:solidFill>
+          </a:ln>
+        </p:spPr>
+        <p:style>
+          <a:lnRef idx="2">
+            <a:schemeClr val="accent1">
+              <a:shade val="15000"/>
+            </a:schemeClr>
+          </a:lnRef>
+          <a:fillRef idx="1">
+            <a:schemeClr val="accent1"/>
+          </a:fillRef>
+          <a:effectRef idx="0">
+            <a:schemeClr val="accent1"/>
+          </a:effectRef>
+          <a:fontRef idx="minor">
+            <a:schemeClr val="lt1"/>
+          </a:fontRef>
+        </p:style>
+        <p:txBody>
+          <a:bodyPr rtlCol="0" anchor="ctr"/>
+          <a:lstStyle/>
+          <a:p>
+            <a:pPr algn="ctr"/>
+            <a:r>
+              <a:rPr lang="tr-TR" sz="1600" b="1" dirty="0">
+                <a:solidFill>
+                  <a:schemeClr val="tx1">
+                    <a:lumMod val="95000"/>
+                    <a:lumOff val="5000"/>
+                  </a:schemeClr>
+                </a:solidFill>
+              </a:rPr>
+              <a:t>SÜLASİ MÜCERRED</a:t>
+            </a:r>
+          </a:p>
+        </p:txBody>
+      </p:sp>
+      <p:sp>
+        <p:nvSpPr>
+          <p:cNvPr id="3" name="Metin kutusu 2">
+            <a:extLst>
+              <a:ext uri="{FF2B5EF4-FFF2-40B4-BE49-F238E27FC236}">
+                <a16:creationId xmlns:a16="http://schemas.microsoft.com/office/drawing/2014/main" id="{9DA41C6F-15D6-3ED4-7DDC-57F7A424ECA7}"/>
+              </a:ext>
+            </a:extLst>
+          </p:cNvPr>
+          <p:cNvSpPr txBox="1"/>
+          <p:nvPr/>
+        </p:nvSpPr>
+        <p:spPr>
+          <a:xfrm>
+            <a:off x="240820" y="5664681"/>
+            <a:ext cx="1773691" cy="369332"/>
+          </a:xfrm>
+          <a:prstGeom prst="rect">
+            <a:avLst/>
+          </a:prstGeom>
+          <a:noFill/>
+        </p:spPr>
+        <p:txBody>
+          <a:bodyPr wrap="none" rtlCol="0">
+            <a:spAutoFit/>
+          </a:bodyPr>
+          <a:lstStyle/>
+          <a:p>
+            <a:r>
+              <a:rPr lang="tr-TR" dirty="0" err="1">
+                <a:solidFill>
+                  <a:srgbClr val="FF0000"/>
+                </a:solidFill>
+              </a:rPr>
+              <a:t>Müteaddi</a:t>
+            </a:r>
+            <a:r>
+              <a:rPr lang="tr-TR" dirty="0">
+                <a:solidFill>
+                  <a:srgbClr val="FF0000"/>
+                </a:solidFill>
+              </a:rPr>
+              <a:t> Misal:</a:t>
+            </a:r>
+          </a:p>
+        </p:txBody>
+      </p:sp>
+      <p:sp>
+        <p:nvSpPr>
+          <p:cNvPr id="6" name="Metin kutusu 5">
+            <a:extLst>
+              <a:ext uri="{FF2B5EF4-FFF2-40B4-BE49-F238E27FC236}">
+                <a16:creationId xmlns:a16="http://schemas.microsoft.com/office/drawing/2014/main" id="{6EFDBE70-7132-C9C0-3C2E-5A6F9A0C90BC}"/>
+              </a:ext>
+            </a:extLst>
+          </p:cNvPr>
+          <p:cNvSpPr txBox="1"/>
+          <p:nvPr/>
+        </p:nvSpPr>
+        <p:spPr>
+          <a:xfrm>
+            <a:off x="240820" y="6039766"/>
+            <a:ext cx="1475837" cy="369332"/>
+          </a:xfrm>
+          <a:prstGeom prst="rect">
+            <a:avLst/>
+          </a:prstGeom>
+          <a:noFill/>
+        </p:spPr>
+        <p:txBody>
+          <a:bodyPr wrap="square" rtlCol="0">
+            <a:spAutoFit/>
+          </a:bodyPr>
+          <a:lstStyle/>
+          <a:p>
+            <a:r>
+              <a:rPr lang="ar-AE" dirty="0"/>
+              <a:t>ضَرَبَ زَيْدٌ عَمْرًا</a:t>
+            </a:r>
+            <a:endParaRPr lang="tr-TR" dirty="0"/>
+          </a:p>
+        </p:txBody>
+      </p:sp>
+      <p:sp>
+        <p:nvSpPr>
+          <p:cNvPr id="10" name="Metin kutusu 9">
+            <a:extLst>
+              <a:ext uri="{FF2B5EF4-FFF2-40B4-BE49-F238E27FC236}">
+                <a16:creationId xmlns:a16="http://schemas.microsoft.com/office/drawing/2014/main" id="{C6BA0B78-A413-A9B3-0852-A18812E26E92}"/>
+              </a:ext>
+            </a:extLst>
+          </p:cNvPr>
+          <p:cNvSpPr txBox="1"/>
+          <p:nvPr/>
+        </p:nvSpPr>
+        <p:spPr>
+          <a:xfrm>
+            <a:off x="240820" y="6335609"/>
+            <a:ext cx="2695998" cy="369332"/>
+          </a:xfrm>
+          <a:prstGeom prst="rect">
+            <a:avLst/>
+          </a:prstGeom>
+          <a:noFill/>
+        </p:spPr>
+        <p:txBody>
+          <a:bodyPr wrap="square" rtlCol="0">
+            <a:spAutoFit/>
+          </a:bodyPr>
+          <a:lstStyle/>
+          <a:p>
+            <a:r>
+              <a:rPr lang="tr-TR" dirty="0"/>
+              <a:t>Zeyd </a:t>
+            </a:r>
+            <a:r>
+              <a:rPr lang="tr-TR" dirty="0" err="1"/>
+              <a:t>Amr’a</a:t>
+            </a:r>
+            <a:r>
+              <a:rPr lang="tr-TR" dirty="0"/>
+              <a:t> dövdü.</a:t>
+            </a:r>
+          </a:p>
+        </p:txBody>
+      </p:sp>
+      <p:sp>
+        <p:nvSpPr>
+          <p:cNvPr id="11" name="Metin kutusu 10">
+            <a:extLst>
+              <a:ext uri="{FF2B5EF4-FFF2-40B4-BE49-F238E27FC236}">
+                <a16:creationId xmlns:a16="http://schemas.microsoft.com/office/drawing/2014/main" id="{B32C13A2-EAF2-2F66-867E-26F5304826A8}"/>
+              </a:ext>
+            </a:extLst>
+          </p:cNvPr>
+          <p:cNvSpPr txBox="1"/>
+          <p:nvPr/>
+        </p:nvSpPr>
+        <p:spPr>
+          <a:xfrm>
+            <a:off x="8278605" y="5591192"/>
+            <a:ext cx="1423403" cy="369332"/>
+          </a:xfrm>
+          <a:prstGeom prst="rect">
+            <a:avLst/>
+          </a:prstGeom>
+          <a:noFill/>
+        </p:spPr>
+        <p:txBody>
+          <a:bodyPr wrap="none" rtlCol="0">
+            <a:spAutoFit/>
+          </a:bodyPr>
+          <a:lstStyle/>
+          <a:p>
+            <a:r>
+              <a:rPr lang="tr-TR" dirty="0">
+                <a:solidFill>
+                  <a:srgbClr val="FF0000"/>
+                </a:solidFill>
+              </a:rPr>
+              <a:t>Lazım Misal:</a:t>
+            </a:r>
+          </a:p>
+        </p:txBody>
+      </p:sp>
+      <p:sp>
+        <p:nvSpPr>
+          <p:cNvPr id="12" name="Metin kutusu 11">
+            <a:extLst>
+              <a:ext uri="{FF2B5EF4-FFF2-40B4-BE49-F238E27FC236}">
+                <a16:creationId xmlns:a16="http://schemas.microsoft.com/office/drawing/2014/main" id="{EBDDAC7E-6EA9-EE1C-343D-92D944D93833}"/>
+              </a:ext>
+            </a:extLst>
+          </p:cNvPr>
+          <p:cNvSpPr txBox="1"/>
+          <p:nvPr/>
+        </p:nvSpPr>
+        <p:spPr>
+          <a:xfrm>
+            <a:off x="8278605" y="5966277"/>
+            <a:ext cx="1311215" cy="369332"/>
+          </a:xfrm>
+          <a:prstGeom prst="rect">
+            <a:avLst/>
+          </a:prstGeom>
+          <a:noFill/>
+        </p:spPr>
+        <p:txBody>
+          <a:bodyPr wrap="square" rtlCol="0">
+            <a:spAutoFit/>
+          </a:bodyPr>
+          <a:lstStyle/>
+          <a:p>
+            <a:r>
+              <a:rPr lang="ar-AE" dirty="0"/>
+              <a:t>جَلَسَ زَيْدٌ</a:t>
+            </a:r>
+            <a:endParaRPr lang="tr-TR" dirty="0"/>
+          </a:p>
+        </p:txBody>
+      </p:sp>
+      <p:sp>
+        <p:nvSpPr>
+          <p:cNvPr id="13" name="Metin kutusu 12">
+            <a:extLst>
+              <a:ext uri="{FF2B5EF4-FFF2-40B4-BE49-F238E27FC236}">
+                <a16:creationId xmlns:a16="http://schemas.microsoft.com/office/drawing/2014/main" id="{92C07B7E-C743-798E-D1B5-79C98FC58A70}"/>
+              </a:ext>
+            </a:extLst>
+          </p:cNvPr>
+          <p:cNvSpPr txBox="1"/>
+          <p:nvPr/>
+        </p:nvSpPr>
+        <p:spPr>
+          <a:xfrm>
+            <a:off x="8241821" y="6335609"/>
+            <a:ext cx="2695998" cy="369332"/>
+          </a:xfrm>
+          <a:prstGeom prst="rect">
+            <a:avLst/>
+          </a:prstGeom>
+          <a:noFill/>
+        </p:spPr>
+        <p:txBody>
+          <a:bodyPr wrap="square" rtlCol="0">
+            <a:spAutoFit/>
+          </a:bodyPr>
+          <a:lstStyle/>
+          <a:p>
+            <a:r>
+              <a:rPr lang="tr-TR" dirty="0"/>
+              <a:t>Zeyd Oturdu.</a:t>
+            </a:r>
+          </a:p>
+        </p:txBody>
+      </p:sp>
     </p:spTree>
     <p:extLst>
       <p:ext uri="{BB962C8B-B14F-4D97-AF65-F5344CB8AC3E}">
@@ -13327,6 +13937,303 @@
           </a:p>
         </p:txBody>
       </p:sp>
+      <p:sp>
+        <p:nvSpPr>
+          <p:cNvPr id="2" name="İkizkenar Üçgen 1">
+            <a:extLst>
+              <a:ext uri="{FF2B5EF4-FFF2-40B4-BE49-F238E27FC236}">
+                <a16:creationId xmlns:a16="http://schemas.microsoft.com/office/drawing/2014/main" id="{0A3B0587-1DA3-650E-68C0-1B0E31956F41}"/>
+              </a:ext>
+            </a:extLst>
+          </p:cNvPr>
+          <p:cNvSpPr/>
+          <p:nvPr/>
+        </p:nvSpPr>
+        <p:spPr>
+          <a:xfrm rot="18876393">
+            <a:off x="-831487" y="-167882"/>
+            <a:ext cx="2564858" cy="1263088"/>
+          </a:xfrm>
+          <a:prstGeom prst="triangle">
+            <a:avLst>
+              <a:gd name="adj" fmla="val 50246"/>
+            </a:avLst>
+          </a:prstGeom>
+          <a:solidFill>
+            <a:srgbClr val="FFC000"/>
+          </a:solidFill>
+          <a:ln>
+            <a:solidFill>
+              <a:schemeClr val="accent2">
+                <a:lumMod val="60000"/>
+                <a:lumOff val="40000"/>
+              </a:schemeClr>
+            </a:solidFill>
+          </a:ln>
+        </p:spPr>
+        <p:style>
+          <a:lnRef idx="2">
+            <a:schemeClr val="accent1">
+              <a:shade val="15000"/>
+            </a:schemeClr>
+          </a:lnRef>
+          <a:fillRef idx="1">
+            <a:schemeClr val="accent1"/>
+          </a:fillRef>
+          <a:effectRef idx="0">
+            <a:schemeClr val="accent1"/>
+          </a:effectRef>
+          <a:fontRef idx="minor">
+            <a:schemeClr val="lt1"/>
+          </a:fontRef>
+        </p:style>
+        <p:txBody>
+          <a:bodyPr rtlCol="0" anchor="ctr"/>
+          <a:lstStyle/>
+          <a:p>
+            <a:pPr algn="ctr"/>
+            <a:r>
+              <a:rPr lang="tr-TR" sz="1600" b="1" dirty="0">
+                <a:solidFill>
+                  <a:schemeClr val="tx1">
+                    <a:lumMod val="95000"/>
+                    <a:lumOff val="5000"/>
+                  </a:schemeClr>
+                </a:solidFill>
+              </a:rPr>
+              <a:t>SÜLASİ MÜCERRED</a:t>
+            </a:r>
+          </a:p>
+        </p:txBody>
+      </p:sp>
+      <p:sp>
+        <p:nvSpPr>
+          <p:cNvPr id="10" name="Metin kutusu 9">
+            <a:extLst>
+              <a:ext uri="{FF2B5EF4-FFF2-40B4-BE49-F238E27FC236}">
+                <a16:creationId xmlns:a16="http://schemas.microsoft.com/office/drawing/2014/main" id="{2BB5E661-615D-F0BF-DE5D-27770214D945}"/>
+              </a:ext>
+            </a:extLst>
+          </p:cNvPr>
+          <p:cNvSpPr txBox="1"/>
+          <p:nvPr/>
+        </p:nvSpPr>
+        <p:spPr>
+          <a:xfrm>
+            <a:off x="240820" y="5664681"/>
+            <a:ext cx="1773691" cy="369332"/>
+          </a:xfrm>
+          <a:prstGeom prst="rect">
+            <a:avLst/>
+          </a:prstGeom>
+          <a:noFill/>
+        </p:spPr>
+        <p:txBody>
+          <a:bodyPr wrap="none" rtlCol="0">
+            <a:spAutoFit/>
+          </a:bodyPr>
+          <a:lstStyle/>
+          <a:p>
+            <a:r>
+              <a:rPr lang="tr-TR" dirty="0" err="1">
+                <a:solidFill>
+                  <a:srgbClr val="FF0000"/>
+                </a:solidFill>
+              </a:rPr>
+              <a:t>Müteaddi</a:t>
+            </a:r>
+            <a:r>
+              <a:rPr lang="tr-TR" dirty="0">
+                <a:solidFill>
+                  <a:srgbClr val="FF0000"/>
+                </a:solidFill>
+              </a:rPr>
+              <a:t> Misal:</a:t>
+            </a:r>
+          </a:p>
+        </p:txBody>
+      </p:sp>
+      <p:sp>
+        <p:nvSpPr>
+          <p:cNvPr id="11" name="Metin kutusu 10">
+            <a:extLst>
+              <a:ext uri="{FF2B5EF4-FFF2-40B4-BE49-F238E27FC236}">
+                <a16:creationId xmlns:a16="http://schemas.microsoft.com/office/drawing/2014/main" id="{BA0F4FD8-6BD7-F4EC-0F3B-A4D642EE8F03}"/>
+              </a:ext>
+            </a:extLst>
+          </p:cNvPr>
+          <p:cNvSpPr txBox="1"/>
+          <p:nvPr/>
+        </p:nvSpPr>
+        <p:spPr>
+          <a:xfrm>
+            <a:off x="240820" y="6039766"/>
+            <a:ext cx="1475837" cy="369332"/>
+          </a:xfrm>
+          <a:prstGeom prst="rect">
+            <a:avLst/>
+          </a:prstGeom>
+          <a:noFill/>
+        </p:spPr>
+        <p:txBody>
+          <a:bodyPr wrap="square" rtlCol="0">
+            <a:spAutoFit/>
+          </a:bodyPr>
+          <a:lstStyle/>
+          <a:p>
+            <a:r>
+              <a:rPr lang="ar-AE" dirty="0"/>
+              <a:t>عَلِمَ زَيْدٌ الْمَسْئَلَةَ</a:t>
+            </a:r>
+            <a:endParaRPr lang="tr-TR" dirty="0"/>
+          </a:p>
+        </p:txBody>
+      </p:sp>
+      <p:sp>
+        <p:nvSpPr>
+          <p:cNvPr id="12" name="Metin kutusu 11">
+            <a:extLst>
+              <a:ext uri="{FF2B5EF4-FFF2-40B4-BE49-F238E27FC236}">
+                <a16:creationId xmlns:a16="http://schemas.microsoft.com/office/drawing/2014/main" id="{27D84F06-B658-82EE-F45C-53D13729247E}"/>
+              </a:ext>
+            </a:extLst>
+          </p:cNvPr>
+          <p:cNvSpPr txBox="1"/>
+          <p:nvPr/>
+        </p:nvSpPr>
+        <p:spPr>
+          <a:xfrm>
+            <a:off x="240820" y="6335609"/>
+            <a:ext cx="2695998" cy="369332"/>
+          </a:xfrm>
+          <a:prstGeom prst="rect">
+            <a:avLst/>
+          </a:prstGeom>
+          <a:noFill/>
+        </p:spPr>
+        <p:txBody>
+          <a:bodyPr wrap="square" rtlCol="0">
+            <a:spAutoFit/>
+          </a:bodyPr>
+          <a:lstStyle/>
+          <a:p>
+            <a:r>
+              <a:rPr lang="tr-TR" dirty="0"/>
+              <a:t>Zeyd Kapıyı Açtı.</a:t>
+            </a:r>
+          </a:p>
+        </p:txBody>
+      </p:sp>
+      <p:sp>
+        <p:nvSpPr>
+          <p:cNvPr id="13" name="Metin kutusu 12">
+            <a:extLst>
+              <a:ext uri="{FF2B5EF4-FFF2-40B4-BE49-F238E27FC236}">
+                <a16:creationId xmlns:a16="http://schemas.microsoft.com/office/drawing/2014/main" id="{C6C309D4-3DEA-672F-B6D2-BC2250314BF3}"/>
+              </a:ext>
+            </a:extLst>
+          </p:cNvPr>
+          <p:cNvSpPr txBox="1"/>
+          <p:nvPr/>
+        </p:nvSpPr>
+        <p:spPr>
+          <a:xfrm>
+            <a:off x="8278605" y="5591192"/>
+            <a:ext cx="1423403" cy="369332"/>
+          </a:xfrm>
+          <a:prstGeom prst="rect">
+            <a:avLst/>
+          </a:prstGeom>
+          <a:noFill/>
+        </p:spPr>
+        <p:txBody>
+          <a:bodyPr wrap="none" rtlCol="0">
+            <a:spAutoFit/>
+          </a:bodyPr>
+          <a:lstStyle/>
+          <a:p>
+            <a:r>
+              <a:rPr lang="tr-TR" dirty="0">
+                <a:solidFill>
+                  <a:srgbClr val="FF0000"/>
+                </a:solidFill>
+              </a:rPr>
+              <a:t>Lazım Misal:</a:t>
+            </a:r>
+          </a:p>
+        </p:txBody>
+      </p:sp>
+      <p:sp>
+        <p:nvSpPr>
+          <p:cNvPr id="14" name="Metin kutusu 13">
+            <a:extLst>
+              <a:ext uri="{FF2B5EF4-FFF2-40B4-BE49-F238E27FC236}">
+                <a16:creationId xmlns:a16="http://schemas.microsoft.com/office/drawing/2014/main" id="{C6EB190F-D272-0356-955E-7CACD376EAE8}"/>
+              </a:ext>
+            </a:extLst>
+          </p:cNvPr>
+          <p:cNvSpPr txBox="1"/>
+          <p:nvPr/>
+        </p:nvSpPr>
+        <p:spPr>
+          <a:xfrm>
+            <a:off x="8278605" y="5966277"/>
+            <a:ext cx="1311215" cy="369332"/>
+          </a:xfrm>
+          <a:prstGeom prst="rect">
+            <a:avLst/>
+          </a:prstGeom>
+          <a:noFill/>
+        </p:spPr>
+        <p:txBody>
+          <a:bodyPr wrap="square" rtlCol="0">
+            <a:spAutoFit/>
+          </a:bodyPr>
+          <a:lstStyle/>
+          <a:p>
+            <a:r>
+              <a:rPr lang="ar-AE" dirty="0"/>
+              <a:t>ذَهَبَ زَيْدٌ</a:t>
+            </a:r>
+            <a:endParaRPr lang="tr-TR" dirty="0"/>
+          </a:p>
+        </p:txBody>
+      </p:sp>
+      <p:sp>
+        <p:nvSpPr>
+          <p:cNvPr id="15" name="Metin kutusu 14">
+            <a:extLst>
+              <a:ext uri="{FF2B5EF4-FFF2-40B4-BE49-F238E27FC236}">
+                <a16:creationId xmlns:a16="http://schemas.microsoft.com/office/drawing/2014/main" id="{048A75C6-617B-B64F-7CEB-869FB33D1A78}"/>
+              </a:ext>
+            </a:extLst>
+          </p:cNvPr>
+          <p:cNvSpPr txBox="1"/>
+          <p:nvPr/>
+        </p:nvSpPr>
+        <p:spPr>
+          <a:xfrm>
+            <a:off x="8241821" y="6335609"/>
+            <a:ext cx="2695998" cy="369332"/>
+          </a:xfrm>
+          <a:prstGeom prst="rect">
+            <a:avLst/>
+          </a:prstGeom>
+          <a:noFill/>
+        </p:spPr>
+        <p:txBody>
+          <a:bodyPr wrap="square" rtlCol="0">
+            <a:spAutoFit/>
+          </a:bodyPr>
+          <a:lstStyle/>
+          <a:p>
+            <a:r>
+              <a:rPr lang="tr-TR" dirty="0"/>
+              <a:t>Zeyd Gitti.</a:t>
+            </a:r>
+          </a:p>
+        </p:txBody>
+      </p:sp>
     </p:spTree>
     <p:extLst>
       <p:ext uri="{BB962C8B-B14F-4D97-AF65-F5344CB8AC3E}">
@@ -13862,6 +14769,311 @@
           </a:p>
         </p:txBody>
       </p:sp>
+      <p:sp>
+        <p:nvSpPr>
+          <p:cNvPr id="2" name="İkizkenar Üçgen 1">
+            <a:extLst>
+              <a:ext uri="{FF2B5EF4-FFF2-40B4-BE49-F238E27FC236}">
+                <a16:creationId xmlns:a16="http://schemas.microsoft.com/office/drawing/2014/main" id="{10A421E6-10C5-D330-E2B8-BA9BC886695A}"/>
+              </a:ext>
+            </a:extLst>
+          </p:cNvPr>
+          <p:cNvSpPr/>
+          <p:nvPr/>
+        </p:nvSpPr>
+        <p:spPr>
+          <a:xfrm rot="18876393">
+            <a:off x="-831487" y="-167882"/>
+            <a:ext cx="2564858" cy="1263088"/>
+          </a:xfrm>
+          <a:prstGeom prst="triangle">
+            <a:avLst>
+              <a:gd name="adj" fmla="val 50246"/>
+            </a:avLst>
+          </a:prstGeom>
+          <a:solidFill>
+            <a:srgbClr val="FFC000"/>
+          </a:solidFill>
+          <a:ln>
+            <a:solidFill>
+              <a:schemeClr val="accent2">
+                <a:lumMod val="60000"/>
+                <a:lumOff val="40000"/>
+              </a:schemeClr>
+            </a:solidFill>
+          </a:ln>
+        </p:spPr>
+        <p:style>
+          <a:lnRef idx="2">
+            <a:schemeClr val="accent1">
+              <a:shade val="15000"/>
+            </a:schemeClr>
+          </a:lnRef>
+          <a:fillRef idx="1">
+            <a:schemeClr val="accent1"/>
+          </a:fillRef>
+          <a:effectRef idx="0">
+            <a:schemeClr val="accent1"/>
+          </a:effectRef>
+          <a:fontRef idx="minor">
+            <a:schemeClr val="lt1"/>
+          </a:fontRef>
+        </p:style>
+        <p:txBody>
+          <a:bodyPr rtlCol="0" anchor="ctr"/>
+          <a:lstStyle/>
+          <a:p>
+            <a:pPr algn="ctr"/>
+            <a:r>
+              <a:rPr lang="tr-TR" sz="1600" b="1" dirty="0">
+                <a:solidFill>
+                  <a:schemeClr val="tx1">
+                    <a:lumMod val="95000"/>
+                    <a:lumOff val="5000"/>
+                  </a:schemeClr>
+                </a:solidFill>
+              </a:rPr>
+              <a:t>SÜLASİ MÜCERRED</a:t>
+            </a:r>
+          </a:p>
+        </p:txBody>
+      </p:sp>
+      <p:sp>
+        <p:nvSpPr>
+          <p:cNvPr id="11" name="Metin kutusu 10">
+            <a:extLst>
+              <a:ext uri="{FF2B5EF4-FFF2-40B4-BE49-F238E27FC236}">
+                <a16:creationId xmlns:a16="http://schemas.microsoft.com/office/drawing/2014/main" id="{5A82DAE2-92BF-D746-F4CE-C0D5EB8517DA}"/>
+              </a:ext>
+            </a:extLst>
+          </p:cNvPr>
+          <p:cNvSpPr txBox="1"/>
+          <p:nvPr/>
+        </p:nvSpPr>
+        <p:spPr>
+          <a:xfrm>
+            <a:off x="240820" y="5664681"/>
+            <a:ext cx="1773691" cy="369332"/>
+          </a:xfrm>
+          <a:prstGeom prst="rect">
+            <a:avLst/>
+          </a:prstGeom>
+          <a:noFill/>
+        </p:spPr>
+        <p:txBody>
+          <a:bodyPr wrap="none" rtlCol="0">
+            <a:spAutoFit/>
+          </a:bodyPr>
+          <a:lstStyle/>
+          <a:p>
+            <a:r>
+              <a:rPr lang="tr-TR" dirty="0" err="1">
+                <a:solidFill>
+                  <a:srgbClr val="FF0000"/>
+                </a:solidFill>
+              </a:rPr>
+              <a:t>Müteaddi</a:t>
+            </a:r>
+            <a:r>
+              <a:rPr lang="tr-TR" dirty="0">
+                <a:solidFill>
+                  <a:srgbClr val="FF0000"/>
+                </a:solidFill>
+              </a:rPr>
+              <a:t> Misal:</a:t>
+            </a:r>
+          </a:p>
+        </p:txBody>
+      </p:sp>
+      <p:sp>
+        <p:nvSpPr>
+          <p:cNvPr id="12" name="Metin kutusu 11">
+            <a:extLst>
+              <a:ext uri="{FF2B5EF4-FFF2-40B4-BE49-F238E27FC236}">
+                <a16:creationId xmlns:a16="http://schemas.microsoft.com/office/drawing/2014/main" id="{722AF0A4-147A-A85F-B933-B3949AAE23A2}"/>
+              </a:ext>
+            </a:extLst>
+          </p:cNvPr>
+          <p:cNvSpPr txBox="1"/>
+          <p:nvPr/>
+        </p:nvSpPr>
+        <p:spPr>
+          <a:xfrm>
+            <a:off x="240820" y="6039766"/>
+            <a:ext cx="1475837" cy="369332"/>
+          </a:xfrm>
+          <a:prstGeom prst="rect">
+            <a:avLst/>
+          </a:prstGeom>
+          <a:noFill/>
+        </p:spPr>
+        <p:txBody>
+          <a:bodyPr wrap="square" rtlCol="0">
+            <a:spAutoFit/>
+          </a:bodyPr>
+          <a:lstStyle/>
+          <a:p>
+            <a:r>
+              <a:rPr lang="ar-AE" dirty="0"/>
+              <a:t>عَلِمَ زَيْدٌ الْمَسْئَلَةَ</a:t>
+            </a:r>
+            <a:endParaRPr lang="tr-TR" dirty="0"/>
+          </a:p>
+        </p:txBody>
+      </p:sp>
+      <p:sp>
+        <p:nvSpPr>
+          <p:cNvPr id="13" name="Metin kutusu 12">
+            <a:extLst>
+              <a:ext uri="{FF2B5EF4-FFF2-40B4-BE49-F238E27FC236}">
+                <a16:creationId xmlns:a16="http://schemas.microsoft.com/office/drawing/2014/main" id="{46427ECC-4AB4-699A-4D04-A7DC889F9DD7}"/>
+              </a:ext>
+            </a:extLst>
+          </p:cNvPr>
+          <p:cNvSpPr txBox="1"/>
+          <p:nvPr/>
+        </p:nvSpPr>
+        <p:spPr>
+          <a:xfrm>
+            <a:off x="240820" y="6335609"/>
+            <a:ext cx="2695998" cy="369332"/>
+          </a:xfrm>
+          <a:prstGeom prst="rect">
+            <a:avLst/>
+          </a:prstGeom>
+          <a:noFill/>
+        </p:spPr>
+        <p:txBody>
+          <a:bodyPr wrap="square" rtlCol="0">
+            <a:spAutoFit/>
+          </a:bodyPr>
+          <a:lstStyle/>
+          <a:p>
+            <a:r>
+              <a:rPr lang="tr-TR" dirty="0"/>
+              <a:t>Zeyd</a:t>
+            </a:r>
+            <a:r>
+              <a:rPr lang="ar-AE" dirty="0"/>
+              <a:t> </a:t>
+            </a:r>
+            <a:r>
+              <a:rPr lang="tr-TR" dirty="0"/>
+              <a:t>Meseleyi Bildi.</a:t>
+            </a:r>
+          </a:p>
+        </p:txBody>
+      </p:sp>
+      <p:sp>
+        <p:nvSpPr>
+          <p:cNvPr id="14" name="Metin kutusu 13">
+            <a:extLst>
+              <a:ext uri="{FF2B5EF4-FFF2-40B4-BE49-F238E27FC236}">
+                <a16:creationId xmlns:a16="http://schemas.microsoft.com/office/drawing/2014/main" id="{8569DA46-16CC-2F1D-2EAD-1590BEB84664}"/>
+              </a:ext>
+            </a:extLst>
+          </p:cNvPr>
+          <p:cNvSpPr txBox="1"/>
+          <p:nvPr/>
+        </p:nvSpPr>
+        <p:spPr>
+          <a:xfrm>
+            <a:off x="8278605" y="5591192"/>
+            <a:ext cx="1423403" cy="369332"/>
+          </a:xfrm>
+          <a:prstGeom prst="rect">
+            <a:avLst/>
+          </a:prstGeom>
+          <a:noFill/>
+        </p:spPr>
+        <p:txBody>
+          <a:bodyPr wrap="none" rtlCol="0">
+            <a:spAutoFit/>
+          </a:bodyPr>
+          <a:lstStyle/>
+          <a:p>
+            <a:r>
+              <a:rPr lang="tr-TR" dirty="0">
+                <a:solidFill>
+                  <a:srgbClr val="FF0000"/>
+                </a:solidFill>
+              </a:rPr>
+              <a:t>Lazım Misal:</a:t>
+            </a:r>
+          </a:p>
+        </p:txBody>
+      </p:sp>
+      <p:sp>
+        <p:nvSpPr>
+          <p:cNvPr id="15" name="Metin kutusu 14">
+            <a:extLst>
+              <a:ext uri="{FF2B5EF4-FFF2-40B4-BE49-F238E27FC236}">
+                <a16:creationId xmlns:a16="http://schemas.microsoft.com/office/drawing/2014/main" id="{896BEBE1-E1B7-2BB9-1A3F-0A9C4369DDC7}"/>
+              </a:ext>
+            </a:extLst>
+          </p:cNvPr>
+          <p:cNvSpPr txBox="1"/>
+          <p:nvPr/>
+        </p:nvSpPr>
+        <p:spPr>
+          <a:xfrm>
+            <a:off x="8278605" y="5966277"/>
+            <a:ext cx="1311215" cy="369332"/>
+          </a:xfrm>
+          <a:prstGeom prst="rect">
+            <a:avLst/>
+          </a:prstGeom>
+          <a:noFill/>
+        </p:spPr>
+        <p:txBody>
+          <a:bodyPr wrap="square" rtlCol="0">
+            <a:spAutoFit/>
+          </a:bodyPr>
+          <a:lstStyle/>
+          <a:p>
+            <a:r>
+              <a:rPr lang="ar-AE" dirty="0"/>
+              <a:t>وَجِلَ زَيْدٌ</a:t>
+            </a:r>
+            <a:endParaRPr lang="tr-TR" dirty="0"/>
+          </a:p>
+        </p:txBody>
+      </p:sp>
+      <p:sp>
+        <p:nvSpPr>
+          <p:cNvPr id="16" name="Metin kutusu 15">
+            <a:extLst>
+              <a:ext uri="{FF2B5EF4-FFF2-40B4-BE49-F238E27FC236}">
+                <a16:creationId xmlns:a16="http://schemas.microsoft.com/office/drawing/2014/main" id="{FB5B4BDD-81DD-2605-42BE-A7DE838E3EDC}"/>
+              </a:ext>
+            </a:extLst>
+          </p:cNvPr>
+          <p:cNvSpPr txBox="1"/>
+          <p:nvPr/>
+        </p:nvSpPr>
+        <p:spPr>
+          <a:xfrm>
+            <a:off x="8241821" y="6335609"/>
+            <a:ext cx="2695998" cy="369332"/>
+          </a:xfrm>
+          <a:prstGeom prst="rect">
+            <a:avLst/>
+          </a:prstGeom>
+          <a:noFill/>
+        </p:spPr>
+        <p:txBody>
+          <a:bodyPr wrap="square" rtlCol="0">
+            <a:spAutoFit/>
+          </a:bodyPr>
+          <a:lstStyle/>
+          <a:p>
+            <a:r>
+              <a:rPr lang="tr-TR" dirty="0"/>
+              <a:t>Zeyd Korktu.</a:t>
+            </a:r>
+          </a:p>
+        </p:txBody>
+      </p:sp>
     </p:spTree>
     <p:extLst>
       <p:ext uri="{BB962C8B-B14F-4D97-AF65-F5344CB8AC3E}">
@@ -14365,6 +15577,185 @@
           </a:p>
         </p:txBody>
       </p:sp>
+      <p:sp>
+        <p:nvSpPr>
+          <p:cNvPr id="2" name="İkizkenar Üçgen 1">
+            <a:extLst>
+              <a:ext uri="{FF2B5EF4-FFF2-40B4-BE49-F238E27FC236}">
+                <a16:creationId xmlns:a16="http://schemas.microsoft.com/office/drawing/2014/main" id="{B54AC9A5-0960-F7FF-51B4-16170C39A796}"/>
+              </a:ext>
+            </a:extLst>
+          </p:cNvPr>
+          <p:cNvSpPr/>
+          <p:nvPr/>
+        </p:nvSpPr>
+        <p:spPr>
+          <a:xfrm rot="18876393">
+            <a:off x="-831487" y="-167882"/>
+            <a:ext cx="2564858" cy="1263088"/>
+          </a:xfrm>
+          <a:prstGeom prst="triangle">
+            <a:avLst>
+              <a:gd name="adj" fmla="val 50246"/>
+            </a:avLst>
+          </a:prstGeom>
+          <a:solidFill>
+            <a:srgbClr val="FFC000"/>
+          </a:solidFill>
+          <a:ln>
+            <a:solidFill>
+              <a:schemeClr val="accent2">
+                <a:lumMod val="60000"/>
+                <a:lumOff val="40000"/>
+              </a:schemeClr>
+            </a:solidFill>
+          </a:ln>
+        </p:spPr>
+        <p:style>
+          <a:lnRef idx="2">
+            <a:schemeClr val="accent1">
+              <a:shade val="15000"/>
+            </a:schemeClr>
+          </a:lnRef>
+          <a:fillRef idx="1">
+            <a:schemeClr val="accent1"/>
+          </a:fillRef>
+          <a:effectRef idx="0">
+            <a:schemeClr val="accent1"/>
+          </a:effectRef>
+          <a:fontRef idx="minor">
+            <a:schemeClr val="lt1"/>
+          </a:fontRef>
+        </p:style>
+        <p:txBody>
+          <a:bodyPr rtlCol="0" anchor="ctr"/>
+          <a:lstStyle/>
+          <a:p>
+            <a:pPr algn="ctr"/>
+            <a:r>
+              <a:rPr lang="tr-TR" sz="1600" b="1" dirty="0">
+                <a:solidFill>
+                  <a:schemeClr val="tx1">
+                    <a:lumMod val="95000"/>
+                    <a:lumOff val="5000"/>
+                  </a:schemeClr>
+                </a:solidFill>
+              </a:rPr>
+              <a:t>SÜLASİ MÜCERRED</a:t>
+            </a:r>
+          </a:p>
+        </p:txBody>
+      </p:sp>
+      <p:sp>
+        <p:nvSpPr>
+          <p:cNvPr id="17" name="Metin kutusu 16">
+            <a:extLst>
+              <a:ext uri="{FF2B5EF4-FFF2-40B4-BE49-F238E27FC236}">
+                <a16:creationId xmlns:a16="http://schemas.microsoft.com/office/drawing/2014/main" id="{7EB4AB0C-D114-5DBD-BD46-1962650B88B5}"/>
+              </a:ext>
+            </a:extLst>
+          </p:cNvPr>
+          <p:cNvSpPr txBox="1"/>
+          <p:nvPr/>
+        </p:nvSpPr>
+        <p:spPr>
+          <a:xfrm>
+            <a:off x="8278605" y="5591192"/>
+            <a:ext cx="1423403" cy="369332"/>
+          </a:xfrm>
+          <a:prstGeom prst="rect">
+            <a:avLst/>
+          </a:prstGeom>
+          <a:noFill/>
+        </p:spPr>
+        <p:txBody>
+          <a:bodyPr wrap="none" rtlCol="0">
+            <a:spAutoFit/>
+          </a:bodyPr>
+          <a:lstStyle/>
+          <a:p>
+            <a:r>
+              <a:rPr lang="tr-TR" dirty="0">
+                <a:solidFill>
+                  <a:srgbClr val="FF0000"/>
+                </a:solidFill>
+              </a:rPr>
+              <a:t>Lazım Misal:</a:t>
+            </a:r>
+          </a:p>
+        </p:txBody>
+      </p:sp>
+      <p:sp>
+        <p:nvSpPr>
+          <p:cNvPr id="18" name="Metin kutusu 17">
+            <a:extLst>
+              <a:ext uri="{FF2B5EF4-FFF2-40B4-BE49-F238E27FC236}">
+                <a16:creationId xmlns:a16="http://schemas.microsoft.com/office/drawing/2014/main" id="{2D93296C-2C90-D200-E369-5AFED55B236E}"/>
+              </a:ext>
+            </a:extLst>
+          </p:cNvPr>
+          <p:cNvSpPr txBox="1"/>
+          <p:nvPr/>
+        </p:nvSpPr>
+        <p:spPr>
+          <a:xfrm>
+            <a:off x="8278605" y="5966277"/>
+            <a:ext cx="1311215" cy="369332"/>
+          </a:xfrm>
+          <a:prstGeom prst="rect">
+            <a:avLst/>
+          </a:prstGeom>
+          <a:noFill/>
+        </p:spPr>
+        <p:txBody>
+          <a:bodyPr wrap="square" rtlCol="0">
+            <a:spAutoFit/>
+          </a:bodyPr>
+          <a:lstStyle/>
+          <a:p>
+            <a:r>
+              <a:rPr lang="ar-AE" dirty="0"/>
+              <a:t>حَسُنَ زَيْدٌ</a:t>
+            </a:r>
+            <a:endParaRPr lang="tr-TR" dirty="0"/>
+          </a:p>
+        </p:txBody>
+      </p:sp>
+      <p:sp>
+        <p:nvSpPr>
+          <p:cNvPr id="19" name="Metin kutusu 18">
+            <a:extLst>
+              <a:ext uri="{FF2B5EF4-FFF2-40B4-BE49-F238E27FC236}">
+                <a16:creationId xmlns:a16="http://schemas.microsoft.com/office/drawing/2014/main" id="{D49C6B61-A306-AF2C-58E0-5A7314428BFF}"/>
+              </a:ext>
+            </a:extLst>
+          </p:cNvPr>
+          <p:cNvSpPr txBox="1"/>
+          <p:nvPr/>
+        </p:nvSpPr>
+        <p:spPr>
+          <a:xfrm>
+            <a:off x="8241821" y="6335609"/>
+            <a:ext cx="2695998" cy="369332"/>
+          </a:xfrm>
+          <a:prstGeom prst="rect">
+            <a:avLst/>
+          </a:prstGeom>
+          <a:noFill/>
+        </p:spPr>
+        <p:txBody>
+          <a:bodyPr wrap="square" rtlCol="0">
+            <a:spAutoFit/>
+          </a:bodyPr>
+          <a:lstStyle/>
+          <a:p>
+            <a:r>
+              <a:rPr lang="tr-TR" dirty="0"/>
+              <a:t>Zeyd Güzel Oldu.</a:t>
+            </a:r>
+          </a:p>
+        </p:txBody>
+      </p:sp>
     </p:spTree>
     <p:extLst>
       <p:ext uri="{BB962C8B-B14F-4D97-AF65-F5344CB8AC3E}">
@@ -14881,6 +16272,311 @@
                 </a:schemeClr>
               </a:solidFill>
             </a:endParaRPr>
+          </a:p>
+        </p:txBody>
+      </p:sp>
+      <p:sp>
+        <p:nvSpPr>
+          <p:cNvPr id="2" name="İkizkenar Üçgen 1">
+            <a:extLst>
+              <a:ext uri="{FF2B5EF4-FFF2-40B4-BE49-F238E27FC236}">
+                <a16:creationId xmlns:a16="http://schemas.microsoft.com/office/drawing/2014/main" id="{67B38F70-5AA0-C01D-9AE6-3891308E0FD1}"/>
+              </a:ext>
+            </a:extLst>
+          </p:cNvPr>
+          <p:cNvSpPr/>
+          <p:nvPr/>
+        </p:nvSpPr>
+        <p:spPr>
+          <a:xfrm rot="18876393">
+            <a:off x="-831487" y="-167882"/>
+            <a:ext cx="2564858" cy="1263088"/>
+          </a:xfrm>
+          <a:prstGeom prst="triangle">
+            <a:avLst>
+              <a:gd name="adj" fmla="val 50246"/>
+            </a:avLst>
+          </a:prstGeom>
+          <a:solidFill>
+            <a:srgbClr val="FFC000"/>
+          </a:solidFill>
+          <a:ln>
+            <a:solidFill>
+              <a:schemeClr val="accent2">
+                <a:lumMod val="60000"/>
+                <a:lumOff val="40000"/>
+              </a:schemeClr>
+            </a:solidFill>
+          </a:ln>
+        </p:spPr>
+        <p:style>
+          <a:lnRef idx="2">
+            <a:schemeClr val="accent1">
+              <a:shade val="15000"/>
+            </a:schemeClr>
+          </a:lnRef>
+          <a:fillRef idx="1">
+            <a:schemeClr val="accent1"/>
+          </a:fillRef>
+          <a:effectRef idx="0">
+            <a:schemeClr val="accent1"/>
+          </a:effectRef>
+          <a:fontRef idx="minor">
+            <a:schemeClr val="lt1"/>
+          </a:fontRef>
+        </p:style>
+        <p:txBody>
+          <a:bodyPr rtlCol="0" anchor="ctr"/>
+          <a:lstStyle/>
+          <a:p>
+            <a:pPr algn="ctr"/>
+            <a:r>
+              <a:rPr lang="tr-TR" sz="1600" b="1" dirty="0">
+                <a:solidFill>
+                  <a:schemeClr val="tx1">
+                    <a:lumMod val="95000"/>
+                    <a:lumOff val="5000"/>
+                  </a:schemeClr>
+                </a:solidFill>
+              </a:rPr>
+              <a:t>SÜLASİ MÜCERRED</a:t>
+            </a:r>
+          </a:p>
+        </p:txBody>
+      </p:sp>
+      <p:sp>
+        <p:nvSpPr>
+          <p:cNvPr id="3" name="Metin kutusu 2">
+            <a:extLst>
+              <a:ext uri="{FF2B5EF4-FFF2-40B4-BE49-F238E27FC236}">
+                <a16:creationId xmlns:a16="http://schemas.microsoft.com/office/drawing/2014/main" id="{78C1F677-EE4A-8D85-1D06-A3CCD2463C84}"/>
+              </a:ext>
+            </a:extLst>
+          </p:cNvPr>
+          <p:cNvSpPr txBox="1"/>
+          <p:nvPr/>
+        </p:nvSpPr>
+        <p:spPr>
+          <a:xfrm>
+            <a:off x="240820" y="5664681"/>
+            <a:ext cx="1773691" cy="369332"/>
+          </a:xfrm>
+          <a:prstGeom prst="rect">
+            <a:avLst/>
+          </a:prstGeom>
+          <a:noFill/>
+        </p:spPr>
+        <p:txBody>
+          <a:bodyPr wrap="none" rtlCol="0">
+            <a:spAutoFit/>
+          </a:bodyPr>
+          <a:lstStyle/>
+          <a:p>
+            <a:r>
+              <a:rPr lang="tr-TR" dirty="0" err="1">
+                <a:solidFill>
+                  <a:srgbClr val="FF0000"/>
+                </a:solidFill>
+              </a:rPr>
+              <a:t>Müteaddi</a:t>
+            </a:r>
+            <a:r>
+              <a:rPr lang="tr-TR" dirty="0">
+                <a:solidFill>
+                  <a:srgbClr val="FF0000"/>
+                </a:solidFill>
+              </a:rPr>
+              <a:t> Misal:</a:t>
+            </a:r>
+          </a:p>
+        </p:txBody>
+      </p:sp>
+      <p:sp>
+        <p:nvSpPr>
+          <p:cNvPr id="6" name="Metin kutusu 5">
+            <a:extLst>
+              <a:ext uri="{FF2B5EF4-FFF2-40B4-BE49-F238E27FC236}">
+                <a16:creationId xmlns:a16="http://schemas.microsoft.com/office/drawing/2014/main" id="{59D8474C-298F-FA06-67A2-1A72279C511C}"/>
+              </a:ext>
+            </a:extLst>
+          </p:cNvPr>
+          <p:cNvSpPr txBox="1"/>
+          <p:nvPr/>
+        </p:nvSpPr>
+        <p:spPr>
+          <a:xfrm>
+            <a:off x="240820" y="6039766"/>
+            <a:ext cx="2812931" cy="369332"/>
+          </a:xfrm>
+          <a:prstGeom prst="rect">
+            <a:avLst/>
+          </a:prstGeom>
+          <a:noFill/>
+        </p:spPr>
+        <p:txBody>
+          <a:bodyPr wrap="square" rtlCol="0">
+            <a:spAutoFit/>
+          </a:bodyPr>
+          <a:lstStyle/>
+          <a:p>
+            <a:r>
+              <a:rPr lang="ar-AE" dirty="0"/>
+              <a:t>حَسِبَ زَيْدٌ عَمْرًا فَضِلًا</a:t>
+            </a:r>
+            <a:endParaRPr lang="tr-TR" dirty="0"/>
+          </a:p>
+        </p:txBody>
+      </p:sp>
+      <p:sp>
+        <p:nvSpPr>
+          <p:cNvPr id="10" name="Metin kutusu 9">
+            <a:extLst>
+              <a:ext uri="{FF2B5EF4-FFF2-40B4-BE49-F238E27FC236}">
+                <a16:creationId xmlns:a16="http://schemas.microsoft.com/office/drawing/2014/main" id="{5845EE09-892D-B146-4C97-314499796742}"/>
+              </a:ext>
+            </a:extLst>
+          </p:cNvPr>
+          <p:cNvSpPr txBox="1"/>
+          <p:nvPr/>
+        </p:nvSpPr>
+        <p:spPr>
+          <a:xfrm>
+            <a:off x="240819" y="6335609"/>
+            <a:ext cx="3028591" cy="369332"/>
+          </a:xfrm>
+          <a:prstGeom prst="rect">
+            <a:avLst/>
+          </a:prstGeom>
+          <a:noFill/>
+        </p:spPr>
+        <p:txBody>
+          <a:bodyPr wrap="square" rtlCol="0">
+            <a:spAutoFit/>
+          </a:bodyPr>
+          <a:lstStyle/>
+          <a:p>
+            <a:r>
+              <a:rPr lang="tr-TR" dirty="0"/>
+              <a:t>Zeyd </a:t>
+            </a:r>
+            <a:r>
+              <a:rPr lang="tr-TR" dirty="0" err="1"/>
+              <a:t>Amr’ı</a:t>
+            </a:r>
+            <a:r>
+              <a:rPr lang="tr-TR" dirty="0"/>
+              <a:t> Faziletli Zannetti.</a:t>
+            </a:r>
+          </a:p>
+        </p:txBody>
+      </p:sp>
+      <p:sp>
+        <p:nvSpPr>
+          <p:cNvPr id="13" name="Metin kutusu 12">
+            <a:extLst>
+              <a:ext uri="{FF2B5EF4-FFF2-40B4-BE49-F238E27FC236}">
+                <a16:creationId xmlns:a16="http://schemas.microsoft.com/office/drawing/2014/main" id="{36CC82C6-CAF8-C794-CCF4-435379231F05}"/>
+              </a:ext>
+            </a:extLst>
+          </p:cNvPr>
+          <p:cNvSpPr txBox="1"/>
+          <p:nvPr/>
+        </p:nvSpPr>
+        <p:spPr>
+          <a:xfrm>
+            <a:off x="8278605" y="5591192"/>
+            <a:ext cx="1423403" cy="369332"/>
+          </a:xfrm>
+          <a:prstGeom prst="rect">
+            <a:avLst/>
+          </a:prstGeom>
+          <a:noFill/>
+        </p:spPr>
+        <p:txBody>
+          <a:bodyPr wrap="none" rtlCol="0">
+            <a:spAutoFit/>
+          </a:bodyPr>
+          <a:lstStyle/>
+          <a:p>
+            <a:r>
+              <a:rPr lang="tr-TR" dirty="0">
+                <a:solidFill>
+                  <a:srgbClr val="FF0000"/>
+                </a:solidFill>
+              </a:rPr>
+              <a:t>Lazım Misal:</a:t>
+            </a:r>
+          </a:p>
+        </p:txBody>
+      </p:sp>
+      <p:sp>
+        <p:nvSpPr>
+          <p:cNvPr id="14" name="Metin kutusu 13">
+            <a:extLst>
+              <a:ext uri="{FF2B5EF4-FFF2-40B4-BE49-F238E27FC236}">
+                <a16:creationId xmlns:a16="http://schemas.microsoft.com/office/drawing/2014/main" id="{29A40184-D636-5E07-EF22-39BDF57CE30E}"/>
+              </a:ext>
+            </a:extLst>
+          </p:cNvPr>
+          <p:cNvSpPr txBox="1"/>
+          <p:nvPr/>
+        </p:nvSpPr>
+        <p:spPr>
+          <a:xfrm>
+            <a:off x="8278605" y="5966277"/>
+            <a:ext cx="1311215" cy="369332"/>
+          </a:xfrm>
+          <a:prstGeom prst="rect">
+            <a:avLst/>
+          </a:prstGeom>
+          <a:noFill/>
+        </p:spPr>
+        <p:txBody>
+          <a:bodyPr wrap="square" rtlCol="0">
+            <a:spAutoFit/>
+          </a:bodyPr>
+          <a:lstStyle/>
+          <a:p>
+            <a:r>
+              <a:rPr lang="ar-AE" dirty="0"/>
+              <a:t>وَثِقَ زَيْدٌ</a:t>
+            </a:r>
+            <a:endParaRPr lang="tr-TR" dirty="0"/>
+          </a:p>
+        </p:txBody>
+      </p:sp>
+      <p:sp>
+        <p:nvSpPr>
+          <p:cNvPr id="15" name="Metin kutusu 14">
+            <a:extLst>
+              <a:ext uri="{FF2B5EF4-FFF2-40B4-BE49-F238E27FC236}">
+                <a16:creationId xmlns:a16="http://schemas.microsoft.com/office/drawing/2014/main" id="{813F3A0F-FCF4-8F06-12C2-EDA06DA15B0B}"/>
+              </a:ext>
+            </a:extLst>
+          </p:cNvPr>
+          <p:cNvSpPr txBox="1"/>
+          <p:nvPr/>
+        </p:nvSpPr>
+        <p:spPr>
+          <a:xfrm>
+            <a:off x="8241821" y="6335609"/>
+            <a:ext cx="2695998" cy="369332"/>
+          </a:xfrm>
+          <a:prstGeom prst="rect">
+            <a:avLst/>
+          </a:prstGeom>
+          <a:noFill/>
+        </p:spPr>
+        <p:txBody>
+          <a:bodyPr wrap="square" rtlCol="0">
+            <a:spAutoFit/>
+          </a:bodyPr>
+          <a:lstStyle/>
+          <a:p>
+            <a:r>
+              <a:rPr lang="tr-TR" dirty="0"/>
+              <a:t>Zeyd Güvendi.</a:t>
+            </a:r>
           </a:p>
         </p:txBody>
       </p:sp>

--- a/BinanotlarSunum.pptx
+++ b/BinanotlarSunum.pptx
@@ -131,6 +131,982 @@
 </p:presentation>
 </file>
 
+<file path=ppt/changesInfos/changesInfo1.xml><?xml version="1.0" encoding="utf-8"?>
+<pc:chgInfo xmlns:a="http://schemas.openxmlformats.org/drawingml/2006/main" xmlns:r="http://schemas.openxmlformats.org/officeDocument/2006/relationships" xmlns:ac="http://schemas.microsoft.com/office/drawing/2013/main/command" xmlns:pc="http://schemas.microsoft.com/office/powerpoint/2013/main/command">
+  <pc:docChgLst>
+    <pc:chgData name="Ayhan Karaman" userId="ec277a7f08761a62" providerId="LiveId" clId="{CBFD357C-8F92-4D88-94FF-A7AFF685E8E3}"/>
+    <pc:docChg chg="undo redo custSel modSld">
+      <pc:chgData name="Ayhan Karaman" userId="ec277a7f08761a62" providerId="LiveId" clId="{CBFD357C-8F92-4D88-94FF-A7AFF685E8E3}" dt="2026-09-10T00:22:21.238" v="1880" actId="478"/>
+      <pc:docMkLst>
+        <pc:docMk/>
+      </pc:docMkLst>
+      <pc:sldChg chg="addSp modSp mod">
+        <pc:chgData name="Ayhan Karaman" userId="ec277a7f08761a62" providerId="LiveId" clId="{CBFD357C-8F92-4D88-94FF-A7AFF685E8E3}" dt="2026-09-06T01:18:51.006" v="7" actId="571"/>
+        <pc:sldMkLst>
+          <pc:docMk/>
+          <pc:sldMk cId="476174757" sldId="261"/>
+        </pc:sldMkLst>
+        <pc:spChg chg="mod">
+          <ac:chgData name="Ayhan Karaman" userId="ec277a7f08761a62" providerId="LiveId" clId="{CBFD357C-8F92-4D88-94FF-A7AFF685E8E3}" dt="2026-09-06T01:18:18.344" v="3" actId="1076"/>
+          <ac:spMkLst>
+            <pc:docMk/>
+            <pc:sldMk cId="476174757" sldId="261"/>
+            <ac:spMk id="3" creationId="{78C1F677-EE4A-8D85-1D06-A3CCD2463C84}"/>
+          </ac:spMkLst>
+        </pc:spChg>
+        <pc:spChg chg="add mod">
+          <ac:chgData name="Ayhan Karaman" userId="ec277a7f08761a62" providerId="LiveId" clId="{CBFD357C-8F92-4D88-94FF-A7AFF685E8E3}" dt="2026-09-06T01:18:34.763" v="5" actId="571"/>
+          <ac:spMkLst>
+            <pc:docMk/>
+            <pc:sldMk cId="476174757" sldId="261"/>
+            <ac:spMk id="11" creationId="{37ECE1AD-BB9F-5AEA-D0B8-5DB106A4132C}"/>
+          </ac:spMkLst>
+        </pc:spChg>
+        <pc:spChg chg="add mod">
+          <ac:chgData name="Ayhan Karaman" userId="ec277a7f08761a62" providerId="LiveId" clId="{CBFD357C-8F92-4D88-94FF-A7AFF685E8E3}" dt="2026-09-06T01:18:34.763" v="5" actId="571"/>
+          <ac:spMkLst>
+            <pc:docMk/>
+            <pc:sldMk cId="476174757" sldId="261"/>
+            <ac:spMk id="12" creationId="{7483B143-0E49-660A-D884-A8809703D4CD}"/>
+          </ac:spMkLst>
+        </pc:spChg>
+        <pc:spChg chg="add mod">
+          <ac:chgData name="Ayhan Karaman" userId="ec277a7f08761a62" providerId="LiveId" clId="{CBFD357C-8F92-4D88-94FF-A7AFF685E8E3}" dt="2026-09-06T01:18:34.763" v="5" actId="571"/>
+          <ac:spMkLst>
+            <pc:docMk/>
+            <pc:sldMk cId="476174757" sldId="261"/>
+            <ac:spMk id="16" creationId="{913B4F8A-175F-5A55-C949-827AD6416508}"/>
+          </ac:spMkLst>
+        </pc:spChg>
+        <pc:spChg chg="add mod">
+          <ac:chgData name="Ayhan Karaman" userId="ec277a7f08761a62" providerId="LiveId" clId="{CBFD357C-8F92-4D88-94FF-A7AFF685E8E3}" dt="2026-09-06T01:18:34.763" v="5" actId="571"/>
+          <ac:spMkLst>
+            <pc:docMk/>
+            <pc:sldMk cId="476174757" sldId="261"/>
+            <ac:spMk id="17" creationId="{20EF22FB-C367-4882-B393-68F1C4279057}"/>
+          </ac:spMkLst>
+        </pc:spChg>
+        <pc:spChg chg="add mod">
+          <ac:chgData name="Ayhan Karaman" userId="ec277a7f08761a62" providerId="LiveId" clId="{CBFD357C-8F92-4D88-94FF-A7AFF685E8E3}" dt="2026-09-06T01:18:51.006" v="7" actId="571"/>
+          <ac:spMkLst>
+            <pc:docMk/>
+            <pc:sldMk cId="476174757" sldId="261"/>
+            <ac:spMk id="18" creationId="{04E05027-F27B-9B4B-0C12-FB4067C83F5E}"/>
+          </ac:spMkLst>
+        </pc:spChg>
+        <pc:spChg chg="add mod">
+          <ac:chgData name="Ayhan Karaman" userId="ec277a7f08761a62" providerId="LiveId" clId="{CBFD357C-8F92-4D88-94FF-A7AFF685E8E3}" dt="2026-09-06T01:18:51.006" v="7" actId="571"/>
+          <ac:spMkLst>
+            <pc:docMk/>
+            <pc:sldMk cId="476174757" sldId="261"/>
+            <ac:spMk id="19" creationId="{6647D316-82B9-68EB-A6F8-F59D370367FD}"/>
+          </ac:spMkLst>
+        </pc:spChg>
+        <pc:spChg chg="add mod">
+          <ac:chgData name="Ayhan Karaman" userId="ec277a7f08761a62" providerId="LiveId" clId="{CBFD357C-8F92-4D88-94FF-A7AFF685E8E3}" dt="2026-09-06T01:18:51.006" v="7" actId="571"/>
+          <ac:spMkLst>
+            <pc:docMk/>
+            <pc:sldMk cId="476174757" sldId="261"/>
+            <ac:spMk id="20" creationId="{CF806475-80F1-D571-9C5E-A30979143CB8}"/>
+          </ac:spMkLst>
+        </pc:spChg>
+        <pc:spChg chg="add mod">
+          <ac:chgData name="Ayhan Karaman" userId="ec277a7f08761a62" providerId="LiveId" clId="{CBFD357C-8F92-4D88-94FF-A7AFF685E8E3}" dt="2026-09-06T01:18:51.006" v="7" actId="571"/>
+          <ac:spMkLst>
+            <pc:docMk/>
+            <pc:sldMk cId="476174757" sldId="261"/>
+            <ac:spMk id="21" creationId="{E726DC36-B752-F884-4778-95DAE20FFEBA}"/>
+          </ac:spMkLst>
+        </pc:spChg>
+      </pc:sldChg>
+      <pc:sldChg chg="modAnim">
+        <pc:chgData name="Ayhan Karaman" userId="ec277a7f08761a62" providerId="LiveId" clId="{CBFD357C-8F92-4D88-94FF-A7AFF685E8E3}" dt="2026-09-06T01:15:26.485" v="1"/>
+        <pc:sldMkLst>
+          <pc:docMk/>
+          <pc:sldMk cId="540846665" sldId="262"/>
+        </pc:sldMkLst>
+      </pc:sldChg>
+      <pc:sldChg chg="addSp modSp mod">
+        <pc:chgData name="Ayhan Karaman" userId="ec277a7f08761a62" providerId="LiveId" clId="{CBFD357C-8F92-4D88-94FF-A7AFF685E8E3}" dt="2026-09-06T01:25:45.908" v="121" actId="20577"/>
+        <pc:sldMkLst>
+          <pc:docMk/>
+          <pc:sldMk cId="2702794919" sldId="264"/>
+        </pc:sldMkLst>
+        <pc:spChg chg="add mod">
+          <ac:chgData name="Ayhan Karaman" userId="ec277a7f08761a62" providerId="LiveId" clId="{CBFD357C-8F92-4D88-94FF-A7AFF685E8E3}" dt="2026-09-06T01:19:09.786" v="8"/>
+          <ac:spMkLst>
+            <pc:docMk/>
+            <pc:sldMk cId="2702794919" sldId="264"/>
+            <ac:spMk id="3" creationId="{65C6BDEB-7525-0D16-56B9-F9CC421B7411}"/>
+          </ac:spMkLst>
+        </pc:spChg>
+        <pc:spChg chg="add mod">
+          <ac:chgData name="Ayhan Karaman" userId="ec277a7f08761a62" providerId="LiveId" clId="{CBFD357C-8F92-4D88-94FF-A7AFF685E8E3}" dt="2026-09-06T01:22:26.893" v="41" actId="20577"/>
+          <ac:spMkLst>
+            <pc:docMk/>
+            <pc:sldMk cId="2702794919" sldId="264"/>
+            <ac:spMk id="6" creationId="{B3F13410-D683-4E17-0A56-18995211AA72}"/>
+          </ac:spMkLst>
+        </pc:spChg>
+        <pc:spChg chg="add mod">
+          <ac:chgData name="Ayhan Karaman" userId="ec277a7f08761a62" providerId="LiveId" clId="{CBFD357C-8F92-4D88-94FF-A7AFF685E8E3}" dt="2026-09-06T01:22:52.308" v="76" actId="20577"/>
+          <ac:spMkLst>
+            <pc:docMk/>
+            <pc:sldMk cId="2702794919" sldId="264"/>
+            <ac:spMk id="10" creationId="{CB0076CA-2B77-37BC-A3CC-D73616A7C50B}"/>
+          </ac:spMkLst>
+        </pc:spChg>
+        <pc:spChg chg="add mod">
+          <ac:chgData name="Ayhan Karaman" userId="ec277a7f08761a62" providerId="LiveId" clId="{CBFD357C-8F92-4D88-94FF-A7AFF685E8E3}" dt="2026-09-06T01:19:09.786" v="8"/>
+          <ac:spMkLst>
+            <pc:docMk/>
+            <pc:sldMk cId="2702794919" sldId="264"/>
+            <ac:spMk id="11" creationId="{CC133AA7-6B40-E5BF-5C7B-DF5E8121FA16}"/>
+          </ac:spMkLst>
+        </pc:spChg>
+        <pc:spChg chg="add mod">
+          <ac:chgData name="Ayhan Karaman" userId="ec277a7f08761a62" providerId="LiveId" clId="{CBFD357C-8F92-4D88-94FF-A7AFF685E8E3}" dt="2026-09-06T01:24:32.881" v="104" actId="20577"/>
+          <ac:spMkLst>
+            <pc:docMk/>
+            <pc:sldMk cId="2702794919" sldId="264"/>
+            <ac:spMk id="12" creationId="{2D074D9A-A2F0-A4FF-2C61-A81F38431ED9}"/>
+          </ac:spMkLst>
+        </pc:spChg>
+        <pc:spChg chg="add mod">
+          <ac:chgData name="Ayhan Karaman" userId="ec277a7f08761a62" providerId="LiveId" clId="{CBFD357C-8F92-4D88-94FF-A7AFF685E8E3}" dt="2026-09-06T01:25:45.908" v="121" actId="20577"/>
+          <ac:spMkLst>
+            <pc:docMk/>
+            <pc:sldMk cId="2702794919" sldId="264"/>
+            <ac:spMk id="13" creationId="{C766A4B3-36C5-EE21-BC2A-D7A92E0742E9}"/>
+          </ac:spMkLst>
+        </pc:spChg>
+      </pc:sldChg>
+      <pc:sldChg chg="addSp modSp mod">
+        <pc:chgData name="Ayhan Karaman" userId="ec277a7f08761a62" providerId="LiveId" clId="{CBFD357C-8F92-4D88-94FF-A7AFF685E8E3}" dt="2026-09-06T01:35:43.895" v="322" actId="20577"/>
+        <pc:sldMkLst>
+          <pc:docMk/>
+          <pc:sldMk cId="3510619492" sldId="265"/>
+        </pc:sldMkLst>
+        <pc:spChg chg="add mod">
+          <ac:chgData name="Ayhan Karaman" userId="ec277a7f08761a62" providerId="LiveId" clId="{CBFD357C-8F92-4D88-94FF-A7AFF685E8E3}" dt="2026-09-06T01:28:14.525" v="137" actId="20577"/>
+          <ac:spMkLst>
+            <pc:docMk/>
+            <pc:sldMk cId="3510619492" sldId="265"/>
+            <ac:spMk id="3" creationId="{82144A74-894B-38C1-98F5-A9CE3151786D}"/>
+          </ac:spMkLst>
+        </pc:spChg>
+        <pc:spChg chg="add mod">
+          <ac:chgData name="Ayhan Karaman" userId="ec277a7f08761a62" providerId="LiveId" clId="{CBFD357C-8F92-4D88-94FF-A7AFF685E8E3}" dt="2026-09-06T01:32:41.102" v="240" actId="20577"/>
+          <ac:spMkLst>
+            <pc:docMk/>
+            <pc:sldMk cId="3510619492" sldId="265"/>
+            <ac:spMk id="6" creationId="{6485F9D5-5356-1773-DE2C-0AF6AA2759EF}"/>
+          </ac:spMkLst>
+        </pc:spChg>
+        <pc:spChg chg="add mod">
+          <ac:chgData name="Ayhan Karaman" userId="ec277a7f08761a62" providerId="LiveId" clId="{CBFD357C-8F92-4D88-94FF-A7AFF685E8E3}" dt="2026-09-06T01:32:58.924" v="257" actId="20577"/>
+          <ac:spMkLst>
+            <pc:docMk/>
+            <pc:sldMk cId="3510619492" sldId="265"/>
+            <ac:spMk id="10" creationId="{FAC8DE33-11CB-4126-4FAF-484210B1773E}"/>
+          </ac:spMkLst>
+        </pc:spChg>
+        <pc:spChg chg="add mod">
+          <ac:chgData name="Ayhan Karaman" userId="ec277a7f08761a62" providerId="LiveId" clId="{CBFD357C-8F92-4D88-94FF-A7AFF685E8E3}" dt="2026-09-06T01:28:42.933" v="146" actId="20577"/>
+          <ac:spMkLst>
+            <pc:docMk/>
+            <pc:sldMk cId="3510619492" sldId="265"/>
+            <ac:spMk id="11" creationId="{A344AB4F-529D-EF9A-B3F2-E75CCA5044C2}"/>
+          </ac:spMkLst>
+        </pc:spChg>
+        <pc:spChg chg="add mod">
+          <ac:chgData name="Ayhan Karaman" userId="ec277a7f08761a62" providerId="LiveId" clId="{CBFD357C-8F92-4D88-94FF-A7AFF685E8E3}" dt="2026-09-06T01:35:19.408" v="294" actId="14100"/>
+          <ac:spMkLst>
+            <pc:docMk/>
+            <pc:sldMk cId="3510619492" sldId="265"/>
+            <ac:spMk id="12" creationId="{93D6236E-0BE6-126C-8E38-D1362B8706A9}"/>
+          </ac:spMkLst>
+        </pc:spChg>
+        <pc:spChg chg="add mod">
+          <ac:chgData name="Ayhan Karaman" userId="ec277a7f08761a62" providerId="LiveId" clId="{CBFD357C-8F92-4D88-94FF-A7AFF685E8E3}" dt="2026-09-06T01:35:43.895" v="322" actId="20577"/>
+          <ac:spMkLst>
+            <pc:docMk/>
+            <pc:sldMk cId="3510619492" sldId="265"/>
+            <ac:spMk id="13" creationId="{C0AB2F71-4E8F-BC20-264E-4BC959771FFD}"/>
+          </ac:spMkLst>
+        </pc:spChg>
+        <pc:spChg chg="add mod">
+          <ac:chgData name="Ayhan Karaman" userId="ec277a7f08761a62" providerId="LiveId" clId="{CBFD357C-8F92-4D88-94FF-A7AFF685E8E3}" dt="2026-09-06T01:28:02.793" v="131" actId="571"/>
+          <ac:spMkLst>
+            <pc:docMk/>
+            <pc:sldMk cId="3510619492" sldId="265"/>
+            <ac:spMk id="14" creationId="{93111C23-5E23-69C2-DF86-861A738A0234}"/>
+          </ac:spMkLst>
+        </pc:spChg>
+        <pc:spChg chg="add mod">
+          <ac:chgData name="Ayhan Karaman" userId="ec277a7f08761a62" providerId="LiveId" clId="{CBFD357C-8F92-4D88-94FF-A7AFF685E8E3}" dt="2026-09-06T01:30:55.011" v="186" actId="20577"/>
+          <ac:spMkLst>
+            <pc:docMk/>
+            <pc:sldMk cId="3510619492" sldId="265"/>
+            <ac:spMk id="15" creationId="{4A7CF6DD-2B92-F5BE-5F89-CB11BBB5E117}"/>
+          </ac:spMkLst>
+        </pc:spChg>
+        <pc:spChg chg="add mod">
+          <ac:chgData name="Ayhan Karaman" userId="ec277a7f08761a62" providerId="LiveId" clId="{CBFD357C-8F92-4D88-94FF-A7AFF685E8E3}" dt="2026-09-06T01:31:24.443" v="217" actId="20577"/>
+          <ac:spMkLst>
+            <pc:docMk/>
+            <pc:sldMk cId="3510619492" sldId="265"/>
+            <ac:spMk id="16" creationId="{276CE77E-52BE-6BAA-BB51-AEC7CE8DB5BD}"/>
+          </ac:spMkLst>
+        </pc:spChg>
+        <pc:spChg chg="add mod">
+          <ac:chgData name="Ayhan Karaman" userId="ec277a7f08761a62" providerId="LiveId" clId="{CBFD357C-8F92-4D88-94FF-A7AFF685E8E3}" dt="2026-09-06T01:28:34.013" v="139" actId="571"/>
+          <ac:spMkLst>
+            <pc:docMk/>
+            <pc:sldMk cId="3510619492" sldId="265"/>
+            <ac:spMk id="17" creationId="{E1CB12D4-378F-11D2-565A-FF0C228C2546}"/>
+          </ac:spMkLst>
+        </pc:spChg>
+        <pc:spChg chg="add mod">
+          <ac:chgData name="Ayhan Karaman" userId="ec277a7f08761a62" providerId="LiveId" clId="{CBFD357C-8F92-4D88-94FF-A7AFF685E8E3}" dt="2026-09-06T01:28:34.013" v="139" actId="571"/>
+          <ac:spMkLst>
+            <pc:docMk/>
+            <pc:sldMk cId="3510619492" sldId="265"/>
+            <ac:spMk id="18" creationId="{27119F37-1276-188C-F0CF-5464133F0736}"/>
+          </ac:spMkLst>
+        </pc:spChg>
+        <pc:spChg chg="add mod">
+          <ac:chgData name="Ayhan Karaman" userId="ec277a7f08761a62" providerId="LiveId" clId="{CBFD357C-8F92-4D88-94FF-A7AFF685E8E3}" dt="2026-09-06T01:28:34.013" v="139" actId="571"/>
+          <ac:spMkLst>
+            <pc:docMk/>
+            <pc:sldMk cId="3510619492" sldId="265"/>
+            <ac:spMk id="19" creationId="{17BEFFFD-1E1B-3AFC-CBDC-554A5FA521A2}"/>
+          </ac:spMkLst>
+        </pc:spChg>
+      </pc:sldChg>
+      <pc:sldChg chg="addSp modSp mod">
+        <pc:chgData name="Ayhan Karaman" userId="ec277a7f08761a62" providerId="LiveId" clId="{CBFD357C-8F92-4D88-94FF-A7AFF685E8E3}" dt="2026-09-06T01:41:12.564" v="502" actId="20577"/>
+        <pc:sldMkLst>
+          <pc:docMk/>
+          <pc:sldMk cId="2334713504" sldId="266"/>
+        </pc:sldMkLst>
+        <pc:spChg chg="add mod">
+          <ac:chgData name="Ayhan Karaman" userId="ec277a7f08761a62" providerId="LiveId" clId="{CBFD357C-8F92-4D88-94FF-A7AFF685E8E3}" dt="2026-09-06T01:36:52.249" v="345" actId="20577"/>
+          <ac:spMkLst>
+            <pc:docMk/>
+            <pc:sldMk cId="2334713504" sldId="266"/>
+            <ac:spMk id="6" creationId="{799B0842-999C-8615-F322-C18681BCD3DC}"/>
+          </ac:spMkLst>
+        </pc:spChg>
+        <pc:spChg chg="add mod">
+          <ac:chgData name="Ayhan Karaman" userId="ec277a7f08761a62" providerId="LiveId" clId="{CBFD357C-8F92-4D88-94FF-A7AFF685E8E3}" dt="2026-09-06T01:37:54.718" v="382" actId="20577"/>
+          <ac:spMkLst>
+            <pc:docMk/>
+            <pc:sldMk cId="2334713504" sldId="266"/>
+            <ac:spMk id="9" creationId="{C18C3DFC-2675-CF4A-AA0D-3F527FCE5185}"/>
+          </ac:spMkLst>
+        </pc:spChg>
+        <pc:spChg chg="add mod">
+          <ac:chgData name="Ayhan Karaman" userId="ec277a7f08761a62" providerId="LiveId" clId="{CBFD357C-8F92-4D88-94FF-A7AFF685E8E3}" dt="2026-09-06T01:38:22.090" v="403" actId="20577"/>
+          <ac:spMkLst>
+            <pc:docMk/>
+            <pc:sldMk cId="2334713504" sldId="266"/>
+            <ac:spMk id="10" creationId="{C3CCC768-D77B-805F-3790-159790E6B439}"/>
+          </ac:spMkLst>
+        </pc:spChg>
+        <pc:spChg chg="add mod">
+          <ac:chgData name="Ayhan Karaman" userId="ec277a7f08761a62" providerId="LiveId" clId="{CBFD357C-8F92-4D88-94FF-A7AFF685E8E3}" dt="2026-09-06T01:36:58.546" v="353" actId="20577"/>
+          <ac:spMkLst>
+            <pc:docMk/>
+            <pc:sldMk cId="2334713504" sldId="266"/>
+            <ac:spMk id="11" creationId="{443DC411-7966-8D5D-62A2-28602D021630}"/>
+          </ac:spMkLst>
+        </pc:spChg>
+        <pc:spChg chg="add mod">
+          <ac:chgData name="Ayhan Karaman" userId="ec277a7f08761a62" providerId="LiveId" clId="{CBFD357C-8F92-4D88-94FF-A7AFF685E8E3}" dt="2026-09-06T01:40:34.543" v="447" actId="20577"/>
+          <ac:spMkLst>
+            <pc:docMk/>
+            <pc:sldMk cId="2334713504" sldId="266"/>
+            <ac:spMk id="12" creationId="{242FC698-6075-9DCC-159D-6F1FB9AAFDFD}"/>
+          </ac:spMkLst>
+        </pc:spChg>
+        <pc:spChg chg="add mod">
+          <ac:chgData name="Ayhan Karaman" userId="ec277a7f08761a62" providerId="LiveId" clId="{CBFD357C-8F92-4D88-94FF-A7AFF685E8E3}" dt="2026-09-06T01:41:12.564" v="502" actId="20577"/>
+          <ac:spMkLst>
+            <pc:docMk/>
+            <pc:sldMk cId="2334713504" sldId="266"/>
+            <ac:spMk id="13" creationId="{9122CF18-F0FC-3F68-566C-94B47D65EF23}"/>
+          </ac:spMkLst>
+        </pc:spChg>
+      </pc:sldChg>
+      <pc:sldChg chg="addSp modSp mod">
+        <pc:chgData name="Ayhan Karaman" userId="ec277a7f08761a62" providerId="LiveId" clId="{CBFD357C-8F92-4D88-94FF-A7AFF685E8E3}" dt="2026-09-09T23:31:24.943" v="621" actId="20577"/>
+        <pc:sldMkLst>
+          <pc:docMk/>
+          <pc:sldMk cId="867089931" sldId="267"/>
+        </pc:sldMkLst>
+        <pc:spChg chg="add mod">
+          <ac:chgData name="Ayhan Karaman" userId="ec277a7f08761a62" providerId="LiveId" clId="{CBFD357C-8F92-4D88-94FF-A7AFF685E8E3}" dt="2026-09-09T23:29:15.857" v="557" actId="1076"/>
+          <ac:spMkLst>
+            <pc:docMk/>
+            <pc:sldMk cId="867089931" sldId="267"/>
+            <ac:spMk id="3" creationId="{8B7060DF-2A7A-F63E-A901-D62DC998F296}"/>
+          </ac:spMkLst>
+        </pc:spChg>
+        <pc:spChg chg="add mod">
+          <ac:chgData name="Ayhan Karaman" userId="ec277a7f08761a62" providerId="LiveId" clId="{CBFD357C-8F92-4D88-94FF-A7AFF685E8E3}" dt="2026-09-09T23:29:20.427" v="558" actId="1076"/>
+          <ac:spMkLst>
+            <pc:docMk/>
+            <pc:sldMk cId="867089931" sldId="267"/>
+            <ac:spMk id="6" creationId="{E02432A8-3EDD-F375-BF2C-A4425B873D2A}"/>
+          </ac:spMkLst>
+        </pc:spChg>
+        <pc:spChg chg="add mod">
+          <ac:chgData name="Ayhan Karaman" userId="ec277a7f08761a62" providerId="LiveId" clId="{CBFD357C-8F92-4D88-94FF-A7AFF685E8E3}" dt="2026-09-09T23:29:24.523" v="559" actId="1076"/>
+          <ac:spMkLst>
+            <pc:docMk/>
+            <pc:sldMk cId="867089931" sldId="267"/>
+            <ac:spMk id="10" creationId="{5CB9E22E-E8A5-418C-F732-B2DADECFC7CD}"/>
+          </ac:spMkLst>
+        </pc:spChg>
+        <pc:spChg chg="add mod">
+          <ac:chgData name="Ayhan Karaman" userId="ec277a7f08761a62" providerId="LiveId" clId="{CBFD357C-8F92-4D88-94FF-A7AFF685E8E3}" dt="2026-09-09T23:31:04.473" v="595" actId="20577"/>
+          <ac:spMkLst>
+            <pc:docMk/>
+            <pc:sldMk cId="867089931" sldId="267"/>
+            <ac:spMk id="11" creationId="{756193AF-6E9A-B434-3DB3-81B994356130}"/>
+          </ac:spMkLst>
+        </pc:spChg>
+        <pc:spChg chg="add mod">
+          <ac:chgData name="Ayhan Karaman" userId="ec277a7f08761a62" providerId="LiveId" clId="{CBFD357C-8F92-4D88-94FF-A7AFF685E8E3}" dt="2026-09-09T23:31:24.943" v="621" actId="20577"/>
+          <ac:spMkLst>
+            <pc:docMk/>
+            <pc:sldMk cId="867089931" sldId="267"/>
+            <ac:spMk id="12" creationId="{26F0D5DA-0338-5DDC-8ED9-A60353D7016A}"/>
+          </ac:spMkLst>
+        </pc:spChg>
+      </pc:sldChg>
+      <pc:sldChg chg="addSp modSp mod">
+        <pc:chgData name="Ayhan Karaman" userId="ec277a7f08761a62" providerId="LiveId" clId="{CBFD357C-8F92-4D88-94FF-A7AFF685E8E3}" dt="2026-09-09T23:35:43.159" v="774" actId="1076"/>
+        <pc:sldMkLst>
+          <pc:docMk/>
+          <pc:sldMk cId="2155816662" sldId="268"/>
+        </pc:sldMkLst>
+        <pc:spChg chg="add mod">
+          <ac:chgData name="Ayhan Karaman" userId="ec277a7f08761a62" providerId="LiveId" clId="{CBFD357C-8F92-4D88-94FF-A7AFF685E8E3}" dt="2026-09-09T23:31:37.478" v="622"/>
+          <ac:spMkLst>
+            <pc:docMk/>
+            <pc:sldMk cId="2155816662" sldId="268"/>
+            <ac:spMk id="3" creationId="{1CFC5862-95EC-21C8-FA65-A60214E31CD4}"/>
+          </ac:spMkLst>
+        </pc:spChg>
+        <pc:spChg chg="add mod">
+          <ac:chgData name="Ayhan Karaman" userId="ec277a7f08761a62" providerId="LiveId" clId="{CBFD357C-8F92-4D88-94FF-A7AFF685E8E3}" dt="2026-09-09T23:33:04.924" v="648" actId="20577"/>
+          <ac:spMkLst>
+            <pc:docMk/>
+            <pc:sldMk cId="2155816662" sldId="268"/>
+            <ac:spMk id="6" creationId="{FE7F2C9E-6707-4090-321F-3DF8ABBB1783}"/>
+          </ac:spMkLst>
+        </pc:spChg>
+        <pc:spChg chg="add mod">
+          <ac:chgData name="Ayhan Karaman" userId="ec277a7f08761a62" providerId="LiveId" clId="{CBFD357C-8F92-4D88-94FF-A7AFF685E8E3}" dt="2026-09-09T23:33:20.778" v="674" actId="20577"/>
+          <ac:spMkLst>
+            <pc:docMk/>
+            <pc:sldMk cId="2155816662" sldId="268"/>
+            <ac:spMk id="10" creationId="{7199B9BC-BE8B-EB87-4A32-E6376E1C4334}"/>
+          </ac:spMkLst>
+        </pc:spChg>
+        <pc:spChg chg="add mod">
+          <ac:chgData name="Ayhan Karaman" userId="ec277a7f08761a62" providerId="LiveId" clId="{CBFD357C-8F92-4D88-94FF-A7AFF685E8E3}" dt="2026-09-09T23:35:43.159" v="774" actId="1076"/>
+          <ac:spMkLst>
+            <pc:docMk/>
+            <pc:sldMk cId="2155816662" sldId="268"/>
+            <ac:spMk id="11" creationId="{24BA7104-E62C-FB4C-5C9D-8F9220720BD8}"/>
+          </ac:spMkLst>
+        </pc:spChg>
+        <pc:spChg chg="add mod">
+          <ac:chgData name="Ayhan Karaman" userId="ec277a7f08761a62" providerId="LiveId" clId="{CBFD357C-8F92-4D88-94FF-A7AFF685E8E3}" dt="2026-09-09T23:35:37.716" v="773" actId="14100"/>
+          <ac:spMkLst>
+            <pc:docMk/>
+            <pc:sldMk cId="2155816662" sldId="268"/>
+            <ac:spMk id="12" creationId="{40B68953-278F-A5E5-D33A-8CA07F38431D}"/>
+          </ac:spMkLst>
+        </pc:spChg>
+      </pc:sldChg>
+      <pc:sldChg chg="addSp modSp mod">
+        <pc:chgData name="Ayhan Karaman" userId="ec277a7f08761a62" providerId="LiveId" clId="{CBFD357C-8F92-4D88-94FF-A7AFF685E8E3}" dt="2026-09-09T23:41:51.237" v="942" actId="20577"/>
+        <pc:sldMkLst>
+          <pc:docMk/>
+          <pc:sldMk cId="1671729752" sldId="269"/>
+        </pc:sldMkLst>
+        <pc:spChg chg="add mod">
+          <ac:chgData name="Ayhan Karaman" userId="ec277a7f08761a62" providerId="LiveId" clId="{CBFD357C-8F92-4D88-94FF-A7AFF685E8E3}" dt="2026-09-09T23:36:10.449" v="775"/>
+          <ac:spMkLst>
+            <pc:docMk/>
+            <pc:sldMk cId="1671729752" sldId="269"/>
+            <ac:spMk id="3" creationId="{FA3F2841-4E54-EF1E-52A9-6F6D297748DF}"/>
+          </ac:spMkLst>
+        </pc:spChg>
+        <pc:spChg chg="add mod">
+          <ac:chgData name="Ayhan Karaman" userId="ec277a7f08761a62" providerId="LiveId" clId="{CBFD357C-8F92-4D88-94FF-A7AFF685E8E3}" dt="2026-09-09T23:36:10.449" v="775"/>
+          <ac:spMkLst>
+            <pc:docMk/>
+            <pc:sldMk cId="1671729752" sldId="269"/>
+            <ac:spMk id="6" creationId="{F49DAFA9-CED8-C505-D3DD-1A28909CFE80}"/>
+          </ac:spMkLst>
+        </pc:spChg>
+        <pc:spChg chg="add mod">
+          <ac:chgData name="Ayhan Karaman" userId="ec277a7f08761a62" providerId="LiveId" clId="{CBFD357C-8F92-4D88-94FF-A7AFF685E8E3}" dt="2026-09-09T23:36:10.449" v="775"/>
+          <ac:spMkLst>
+            <pc:docMk/>
+            <pc:sldMk cId="1671729752" sldId="269"/>
+            <ac:spMk id="10" creationId="{51F64ECB-B307-A513-4C6D-8E9FD631F36E}"/>
+          </ac:spMkLst>
+        </pc:spChg>
+        <pc:spChg chg="add mod">
+          <ac:chgData name="Ayhan Karaman" userId="ec277a7f08761a62" providerId="LiveId" clId="{CBFD357C-8F92-4D88-94FF-A7AFF685E8E3}" dt="2026-09-09T23:36:28.006" v="777" actId="20577"/>
+          <ac:spMkLst>
+            <pc:docMk/>
+            <pc:sldMk cId="1671729752" sldId="269"/>
+            <ac:spMk id="11" creationId="{088412FE-8B65-D1F2-78D3-8A0F765227EC}"/>
+          </ac:spMkLst>
+        </pc:spChg>
+        <pc:spChg chg="add mod">
+          <ac:chgData name="Ayhan Karaman" userId="ec277a7f08761a62" providerId="LiveId" clId="{CBFD357C-8F92-4D88-94FF-A7AFF685E8E3}" dt="2026-09-09T23:36:10.449" v="775"/>
+          <ac:spMkLst>
+            <pc:docMk/>
+            <pc:sldMk cId="1671729752" sldId="269"/>
+            <ac:spMk id="12" creationId="{4A71BD03-EB07-AAC5-E31B-5CB6900BC074}"/>
+          </ac:spMkLst>
+        </pc:spChg>
+        <pc:spChg chg="add mod">
+          <ac:chgData name="Ayhan Karaman" userId="ec277a7f08761a62" providerId="LiveId" clId="{CBFD357C-8F92-4D88-94FF-A7AFF685E8E3}" dt="2026-09-09T23:37:04.344" v="799" actId="20577"/>
+          <ac:spMkLst>
+            <pc:docMk/>
+            <pc:sldMk cId="1671729752" sldId="269"/>
+            <ac:spMk id="13" creationId="{E725CA31-5909-3E34-A82A-43DBBD315E32}"/>
+          </ac:spMkLst>
+        </pc:spChg>
+        <pc:spChg chg="add mod">
+          <ac:chgData name="Ayhan Karaman" userId="ec277a7f08761a62" providerId="LiveId" clId="{CBFD357C-8F92-4D88-94FF-A7AFF685E8E3}" dt="2026-09-09T23:41:13.612" v="911" actId="20577"/>
+          <ac:spMkLst>
+            <pc:docMk/>
+            <pc:sldMk cId="1671729752" sldId="269"/>
+            <ac:spMk id="14" creationId="{9AFA29D9-E02A-A727-AA1E-2F89206EBB96}"/>
+          </ac:spMkLst>
+        </pc:spChg>
+        <pc:spChg chg="add mod">
+          <ac:chgData name="Ayhan Karaman" userId="ec277a7f08761a62" providerId="LiveId" clId="{CBFD357C-8F92-4D88-94FF-A7AFF685E8E3}" dt="2026-09-09T23:39:50.976" v="880" actId="20577"/>
+          <ac:spMkLst>
+            <pc:docMk/>
+            <pc:sldMk cId="1671729752" sldId="269"/>
+            <ac:spMk id="15" creationId="{3FBAE9AA-0A2C-AADC-6081-2C3DC8A185C3}"/>
+          </ac:spMkLst>
+        </pc:spChg>
+        <pc:spChg chg="add mod">
+          <ac:chgData name="Ayhan Karaman" userId="ec277a7f08761a62" providerId="LiveId" clId="{CBFD357C-8F92-4D88-94FF-A7AFF685E8E3}" dt="2026-09-09T23:37:12.164" v="814" actId="20577"/>
+          <ac:spMkLst>
+            <pc:docMk/>
+            <pc:sldMk cId="1671729752" sldId="269"/>
+            <ac:spMk id="16" creationId="{15ED020D-8E2B-27B0-574D-5AA8496507E4}"/>
+          </ac:spMkLst>
+        </pc:spChg>
+        <pc:spChg chg="add mod">
+          <ac:chgData name="Ayhan Karaman" userId="ec277a7f08761a62" providerId="LiveId" clId="{CBFD357C-8F92-4D88-94FF-A7AFF685E8E3}" dt="2026-09-09T23:41:35.189" v="920" actId="20577"/>
+          <ac:spMkLst>
+            <pc:docMk/>
+            <pc:sldMk cId="1671729752" sldId="269"/>
+            <ac:spMk id="17" creationId="{E2362809-7658-CAD1-D1BD-DED21642C158}"/>
+          </ac:spMkLst>
+        </pc:spChg>
+        <pc:spChg chg="add mod">
+          <ac:chgData name="Ayhan Karaman" userId="ec277a7f08761a62" providerId="LiveId" clId="{CBFD357C-8F92-4D88-94FF-A7AFF685E8E3}" dt="2026-09-09T23:41:51.237" v="942" actId="20577"/>
+          <ac:spMkLst>
+            <pc:docMk/>
+            <pc:sldMk cId="1671729752" sldId="269"/>
+            <ac:spMk id="18" creationId="{33F84081-D7E9-6E67-4344-6A49B312A9E1}"/>
+          </ac:spMkLst>
+        </pc:spChg>
+      </pc:sldChg>
+      <pc:sldChg chg="addSp modSp mod">
+        <pc:chgData name="Ayhan Karaman" userId="ec277a7f08761a62" providerId="LiveId" clId="{CBFD357C-8F92-4D88-94FF-A7AFF685E8E3}" dt="2026-09-09T23:52:52.424" v="1207" actId="20577"/>
+        <pc:sldMkLst>
+          <pc:docMk/>
+          <pc:sldMk cId="230666391" sldId="270"/>
+        </pc:sldMkLst>
+        <pc:spChg chg="add mod">
+          <ac:chgData name="Ayhan Karaman" userId="ec277a7f08761a62" providerId="LiveId" clId="{CBFD357C-8F92-4D88-94FF-A7AFF685E8E3}" dt="2026-09-09T23:47:44.366" v="1046"/>
+          <ac:spMkLst>
+            <pc:docMk/>
+            <pc:sldMk cId="230666391" sldId="270"/>
+            <ac:spMk id="3" creationId="{5383C22D-E341-066F-75A7-19C27535530D}"/>
+          </ac:spMkLst>
+        </pc:spChg>
+        <pc:spChg chg="add mod">
+          <ac:chgData name="Ayhan Karaman" userId="ec277a7f08761a62" providerId="LiveId" clId="{CBFD357C-8F92-4D88-94FF-A7AFF685E8E3}" dt="2026-09-09T23:50:52.778" v="1147" actId="403"/>
+          <ac:spMkLst>
+            <pc:docMk/>
+            <pc:sldMk cId="230666391" sldId="270"/>
+            <ac:spMk id="6" creationId="{CFCB837A-4C75-A9E2-4DA8-0E0171B634EA}"/>
+          </ac:spMkLst>
+        </pc:spChg>
+        <pc:spChg chg="add mod">
+          <ac:chgData name="Ayhan Karaman" userId="ec277a7f08761a62" providerId="LiveId" clId="{CBFD357C-8F92-4D88-94FF-A7AFF685E8E3}" dt="2026-09-09T23:51:00.094" v="1148" actId="1076"/>
+          <ac:spMkLst>
+            <pc:docMk/>
+            <pc:sldMk cId="230666391" sldId="270"/>
+            <ac:spMk id="10" creationId="{D403B7B3-9272-072C-6E00-AB11B81E4068}"/>
+          </ac:spMkLst>
+        </pc:spChg>
+        <pc:spChg chg="add mod">
+          <ac:chgData name="Ayhan Karaman" userId="ec277a7f08761a62" providerId="LiveId" clId="{CBFD357C-8F92-4D88-94FF-A7AFF685E8E3}" dt="2026-09-09T23:50:39.077" v="1145" actId="20577"/>
+          <ac:spMkLst>
+            <pc:docMk/>
+            <pc:sldMk cId="230666391" sldId="270"/>
+            <ac:spMk id="11" creationId="{0ACA21DE-3CED-250D-6F86-71332F76B3D6}"/>
+          </ac:spMkLst>
+        </pc:spChg>
+        <pc:spChg chg="add mod">
+          <ac:chgData name="Ayhan Karaman" userId="ec277a7f08761a62" providerId="LiveId" clId="{CBFD357C-8F92-4D88-94FF-A7AFF685E8E3}" dt="2026-09-09T23:52:28.352" v="1182" actId="14100"/>
+          <ac:spMkLst>
+            <pc:docMk/>
+            <pc:sldMk cId="230666391" sldId="270"/>
+            <ac:spMk id="12" creationId="{3D88EA6D-68F8-8E02-9EAF-4F0DBC6F7AB2}"/>
+          </ac:spMkLst>
+        </pc:spChg>
+        <pc:spChg chg="add mod">
+          <ac:chgData name="Ayhan Karaman" userId="ec277a7f08761a62" providerId="LiveId" clId="{CBFD357C-8F92-4D88-94FF-A7AFF685E8E3}" dt="2026-09-09T23:52:52.424" v="1207" actId="20577"/>
+          <ac:spMkLst>
+            <pc:docMk/>
+            <pc:sldMk cId="230666391" sldId="270"/>
+            <ac:spMk id="13" creationId="{12E07C86-93EE-7684-31EE-C88A51C6D5C6}"/>
+          </ac:spMkLst>
+        </pc:spChg>
+      </pc:sldChg>
+      <pc:sldChg chg="addSp delSp modSp mod">
+        <pc:chgData name="Ayhan Karaman" userId="ec277a7f08761a62" providerId="LiveId" clId="{CBFD357C-8F92-4D88-94FF-A7AFF685E8E3}" dt="2026-09-09T23:47:12.224" v="1045" actId="14100"/>
+        <pc:sldMkLst>
+          <pc:docMk/>
+          <pc:sldMk cId="3596893070" sldId="271"/>
+        </pc:sldMkLst>
+        <pc:spChg chg="add mod">
+          <ac:chgData name="Ayhan Karaman" userId="ec277a7f08761a62" providerId="LiveId" clId="{CBFD357C-8F92-4D88-94FF-A7AFF685E8E3}" dt="2026-09-09T23:42:53.633" v="945" actId="1076"/>
+          <ac:spMkLst>
+            <pc:docMk/>
+            <pc:sldMk cId="3596893070" sldId="271"/>
+            <ac:spMk id="3" creationId="{3322415E-899F-D7D5-A92F-EDF3D27C65CC}"/>
+          </ac:spMkLst>
+        </pc:spChg>
+        <pc:spChg chg="add mod">
+          <ac:chgData name="Ayhan Karaman" userId="ec277a7f08761a62" providerId="LiveId" clId="{CBFD357C-8F92-4D88-94FF-A7AFF685E8E3}" dt="2026-09-09T23:47:12.224" v="1045" actId="14100"/>
+          <ac:spMkLst>
+            <pc:docMk/>
+            <pc:sldMk cId="3596893070" sldId="271"/>
+            <ac:spMk id="6" creationId="{1CDB71B0-0029-0FC4-87CB-25E67CF9FF43}"/>
+          </ac:spMkLst>
+        </pc:spChg>
+        <pc:spChg chg="add mod">
+          <ac:chgData name="Ayhan Karaman" userId="ec277a7f08761a62" providerId="LiveId" clId="{CBFD357C-8F92-4D88-94FF-A7AFF685E8E3}" dt="2026-09-09T23:47:04.011" v="1042" actId="14100"/>
+          <ac:spMkLst>
+            <pc:docMk/>
+            <pc:sldMk cId="3596893070" sldId="271"/>
+            <ac:spMk id="10" creationId="{D7A79653-B068-64C8-1354-6ADAEDF64559}"/>
+          </ac:spMkLst>
+        </pc:spChg>
+        <pc:spChg chg="add del mod">
+          <ac:chgData name="Ayhan Karaman" userId="ec277a7f08761a62" providerId="LiveId" clId="{CBFD357C-8F92-4D88-94FF-A7AFF685E8E3}" dt="2026-09-09T23:42:45.113" v="944" actId="478"/>
+          <ac:spMkLst>
+            <pc:docMk/>
+            <pc:sldMk cId="3596893070" sldId="271"/>
+            <ac:spMk id="11" creationId="{7C659EAF-4DE4-1228-EF11-2F9E0A0A51AA}"/>
+          </ac:spMkLst>
+        </pc:spChg>
+        <pc:spChg chg="add del mod">
+          <ac:chgData name="Ayhan Karaman" userId="ec277a7f08761a62" providerId="LiveId" clId="{CBFD357C-8F92-4D88-94FF-A7AFF685E8E3}" dt="2026-09-09T23:42:45.113" v="944" actId="478"/>
+          <ac:spMkLst>
+            <pc:docMk/>
+            <pc:sldMk cId="3596893070" sldId="271"/>
+            <ac:spMk id="12" creationId="{8BA77535-92A1-F485-800F-AC31F7B7D51F}"/>
+          </ac:spMkLst>
+        </pc:spChg>
+        <pc:spChg chg="add del mod">
+          <ac:chgData name="Ayhan Karaman" userId="ec277a7f08761a62" providerId="LiveId" clId="{CBFD357C-8F92-4D88-94FF-A7AFF685E8E3}" dt="2026-09-09T23:42:45.113" v="944" actId="478"/>
+          <ac:spMkLst>
+            <pc:docMk/>
+            <pc:sldMk cId="3596893070" sldId="271"/>
+            <ac:spMk id="13" creationId="{5B417BA8-8FBD-6295-A70C-4E65D164117E}"/>
+          </ac:spMkLst>
+        </pc:spChg>
+      </pc:sldChg>
+      <pc:sldChg chg="addSp modSp mod">
+        <pc:chgData name="Ayhan Karaman" userId="ec277a7f08761a62" providerId="LiveId" clId="{CBFD357C-8F92-4D88-94FF-A7AFF685E8E3}" dt="2026-09-10T00:05:26.982" v="1489" actId="20577"/>
+        <pc:sldMkLst>
+          <pc:docMk/>
+          <pc:sldMk cId="4265281997" sldId="272"/>
+        </pc:sldMkLst>
+        <pc:spChg chg="add mod">
+          <ac:chgData name="Ayhan Karaman" userId="ec277a7f08761a62" providerId="LiveId" clId="{CBFD357C-8F92-4D88-94FF-A7AFF685E8E3}" dt="2026-09-09T23:56:03.314" v="1217" actId="20577"/>
+          <ac:spMkLst>
+            <pc:docMk/>
+            <pc:sldMk cId="4265281997" sldId="272"/>
+            <ac:spMk id="3" creationId="{D99AFECC-1A06-1A51-95BA-54F057057C9E}"/>
+          </ac:spMkLst>
+        </pc:spChg>
+        <pc:spChg chg="add mod">
+          <ac:chgData name="Ayhan Karaman" userId="ec277a7f08761a62" providerId="LiveId" clId="{CBFD357C-8F92-4D88-94FF-A7AFF685E8E3}" dt="2026-09-09T23:59:42.888" v="1302" actId="20577"/>
+          <ac:spMkLst>
+            <pc:docMk/>
+            <pc:sldMk cId="4265281997" sldId="272"/>
+            <ac:spMk id="6" creationId="{7B4810FB-E87B-D135-0EAF-C7FE5EB6A3D0}"/>
+          </ac:spMkLst>
+        </pc:spChg>
+        <pc:spChg chg="mod">
+          <ac:chgData name="Ayhan Karaman" userId="ec277a7f08761a62" providerId="LiveId" clId="{CBFD357C-8F92-4D88-94FF-A7AFF685E8E3}" dt="2026-09-10T00:03:03.640" v="1405" actId="20577"/>
+          <ac:spMkLst>
+            <pc:docMk/>
+            <pc:sldMk cId="4265281997" sldId="272"/>
+            <ac:spMk id="7" creationId="{035ECAAF-6A44-611A-A787-ED2E34D3FDD0}"/>
+          </ac:spMkLst>
+        </pc:spChg>
+        <pc:spChg chg="add mod">
+          <ac:chgData name="Ayhan Karaman" userId="ec277a7f08761a62" providerId="LiveId" clId="{CBFD357C-8F92-4D88-94FF-A7AFF685E8E3}" dt="2026-09-09T23:58:33.395" v="1297" actId="20577"/>
+          <ac:spMkLst>
+            <pc:docMk/>
+            <pc:sldMk cId="4265281997" sldId="272"/>
+            <ac:spMk id="10" creationId="{CA4B7A6D-57A0-14BC-6903-C7639B0C5878}"/>
+          </ac:spMkLst>
+        </pc:spChg>
+        <pc:spChg chg="add mod">
+          <ac:chgData name="Ayhan Karaman" userId="ec277a7f08761a62" providerId="LiveId" clId="{CBFD357C-8F92-4D88-94FF-A7AFF685E8E3}" dt="2026-09-09T23:59:06.545" v="1298" actId="1076"/>
+          <ac:spMkLst>
+            <pc:docMk/>
+            <pc:sldMk cId="4265281997" sldId="272"/>
+            <ac:spMk id="11" creationId="{374150D9-40BD-71F8-9DF8-6D20F5BC3C0C}"/>
+          </ac:spMkLst>
+        </pc:spChg>
+        <pc:spChg chg="add mod">
+          <ac:chgData name="Ayhan Karaman" userId="ec277a7f08761a62" providerId="LiveId" clId="{CBFD357C-8F92-4D88-94FF-A7AFF685E8E3}" dt="2026-09-10T00:01:40.833" v="1336" actId="20577"/>
+          <ac:spMkLst>
+            <pc:docMk/>
+            <pc:sldMk cId="4265281997" sldId="272"/>
+            <ac:spMk id="12" creationId="{C0407972-7926-ECE5-E0FA-5775C6D29843}"/>
+          </ac:spMkLst>
+        </pc:spChg>
+        <pc:spChg chg="add mod">
+          <ac:chgData name="Ayhan Karaman" userId="ec277a7f08761a62" providerId="LiveId" clId="{CBFD357C-8F92-4D88-94FF-A7AFF685E8E3}" dt="2026-09-10T00:02:09.959" v="1363" actId="20577"/>
+          <ac:spMkLst>
+            <pc:docMk/>
+            <pc:sldMk cId="4265281997" sldId="272"/>
+            <ac:spMk id="13" creationId="{BA3636F7-53C7-11C3-B133-EB0D305BA7D4}"/>
+          </ac:spMkLst>
+        </pc:spChg>
+        <pc:spChg chg="add mod">
+          <ac:chgData name="Ayhan Karaman" userId="ec277a7f08761a62" providerId="LiveId" clId="{CBFD357C-8F92-4D88-94FF-A7AFF685E8E3}" dt="2026-09-10T00:05:26.982" v="1489" actId="20577"/>
+          <ac:spMkLst>
+            <pc:docMk/>
+            <pc:sldMk cId="4265281997" sldId="272"/>
+            <ac:spMk id="14" creationId="{9A4ECD69-DCD0-7354-9195-730DD3F4FFF2}"/>
+          </ac:spMkLst>
+        </pc:spChg>
+        <pc:spChg chg="add mod">
+          <ac:chgData name="Ayhan Karaman" userId="ec277a7f08761a62" providerId="LiveId" clId="{CBFD357C-8F92-4D88-94FF-A7AFF685E8E3}" dt="2026-09-10T00:04:12.515" v="1431" actId="20577"/>
+          <ac:spMkLst>
+            <pc:docMk/>
+            <pc:sldMk cId="4265281997" sldId="272"/>
+            <ac:spMk id="15" creationId="{A01C367B-7F02-6933-0CE8-16C48EF75434}"/>
+          </ac:spMkLst>
+        </pc:spChg>
+        <pc:spChg chg="add mod">
+          <ac:chgData name="Ayhan Karaman" userId="ec277a7f08761a62" providerId="LiveId" clId="{CBFD357C-8F92-4D88-94FF-A7AFF685E8E3}" dt="2026-09-10T00:05:19.166" v="1480" actId="14100"/>
+          <ac:spMkLst>
+            <pc:docMk/>
+            <pc:sldMk cId="4265281997" sldId="272"/>
+            <ac:spMk id="16" creationId="{B3D58810-BA54-8762-06DA-23F6A7EECE26}"/>
+          </ac:spMkLst>
+        </pc:spChg>
+      </pc:sldChg>
+      <pc:sldChg chg="addSp delSp modSp mod">
+        <pc:chgData name="Ayhan Karaman" userId="ec277a7f08761a62" providerId="LiveId" clId="{CBFD357C-8F92-4D88-94FF-A7AFF685E8E3}" dt="2026-09-10T00:09:52.727" v="1598" actId="20577"/>
+        <pc:sldMkLst>
+          <pc:docMk/>
+          <pc:sldMk cId="848089597" sldId="273"/>
+        </pc:sldMkLst>
+        <pc:spChg chg="add mod">
+          <ac:chgData name="Ayhan Karaman" userId="ec277a7f08761a62" providerId="LiveId" clId="{CBFD357C-8F92-4D88-94FF-A7AFF685E8E3}" dt="2026-09-10T00:07:32.754" v="1517" actId="1076"/>
+          <ac:spMkLst>
+            <pc:docMk/>
+            <pc:sldMk cId="848089597" sldId="273"/>
+            <ac:spMk id="3" creationId="{8A2F94F4-3899-EBD3-726F-414C61C7870E}"/>
+          </ac:spMkLst>
+        </pc:spChg>
+        <pc:spChg chg="add mod">
+          <ac:chgData name="Ayhan Karaman" userId="ec277a7f08761a62" providerId="LiveId" clId="{CBFD357C-8F92-4D88-94FF-A7AFF685E8E3}" dt="2026-09-10T00:09:23.824" v="1581" actId="1076"/>
+          <ac:spMkLst>
+            <pc:docMk/>
+            <pc:sldMk cId="848089597" sldId="273"/>
+            <ac:spMk id="6" creationId="{F532CA6B-CC21-AB75-C253-6E684B64597C}"/>
+          </ac:spMkLst>
+        </pc:spChg>
+        <pc:spChg chg="add mod">
+          <ac:chgData name="Ayhan Karaman" userId="ec277a7f08761a62" providerId="LiveId" clId="{CBFD357C-8F92-4D88-94FF-A7AFF685E8E3}" dt="2026-09-10T00:09:23.824" v="1581" actId="1076"/>
+          <ac:spMkLst>
+            <pc:docMk/>
+            <pc:sldMk cId="848089597" sldId="273"/>
+            <ac:spMk id="10" creationId="{C58E938B-D441-DFF8-0128-7EB36F678159}"/>
+          </ac:spMkLst>
+        </pc:spChg>
+        <pc:spChg chg="add del mod">
+          <ac:chgData name="Ayhan Karaman" userId="ec277a7f08761a62" providerId="LiveId" clId="{CBFD357C-8F92-4D88-94FF-A7AFF685E8E3}" dt="2026-09-10T00:08:12.032" v="1557" actId="478"/>
+          <ac:spMkLst>
+            <pc:docMk/>
+            <pc:sldMk cId="848089597" sldId="273"/>
+            <ac:spMk id="11" creationId="{C2BD97CF-7892-91DF-FD4D-98B6D4F97933}"/>
+          </ac:spMkLst>
+        </pc:spChg>
+        <pc:spChg chg="add del mod">
+          <ac:chgData name="Ayhan Karaman" userId="ec277a7f08761a62" providerId="LiveId" clId="{CBFD357C-8F92-4D88-94FF-A7AFF685E8E3}" dt="2026-09-10T00:08:14.337" v="1558" actId="478"/>
+          <ac:spMkLst>
+            <pc:docMk/>
+            <pc:sldMk cId="848089597" sldId="273"/>
+            <ac:spMk id="12" creationId="{46B28FE6-6CAD-DCC9-7789-7B4070C3192A}"/>
+          </ac:spMkLst>
+        </pc:spChg>
+        <pc:spChg chg="add del mod">
+          <ac:chgData name="Ayhan Karaman" userId="ec277a7f08761a62" providerId="LiveId" clId="{CBFD357C-8F92-4D88-94FF-A7AFF685E8E3}" dt="2026-09-10T00:08:16.257" v="1559" actId="478"/>
+          <ac:spMkLst>
+            <pc:docMk/>
+            <pc:sldMk cId="848089597" sldId="273"/>
+            <ac:spMk id="13" creationId="{974E451E-D658-B45D-E107-8A2540FCCC3D}"/>
+          </ac:spMkLst>
+        </pc:spChg>
+        <pc:spChg chg="add mod">
+          <ac:chgData name="Ayhan Karaman" userId="ec277a7f08761a62" providerId="LiveId" clId="{CBFD357C-8F92-4D88-94FF-A7AFF685E8E3}" dt="2026-09-10T00:09:16.587" v="1578" actId="20577"/>
+          <ac:spMkLst>
+            <pc:docMk/>
+            <pc:sldMk cId="848089597" sldId="273"/>
+            <ac:spMk id="14" creationId="{413E5B26-81CC-85D7-B2D2-3829E333EE96}"/>
+          </ac:spMkLst>
+        </pc:spChg>
+        <pc:spChg chg="add mod">
+          <ac:chgData name="Ayhan Karaman" userId="ec277a7f08761a62" providerId="LiveId" clId="{CBFD357C-8F92-4D88-94FF-A7AFF685E8E3}" dt="2026-09-10T00:09:52.727" v="1598" actId="20577"/>
+          <ac:spMkLst>
+            <pc:docMk/>
+            <pc:sldMk cId="848089597" sldId="273"/>
+            <ac:spMk id="15" creationId="{9090AD23-5044-668F-F012-B1021FDCADF0}"/>
+          </ac:spMkLst>
+        </pc:spChg>
+      </pc:sldChg>
+      <pc:sldChg chg="addSp delSp modSp mod">
+        <pc:chgData name="Ayhan Karaman" userId="ec277a7f08761a62" providerId="LiveId" clId="{CBFD357C-8F92-4D88-94FF-A7AFF685E8E3}" dt="2026-09-10T00:22:21.238" v="1880" actId="478"/>
+        <pc:sldMkLst>
+          <pc:docMk/>
+          <pc:sldMk cId="4006609543" sldId="274"/>
+        </pc:sldMkLst>
+        <pc:spChg chg="add mod">
+          <ac:chgData name="Ayhan Karaman" userId="ec277a7f08761a62" providerId="LiveId" clId="{CBFD357C-8F92-4D88-94FF-A7AFF685E8E3}" dt="2026-09-10T00:17:52.306" v="1743" actId="1076"/>
+          <ac:spMkLst>
+            <pc:docMk/>
+            <pc:sldMk cId="4006609543" sldId="274"/>
+            <ac:spMk id="3" creationId="{25F1822C-A65A-2AD6-A822-88BC22C7F0B8}"/>
+          </ac:spMkLst>
+        </pc:spChg>
+        <pc:spChg chg="add mod">
+          <ac:chgData name="Ayhan Karaman" userId="ec277a7f08761a62" providerId="LiveId" clId="{CBFD357C-8F92-4D88-94FF-A7AFF685E8E3}" dt="2026-09-10T00:20:09.805" v="1773" actId="20577"/>
+          <ac:spMkLst>
+            <pc:docMk/>
+            <pc:sldMk cId="4006609543" sldId="274"/>
+            <ac:spMk id="6" creationId="{95E29101-413C-1D88-6C39-09F5891FE832}"/>
+          </ac:spMkLst>
+        </pc:spChg>
+        <pc:spChg chg="add mod">
+          <ac:chgData name="Ayhan Karaman" userId="ec277a7f08761a62" providerId="LiveId" clId="{CBFD357C-8F92-4D88-94FF-A7AFF685E8E3}" dt="2026-09-10T00:20:35.143" v="1824" actId="14100"/>
+          <ac:spMkLst>
+            <pc:docMk/>
+            <pc:sldMk cId="4006609543" sldId="274"/>
+            <ac:spMk id="10" creationId="{586E817A-E968-F21C-A84C-74F5E590DD12}"/>
+          </ac:spMkLst>
+        </pc:spChg>
+        <pc:spChg chg="add del mod">
+          <ac:chgData name="Ayhan Karaman" userId="ec277a7f08761a62" providerId="LiveId" clId="{CBFD357C-8F92-4D88-94FF-A7AFF685E8E3}" dt="2026-09-10T00:11:28.352" v="1600" actId="478"/>
+          <ac:spMkLst>
+            <pc:docMk/>
+            <pc:sldMk cId="4006609543" sldId="274"/>
+            <ac:spMk id="11" creationId="{8EFCAC65-2CBE-0184-D92C-E7954FF69349}"/>
+          </ac:spMkLst>
+        </pc:spChg>
+        <pc:spChg chg="add del mod">
+          <ac:chgData name="Ayhan Karaman" userId="ec277a7f08761a62" providerId="LiveId" clId="{CBFD357C-8F92-4D88-94FF-A7AFF685E8E3}" dt="2026-09-10T00:11:28.352" v="1600" actId="478"/>
+          <ac:spMkLst>
+            <pc:docMk/>
+            <pc:sldMk cId="4006609543" sldId="274"/>
+            <ac:spMk id="12" creationId="{E403033D-7A0D-13A0-5680-A22904E1F4EA}"/>
+          </ac:spMkLst>
+        </pc:spChg>
+        <pc:spChg chg="add del mod">
+          <ac:chgData name="Ayhan Karaman" userId="ec277a7f08761a62" providerId="LiveId" clId="{CBFD357C-8F92-4D88-94FF-A7AFF685E8E3}" dt="2026-09-10T00:11:28.352" v="1600" actId="478"/>
+          <ac:spMkLst>
+            <pc:docMk/>
+            <pc:sldMk cId="4006609543" sldId="274"/>
+            <ac:spMk id="13" creationId="{CB739D7F-FD77-7E79-7302-C381CAA2AB80}"/>
+          </ac:spMkLst>
+        </pc:spChg>
+        <pc:spChg chg="add del mod">
+          <ac:chgData name="Ayhan Karaman" userId="ec277a7f08761a62" providerId="LiveId" clId="{CBFD357C-8F92-4D88-94FF-A7AFF685E8E3}" dt="2026-09-10T00:21:03.830" v="1826" actId="478"/>
+          <ac:spMkLst>
+            <pc:docMk/>
+            <pc:sldMk cId="4006609543" sldId="274"/>
+            <ac:spMk id="14" creationId="{EED7C247-5723-AA25-64B1-1BEF95EF9F50}"/>
+          </ac:spMkLst>
+        </pc:spChg>
+        <pc:spChg chg="add mod">
+          <ac:chgData name="Ayhan Karaman" userId="ec277a7f08761a62" providerId="LiveId" clId="{CBFD357C-8F92-4D88-94FF-A7AFF685E8E3}" dt="2026-09-10T00:22:14.749" v="1879" actId="20577"/>
+          <ac:spMkLst>
+            <pc:docMk/>
+            <pc:sldMk cId="4006609543" sldId="274"/>
+            <ac:spMk id="15" creationId="{56444D58-53F1-C018-ACE0-D5884D66AC5A}"/>
+          </ac:spMkLst>
+        </pc:spChg>
+        <pc:spChg chg="add del mod">
+          <ac:chgData name="Ayhan Karaman" userId="ec277a7f08761a62" providerId="LiveId" clId="{CBFD357C-8F92-4D88-94FF-A7AFF685E8E3}" dt="2026-09-10T00:22:21.238" v="1880" actId="478"/>
+          <ac:spMkLst>
+            <pc:docMk/>
+            <pc:sldMk cId="4006609543" sldId="274"/>
+            <ac:spMk id="16" creationId="{95E420FB-525D-09D3-5B01-1A3BF73579F4}"/>
+          </ac:spMkLst>
+        </pc:spChg>
+        <pc:spChg chg="add del mod">
+          <ac:chgData name="Ayhan Karaman" userId="ec277a7f08761a62" providerId="LiveId" clId="{CBFD357C-8F92-4D88-94FF-A7AFF685E8E3}" dt="2026-09-10T00:22:21.238" v="1880" actId="478"/>
+          <ac:spMkLst>
+            <pc:docMk/>
+            <pc:sldMk cId="4006609543" sldId="274"/>
+            <ac:spMk id="17" creationId="{F563E2A0-BDE9-466D-1371-631DCFFAC602}"/>
+          </ac:spMkLst>
+        </pc:spChg>
+        <pc:spChg chg="add mod">
+          <ac:chgData name="Ayhan Karaman" userId="ec277a7f08761a62" providerId="LiveId" clId="{CBFD357C-8F92-4D88-94FF-A7AFF685E8E3}" dt="2026-09-10T00:21:52.087" v="1850" actId="20577"/>
+          <ac:spMkLst>
+            <pc:docMk/>
+            <pc:sldMk cId="4006609543" sldId="274"/>
+            <ac:spMk id="18" creationId="{A32D877E-9718-3020-2609-A6A8BEA46053}"/>
+          </ac:spMkLst>
+        </pc:spChg>
+      </pc:sldChg>
+      <pc:sldChg chg="addSp modSp">
+        <pc:chgData name="Ayhan Karaman" userId="ec277a7f08761a62" providerId="LiveId" clId="{CBFD357C-8F92-4D88-94FF-A7AFF685E8E3}" dt="2026-09-10T00:18:30.159" v="1745"/>
+        <pc:sldMkLst>
+          <pc:docMk/>
+          <pc:sldMk cId="975404287" sldId="275"/>
+        </pc:sldMkLst>
+        <pc:spChg chg="add mod">
+          <ac:chgData name="Ayhan Karaman" userId="ec277a7f08761a62" providerId="LiveId" clId="{CBFD357C-8F92-4D88-94FF-A7AFF685E8E3}" dt="2026-09-10T00:17:59.988" v="1744"/>
+          <ac:spMkLst>
+            <pc:docMk/>
+            <pc:sldMk cId="975404287" sldId="275"/>
+            <ac:spMk id="3" creationId="{D3EBE54C-E890-5EE8-0A37-1D930015F79C}"/>
+          </ac:spMkLst>
+        </pc:spChg>
+        <pc:spChg chg="add mod">
+          <ac:chgData name="Ayhan Karaman" userId="ec277a7f08761a62" providerId="LiveId" clId="{CBFD357C-8F92-4D88-94FF-A7AFF685E8E3}" dt="2026-09-10T00:17:59.988" v="1744"/>
+          <ac:spMkLst>
+            <pc:docMk/>
+            <pc:sldMk cId="975404287" sldId="275"/>
+            <ac:spMk id="6" creationId="{7787EE1D-F5C1-E2B3-010D-D6B89DB5B972}"/>
+          </ac:spMkLst>
+        </pc:spChg>
+        <pc:spChg chg="add mod">
+          <ac:chgData name="Ayhan Karaman" userId="ec277a7f08761a62" providerId="LiveId" clId="{CBFD357C-8F92-4D88-94FF-A7AFF685E8E3}" dt="2026-09-10T00:17:59.988" v="1744"/>
+          <ac:spMkLst>
+            <pc:docMk/>
+            <pc:sldMk cId="975404287" sldId="275"/>
+            <ac:spMk id="10" creationId="{D4A95A59-3A92-1E47-F607-B1515EE4D61C}"/>
+          </ac:spMkLst>
+        </pc:spChg>
+        <pc:spChg chg="add mod">
+          <ac:chgData name="Ayhan Karaman" userId="ec277a7f08761a62" providerId="LiveId" clId="{CBFD357C-8F92-4D88-94FF-A7AFF685E8E3}" dt="2026-09-10T00:17:59.988" v="1744"/>
+          <ac:spMkLst>
+            <pc:docMk/>
+            <pc:sldMk cId="975404287" sldId="275"/>
+            <ac:spMk id="11" creationId="{10E8FBDF-CD10-C568-656E-A04E50471826}"/>
+          </ac:spMkLst>
+        </pc:spChg>
+        <pc:spChg chg="add mod">
+          <ac:chgData name="Ayhan Karaman" userId="ec277a7f08761a62" providerId="LiveId" clId="{CBFD357C-8F92-4D88-94FF-A7AFF685E8E3}" dt="2026-09-10T00:17:59.988" v="1744"/>
+          <ac:spMkLst>
+            <pc:docMk/>
+            <pc:sldMk cId="975404287" sldId="275"/>
+            <ac:spMk id="12" creationId="{14A158F1-D856-3503-A164-E671DD9B3565}"/>
+          </ac:spMkLst>
+        </pc:spChg>
+        <pc:spChg chg="add mod">
+          <ac:chgData name="Ayhan Karaman" userId="ec277a7f08761a62" providerId="LiveId" clId="{CBFD357C-8F92-4D88-94FF-A7AFF685E8E3}" dt="2026-09-10T00:17:59.988" v="1744"/>
+          <ac:spMkLst>
+            <pc:docMk/>
+            <pc:sldMk cId="975404287" sldId="275"/>
+            <ac:spMk id="13" creationId="{55F0369F-F8E7-D13C-284A-53D3E7895F17}"/>
+          </ac:spMkLst>
+        </pc:spChg>
+        <pc:spChg chg="add mod">
+          <ac:chgData name="Ayhan Karaman" userId="ec277a7f08761a62" providerId="LiveId" clId="{CBFD357C-8F92-4D88-94FF-A7AFF685E8E3}" dt="2026-09-10T00:18:30.159" v="1745"/>
+          <ac:spMkLst>
+            <pc:docMk/>
+            <pc:sldMk cId="975404287" sldId="275"/>
+            <ac:spMk id="14" creationId="{03D86960-53FD-AAC9-63D0-44633BEE3D70}"/>
+          </ac:spMkLst>
+        </pc:spChg>
+        <pc:spChg chg="add mod">
+          <ac:chgData name="Ayhan Karaman" userId="ec277a7f08761a62" providerId="LiveId" clId="{CBFD357C-8F92-4D88-94FF-A7AFF685E8E3}" dt="2026-09-10T00:18:30.159" v="1745"/>
+          <ac:spMkLst>
+            <pc:docMk/>
+            <pc:sldMk cId="975404287" sldId="275"/>
+            <ac:spMk id="15" creationId="{0BD51D84-9E2D-2D69-C0F9-B236B320E0DA}"/>
+          </ac:spMkLst>
+        </pc:spChg>
+        <pc:spChg chg="add mod">
+          <ac:chgData name="Ayhan Karaman" userId="ec277a7f08761a62" providerId="LiveId" clId="{CBFD357C-8F92-4D88-94FF-A7AFF685E8E3}" dt="2026-09-10T00:18:30.159" v="1745"/>
+          <ac:spMkLst>
+            <pc:docMk/>
+            <pc:sldMk cId="975404287" sldId="275"/>
+            <ac:spMk id="16" creationId="{4E75F418-A8F3-7AE4-A436-876C196C3570}"/>
+          </ac:spMkLst>
+        </pc:spChg>
+        <pc:spChg chg="add mod">
+          <ac:chgData name="Ayhan Karaman" userId="ec277a7f08761a62" providerId="LiveId" clId="{CBFD357C-8F92-4D88-94FF-A7AFF685E8E3}" dt="2026-09-10T00:18:30.159" v="1745"/>
+          <ac:spMkLst>
+            <pc:docMk/>
+            <pc:sldMk cId="975404287" sldId="275"/>
+            <ac:spMk id="17" creationId="{DDC6E4F7-214D-FC39-98E8-B6F3740C900B}"/>
+          </ac:spMkLst>
+        </pc:spChg>
+        <pc:spChg chg="add mod">
+          <ac:chgData name="Ayhan Karaman" userId="ec277a7f08761a62" providerId="LiveId" clId="{CBFD357C-8F92-4D88-94FF-A7AFF685E8E3}" dt="2026-09-10T00:18:30.159" v="1745"/>
+          <ac:spMkLst>
+            <pc:docMk/>
+            <pc:sldMk cId="975404287" sldId="275"/>
+            <ac:spMk id="18" creationId="{A8CAB398-E376-7549-94F3-D9473D8C121F}"/>
+          </ac:spMkLst>
+        </pc:spChg>
+        <pc:spChg chg="add mod">
+          <ac:chgData name="Ayhan Karaman" userId="ec277a7f08761a62" providerId="LiveId" clId="{CBFD357C-8F92-4D88-94FF-A7AFF685E8E3}" dt="2026-09-10T00:18:30.159" v="1745"/>
+          <ac:spMkLst>
+            <pc:docMk/>
+            <pc:sldMk cId="975404287" sldId="275"/>
+            <ac:spMk id="19" creationId="{164E4CCA-9CBB-2DE4-6A0F-DB6FDEEE4E3F}"/>
+          </ac:spMkLst>
+        </pc:spChg>
+        <pc:spChg chg="add mod">
+          <ac:chgData name="Ayhan Karaman" userId="ec277a7f08761a62" providerId="LiveId" clId="{CBFD357C-8F92-4D88-94FF-A7AFF685E8E3}" dt="2026-09-10T00:18:30.159" v="1745"/>
+          <ac:spMkLst>
+            <pc:docMk/>
+            <pc:sldMk cId="975404287" sldId="275"/>
+            <ac:spMk id="20" creationId="{3EA84498-48F1-3F42-0575-1551889C5CA5}"/>
+          </ac:spMkLst>
+        </pc:spChg>
+      </pc:sldChg>
+    </pc:docChg>
+  </pc:docChgLst>
+</pc:chgInfo>
+</file>
+
 <file path=ppt/slideLayouts/slideLayout1.xml><?xml version="1.0" encoding="utf-8"?>
 <p:sldLayout xmlns:a="http://schemas.openxmlformats.org/drawingml/2006/main" xmlns:r="http://schemas.openxmlformats.org/officeDocument/2006/relationships" xmlns:p="http://schemas.openxmlformats.org/presentationml/2006/main" type="title" preserve="1">
   <p:cSld name="Başlık Slaydı">
@@ -278,7 +1254,7 @@
           <a:p>
             <a:fld id="{20A09914-A052-41C0-AB34-A4555936D3D8}" type="datetimeFigureOut">
               <a:rPr lang="tr-TR" smtClean="0"/>
-              <a:t>29.08.2026</a:t>
+              <a:t>10.09.2026</a:t>
             </a:fld>
             <a:endParaRPr lang="tr-TR"/>
           </a:p>
@@ -476,7 +1452,7 @@
           <a:p>
             <a:fld id="{20A09914-A052-41C0-AB34-A4555936D3D8}" type="datetimeFigureOut">
               <a:rPr lang="tr-TR" smtClean="0"/>
-              <a:t>29.08.2026</a:t>
+              <a:t>10.09.2026</a:t>
             </a:fld>
             <a:endParaRPr lang="tr-TR"/>
           </a:p>
@@ -684,7 +1660,7 @@
           <a:p>
             <a:fld id="{20A09914-A052-41C0-AB34-A4555936D3D8}" type="datetimeFigureOut">
               <a:rPr lang="tr-TR" smtClean="0"/>
-              <a:t>29.08.2026</a:t>
+              <a:t>10.09.2026</a:t>
             </a:fld>
             <a:endParaRPr lang="tr-TR"/>
           </a:p>
@@ -882,7 +1858,7 @@
           <a:p>
             <a:fld id="{20A09914-A052-41C0-AB34-A4555936D3D8}" type="datetimeFigureOut">
               <a:rPr lang="tr-TR" smtClean="0"/>
-              <a:t>29.08.2026</a:t>
+              <a:t>10.09.2026</a:t>
             </a:fld>
             <a:endParaRPr lang="tr-TR"/>
           </a:p>
@@ -1157,7 +2133,7 @@
           <a:p>
             <a:fld id="{20A09914-A052-41C0-AB34-A4555936D3D8}" type="datetimeFigureOut">
               <a:rPr lang="tr-TR" smtClean="0"/>
-              <a:t>29.08.2026</a:t>
+              <a:t>10.09.2026</a:t>
             </a:fld>
             <a:endParaRPr lang="tr-TR"/>
           </a:p>
@@ -1422,7 +2398,7 @@
           <a:p>
             <a:fld id="{20A09914-A052-41C0-AB34-A4555936D3D8}" type="datetimeFigureOut">
               <a:rPr lang="tr-TR" smtClean="0"/>
-              <a:t>29.08.2026</a:t>
+              <a:t>10.09.2026</a:t>
             </a:fld>
             <a:endParaRPr lang="tr-TR"/>
           </a:p>
@@ -1834,7 +2810,7 @@
           <a:p>
             <a:fld id="{20A09914-A052-41C0-AB34-A4555936D3D8}" type="datetimeFigureOut">
               <a:rPr lang="tr-TR" smtClean="0"/>
-              <a:t>29.08.2026</a:t>
+              <a:t>10.09.2026</a:t>
             </a:fld>
             <a:endParaRPr lang="tr-TR"/>
           </a:p>
@@ -1975,7 +2951,7 @@
           <a:p>
             <a:fld id="{20A09914-A052-41C0-AB34-A4555936D3D8}" type="datetimeFigureOut">
               <a:rPr lang="tr-TR" smtClean="0"/>
-              <a:t>29.08.2026</a:t>
+              <a:t>10.09.2026</a:t>
             </a:fld>
             <a:endParaRPr lang="tr-TR"/>
           </a:p>
@@ -2088,7 +3064,7 @@
           <a:p>
             <a:fld id="{20A09914-A052-41C0-AB34-A4555936D3D8}" type="datetimeFigureOut">
               <a:rPr lang="tr-TR" smtClean="0"/>
-              <a:t>29.08.2026</a:t>
+              <a:t>10.09.2026</a:t>
             </a:fld>
             <a:endParaRPr lang="tr-TR"/>
           </a:p>
@@ -2399,7 +3375,7 @@
           <a:p>
             <a:fld id="{20A09914-A052-41C0-AB34-A4555936D3D8}" type="datetimeFigureOut">
               <a:rPr lang="tr-TR" smtClean="0"/>
-              <a:t>29.08.2026</a:t>
+              <a:t>10.09.2026</a:t>
             </a:fld>
             <a:endParaRPr lang="tr-TR"/>
           </a:p>
@@ -2687,7 +3663,7 @@
           <a:p>
             <a:fld id="{20A09914-A052-41C0-AB34-A4555936D3D8}" type="datetimeFigureOut">
               <a:rPr lang="tr-TR" smtClean="0"/>
-              <a:t>29.08.2026</a:t>
+              <a:t>10.09.2026</a:t>
             </a:fld>
             <a:endParaRPr lang="tr-TR"/>
           </a:p>
@@ -2928,7 +3904,7 @@
           <a:p>
             <a:fld id="{20A09914-A052-41C0-AB34-A4555936D3D8}" type="datetimeFigureOut">
               <a:rPr lang="tr-TR" smtClean="0"/>
-              <a:t>29.08.2026</a:t>
+              <a:t>10.09.2026</a:t>
             </a:fld>
             <a:endParaRPr lang="tr-TR"/>
           </a:p>
@@ -5577,6 +6553,336 @@
           </a:p>
         </p:txBody>
       </p:sp>
+      <p:sp>
+        <p:nvSpPr>
+          <p:cNvPr id="3" name="Metin kutusu 2">
+            <a:extLst>
+              <a:ext uri="{FF2B5EF4-FFF2-40B4-BE49-F238E27FC236}">
+                <a16:creationId xmlns:a16="http://schemas.microsoft.com/office/drawing/2014/main" id="{82144A74-894B-38C1-98F5-A9CE3151786D}"/>
+              </a:ext>
+            </a:extLst>
+          </p:cNvPr>
+          <p:cNvSpPr txBox="1"/>
+          <p:nvPr/>
+        </p:nvSpPr>
+        <p:spPr>
+          <a:xfrm>
+            <a:off x="240820" y="5664681"/>
+            <a:ext cx="1436996" cy="369332"/>
+          </a:xfrm>
+          <a:prstGeom prst="rect">
+            <a:avLst/>
+          </a:prstGeom>
+          <a:noFill/>
+        </p:spPr>
+        <p:txBody>
+          <a:bodyPr wrap="none" rtlCol="0">
+            <a:spAutoFit/>
+          </a:bodyPr>
+          <a:lstStyle/>
+          <a:p>
+            <a:r>
+              <a:rPr lang="tr-TR" dirty="0">
+                <a:solidFill>
+                  <a:srgbClr val="FF0000"/>
+                </a:solidFill>
+              </a:rPr>
+              <a:t>Failde Misal:</a:t>
+            </a:r>
+          </a:p>
+        </p:txBody>
+      </p:sp>
+      <p:sp>
+        <p:nvSpPr>
+          <p:cNvPr id="6" name="Metin kutusu 5">
+            <a:extLst>
+              <a:ext uri="{FF2B5EF4-FFF2-40B4-BE49-F238E27FC236}">
+                <a16:creationId xmlns:a16="http://schemas.microsoft.com/office/drawing/2014/main" id="{6485F9D5-5356-1773-DE2C-0AF6AA2759EF}"/>
+              </a:ext>
+            </a:extLst>
+          </p:cNvPr>
+          <p:cNvSpPr txBox="1"/>
+          <p:nvPr/>
+        </p:nvSpPr>
+        <p:spPr>
+          <a:xfrm>
+            <a:off x="240820" y="6039766"/>
+            <a:ext cx="2812931" cy="369332"/>
+          </a:xfrm>
+          <a:prstGeom prst="rect">
+            <a:avLst/>
+          </a:prstGeom>
+          <a:noFill/>
+        </p:spPr>
+        <p:txBody>
+          <a:bodyPr wrap="square" rtlCol="0">
+            <a:spAutoFit/>
+          </a:bodyPr>
+          <a:lstStyle/>
+          <a:p>
+            <a:r>
+              <a:rPr lang="ar-AE" dirty="0"/>
+              <a:t>مَوَّتَ الْاِبِلُ</a:t>
+            </a:r>
+            <a:endParaRPr lang="tr-TR" dirty="0"/>
+          </a:p>
+        </p:txBody>
+      </p:sp>
+      <p:sp>
+        <p:nvSpPr>
+          <p:cNvPr id="10" name="Metin kutusu 9">
+            <a:extLst>
+              <a:ext uri="{FF2B5EF4-FFF2-40B4-BE49-F238E27FC236}">
+                <a16:creationId xmlns:a16="http://schemas.microsoft.com/office/drawing/2014/main" id="{FAC8DE33-11CB-4126-4FAF-484210B1773E}"/>
+              </a:ext>
+            </a:extLst>
+          </p:cNvPr>
+          <p:cNvSpPr txBox="1"/>
+          <p:nvPr/>
+        </p:nvSpPr>
+        <p:spPr>
+          <a:xfrm>
+            <a:off x="240819" y="6335609"/>
+            <a:ext cx="3028591" cy="369332"/>
+          </a:xfrm>
+          <a:prstGeom prst="rect">
+            <a:avLst/>
+          </a:prstGeom>
+          <a:noFill/>
+        </p:spPr>
+        <p:txBody>
+          <a:bodyPr wrap="square" rtlCol="0">
+            <a:spAutoFit/>
+          </a:bodyPr>
+          <a:lstStyle/>
+          <a:p>
+            <a:r>
+              <a:rPr lang="tr-TR" dirty="0"/>
+              <a:t>Develer Öldü.</a:t>
+            </a:r>
+          </a:p>
+        </p:txBody>
+      </p:sp>
+      <p:sp>
+        <p:nvSpPr>
+          <p:cNvPr id="11" name="Metin kutusu 10">
+            <a:extLst>
+              <a:ext uri="{FF2B5EF4-FFF2-40B4-BE49-F238E27FC236}">
+                <a16:creationId xmlns:a16="http://schemas.microsoft.com/office/drawing/2014/main" id="{A344AB4F-529D-EF9A-B3F2-E75CCA5044C2}"/>
+              </a:ext>
+            </a:extLst>
+          </p:cNvPr>
+          <p:cNvSpPr txBox="1"/>
+          <p:nvPr/>
+        </p:nvSpPr>
+        <p:spPr>
+          <a:xfrm>
+            <a:off x="8278605" y="5591192"/>
+            <a:ext cx="1641796" cy="369332"/>
+          </a:xfrm>
+          <a:prstGeom prst="rect">
+            <a:avLst/>
+          </a:prstGeom>
+          <a:noFill/>
+        </p:spPr>
+        <p:txBody>
+          <a:bodyPr wrap="none" rtlCol="0">
+            <a:spAutoFit/>
+          </a:bodyPr>
+          <a:lstStyle/>
+          <a:p>
+            <a:r>
+              <a:rPr lang="tr-TR" dirty="0">
+                <a:solidFill>
+                  <a:srgbClr val="FF0000"/>
+                </a:solidFill>
+              </a:rPr>
+              <a:t>Mefulde Misal:</a:t>
+            </a:r>
+          </a:p>
+        </p:txBody>
+      </p:sp>
+      <p:sp>
+        <p:nvSpPr>
+          <p:cNvPr id="12" name="Metin kutusu 11">
+            <a:extLst>
+              <a:ext uri="{FF2B5EF4-FFF2-40B4-BE49-F238E27FC236}">
+                <a16:creationId xmlns:a16="http://schemas.microsoft.com/office/drawing/2014/main" id="{93D6236E-0BE6-126C-8E38-D1362B8706A9}"/>
+              </a:ext>
+            </a:extLst>
+          </p:cNvPr>
+          <p:cNvSpPr txBox="1"/>
+          <p:nvPr/>
+        </p:nvSpPr>
+        <p:spPr>
+          <a:xfrm>
+            <a:off x="8278605" y="5966277"/>
+            <a:ext cx="1979300" cy="369332"/>
+          </a:xfrm>
+          <a:prstGeom prst="rect">
+            <a:avLst/>
+          </a:prstGeom>
+          <a:noFill/>
+        </p:spPr>
+        <p:txBody>
+          <a:bodyPr wrap="square" rtlCol="0">
+            <a:spAutoFit/>
+          </a:bodyPr>
+          <a:lstStyle/>
+          <a:p>
+            <a:r>
+              <a:rPr lang="ar-AE" dirty="0"/>
+              <a:t>غَلَّقَ زَيْدٌ اَلْاَبْوَبَ</a:t>
+            </a:r>
+            <a:endParaRPr lang="tr-TR" dirty="0"/>
+          </a:p>
+        </p:txBody>
+      </p:sp>
+      <p:sp>
+        <p:nvSpPr>
+          <p:cNvPr id="13" name="Metin kutusu 12">
+            <a:extLst>
+              <a:ext uri="{FF2B5EF4-FFF2-40B4-BE49-F238E27FC236}">
+                <a16:creationId xmlns:a16="http://schemas.microsoft.com/office/drawing/2014/main" id="{C0AB2F71-4E8F-BC20-264E-4BC959771FFD}"/>
+              </a:ext>
+            </a:extLst>
+          </p:cNvPr>
+          <p:cNvSpPr txBox="1"/>
+          <p:nvPr/>
+        </p:nvSpPr>
+        <p:spPr>
+          <a:xfrm>
+            <a:off x="8241821" y="6335609"/>
+            <a:ext cx="2695998" cy="369332"/>
+          </a:xfrm>
+          <a:prstGeom prst="rect">
+            <a:avLst/>
+          </a:prstGeom>
+          <a:noFill/>
+        </p:spPr>
+        <p:txBody>
+          <a:bodyPr wrap="square" rtlCol="0">
+            <a:spAutoFit/>
+          </a:bodyPr>
+          <a:lstStyle/>
+          <a:p>
+            <a:r>
+              <a:rPr lang="tr-TR" dirty="0"/>
+              <a:t>Zeyd Çok kapıları kapattı.</a:t>
+            </a:r>
+          </a:p>
+        </p:txBody>
+      </p:sp>
+      <p:sp>
+        <p:nvSpPr>
+          <p:cNvPr id="14" name="Metin kutusu 13">
+            <a:extLst>
+              <a:ext uri="{FF2B5EF4-FFF2-40B4-BE49-F238E27FC236}">
+                <a16:creationId xmlns:a16="http://schemas.microsoft.com/office/drawing/2014/main" id="{93111C23-5E23-69C2-DF86-861A738A0234}"/>
+              </a:ext>
+            </a:extLst>
+          </p:cNvPr>
+          <p:cNvSpPr txBox="1"/>
+          <p:nvPr/>
+        </p:nvSpPr>
+        <p:spPr>
+          <a:xfrm>
+            <a:off x="240819" y="4494566"/>
+            <a:ext cx="1413913" cy="369332"/>
+          </a:xfrm>
+          <a:prstGeom prst="rect">
+            <a:avLst/>
+          </a:prstGeom>
+          <a:noFill/>
+        </p:spPr>
+        <p:txBody>
+          <a:bodyPr wrap="none" rtlCol="0">
+            <a:spAutoFit/>
+          </a:bodyPr>
+          <a:lstStyle/>
+          <a:p>
+            <a:r>
+              <a:rPr lang="tr-TR" dirty="0">
+                <a:solidFill>
+                  <a:srgbClr val="FF0000"/>
+                </a:solidFill>
+              </a:rPr>
+              <a:t>Fiilde Misal:</a:t>
+            </a:r>
+          </a:p>
+        </p:txBody>
+      </p:sp>
+      <p:sp>
+        <p:nvSpPr>
+          <p:cNvPr id="15" name="Metin kutusu 14">
+            <a:extLst>
+              <a:ext uri="{FF2B5EF4-FFF2-40B4-BE49-F238E27FC236}">
+                <a16:creationId xmlns:a16="http://schemas.microsoft.com/office/drawing/2014/main" id="{4A7CF6DD-2B92-F5BE-5F89-CB11BBB5E117}"/>
+              </a:ext>
+            </a:extLst>
+          </p:cNvPr>
+          <p:cNvSpPr txBox="1"/>
+          <p:nvPr/>
+        </p:nvSpPr>
+        <p:spPr>
+          <a:xfrm>
+            <a:off x="240819" y="4869651"/>
+            <a:ext cx="2812931" cy="369332"/>
+          </a:xfrm>
+          <a:prstGeom prst="rect">
+            <a:avLst/>
+          </a:prstGeom>
+          <a:noFill/>
+        </p:spPr>
+        <p:txBody>
+          <a:bodyPr wrap="square" rtlCol="0">
+            <a:spAutoFit/>
+          </a:bodyPr>
+          <a:lstStyle/>
+          <a:p>
+            <a:r>
+              <a:rPr lang="ar-AE" dirty="0"/>
+              <a:t>طَوَّفَ زَيْدٌ الْكَعْبَةَ</a:t>
+            </a:r>
+            <a:endParaRPr lang="tr-TR" dirty="0"/>
+          </a:p>
+        </p:txBody>
+      </p:sp>
+      <p:sp>
+        <p:nvSpPr>
+          <p:cNvPr id="16" name="Metin kutusu 15">
+            <a:extLst>
+              <a:ext uri="{FF2B5EF4-FFF2-40B4-BE49-F238E27FC236}">
+                <a16:creationId xmlns:a16="http://schemas.microsoft.com/office/drawing/2014/main" id="{276CE77E-52BE-6BAA-BB51-AEC7CE8DB5BD}"/>
+              </a:ext>
+            </a:extLst>
+          </p:cNvPr>
+          <p:cNvSpPr txBox="1"/>
+          <p:nvPr/>
+        </p:nvSpPr>
+        <p:spPr>
+          <a:xfrm>
+            <a:off x="240818" y="5165494"/>
+            <a:ext cx="3028591" cy="369332"/>
+          </a:xfrm>
+          <a:prstGeom prst="rect">
+            <a:avLst/>
+          </a:prstGeom>
+          <a:noFill/>
+        </p:spPr>
+        <p:txBody>
+          <a:bodyPr wrap="square" rtlCol="0">
+            <a:spAutoFit/>
+          </a:bodyPr>
+          <a:lstStyle/>
+          <a:p>
+            <a:r>
+              <a:rPr lang="tr-TR" dirty="0"/>
+              <a:t>Zeyd Kabe’yi çok tavaf etti.</a:t>
+            </a:r>
+          </a:p>
+        </p:txBody>
+      </p:sp>
     </p:spTree>
     <p:extLst>
       <p:ext uri="{BB962C8B-B14F-4D97-AF65-F5344CB8AC3E}">
@@ -6225,6 +7531,239 @@
           </a:p>
         </p:txBody>
       </p:sp>
+      <p:sp>
+        <p:nvSpPr>
+          <p:cNvPr id="6" name="Metin kutusu 5">
+            <a:extLst>
+              <a:ext uri="{FF2B5EF4-FFF2-40B4-BE49-F238E27FC236}">
+                <a16:creationId xmlns:a16="http://schemas.microsoft.com/office/drawing/2014/main" id="{799B0842-999C-8615-F322-C18681BCD3DC}"/>
+              </a:ext>
+            </a:extLst>
+          </p:cNvPr>
+          <p:cNvSpPr txBox="1"/>
+          <p:nvPr/>
+        </p:nvSpPr>
+        <p:spPr>
+          <a:xfrm>
+            <a:off x="240820" y="5664681"/>
+            <a:ext cx="1454244" cy="369332"/>
+          </a:xfrm>
+          <a:prstGeom prst="rect">
+            <a:avLst/>
+          </a:prstGeom>
+          <a:noFill/>
+        </p:spPr>
+        <p:txBody>
+          <a:bodyPr wrap="none" rtlCol="0">
+            <a:spAutoFit/>
+          </a:bodyPr>
+          <a:lstStyle/>
+          <a:p>
+            <a:r>
+              <a:rPr lang="tr-TR" dirty="0">
+                <a:solidFill>
+                  <a:srgbClr val="FF0000"/>
+                </a:solidFill>
+              </a:rPr>
+              <a:t>İki Kişi Misal:</a:t>
+            </a:r>
+          </a:p>
+        </p:txBody>
+      </p:sp>
+      <p:sp>
+        <p:nvSpPr>
+          <p:cNvPr id="9" name="Metin kutusu 8">
+            <a:extLst>
+              <a:ext uri="{FF2B5EF4-FFF2-40B4-BE49-F238E27FC236}">
+                <a16:creationId xmlns:a16="http://schemas.microsoft.com/office/drawing/2014/main" id="{C18C3DFC-2675-CF4A-AA0D-3F527FCE5185}"/>
+              </a:ext>
+            </a:extLst>
+          </p:cNvPr>
+          <p:cNvSpPr txBox="1"/>
+          <p:nvPr/>
+        </p:nvSpPr>
+        <p:spPr>
+          <a:xfrm>
+            <a:off x="240820" y="6039766"/>
+            <a:ext cx="2812931" cy="369332"/>
+          </a:xfrm>
+          <a:prstGeom prst="rect">
+            <a:avLst/>
+          </a:prstGeom>
+          <a:noFill/>
+        </p:spPr>
+        <p:txBody>
+          <a:bodyPr wrap="square" rtlCol="0">
+            <a:spAutoFit/>
+          </a:bodyPr>
+          <a:lstStyle/>
+          <a:p>
+            <a:r>
+              <a:rPr lang="ar-AE" dirty="0"/>
+              <a:t>قَاتَلَ زَيْدٌ عَمْرًا</a:t>
+            </a:r>
+            <a:endParaRPr lang="tr-TR" dirty="0"/>
+          </a:p>
+        </p:txBody>
+      </p:sp>
+      <p:sp>
+        <p:nvSpPr>
+          <p:cNvPr id="10" name="Metin kutusu 9">
+            <a:extLst>
+              <a:ext uri="{FF2B5EF4-FFF2-40B4-BE49-F238E27FC236}">
+                <a16:creationId xmlns:a16="http://schemas.microsoft.com/office/drawing/2014/main" id="{C3CCC768-D77B-805F-3790-159790E6B439}"/>
+              </a:ext>
+            </a:extLst>
+          </p:cNvPr>
+          <p:cNvSpPr txBox="1"/>
+          <p:nvPr/>
+        </p:nvSpPr>
+        <p:spPr>
+          <a:xfrm>
+            <a:off x="240819" y="6335609"/>
+            <a:ext cx="3028591" cy="369332"/>
+          </a:xfrm>
+          <a:prstGeom prst="rect">
+            <a:avLst/>
+          </a:prstGeom>
+          <a:noFill/>
+        </p:spPr>
+        <p:txBody>
+          <a:bodyPr wrap="square" rtlCol="0">
+            <a:spAutoFit/>
+          </a:bodyPr>
+          <a:lstStyle/>
+          <a:p>
+            <a:r>
+              <a:rPr lang="tr-TR" dirty="0"/>
+              <a:t>Zeyd </a:t>
+            </a:r>
+            <a:r>
+              <a:rPr lang="tr-TR" dirty="0" err="1"/>
+              <a:t>Amr’ı</a:t>
+            </a:r>
+            <a:r>
+              <a:rPr lang="tr-TR" dirty="0"/>
+              <a:t> Öldürdü.</a:t>
+            </a:r>
+          </a:p>
+        </p:txBody>
+      </p:sp>
+      <p:sp>
+        <p:nvSpPr>
+          <p:cNvPr id="11" name="Metin kutusu 10">
+            <a:extLst>
+              <a:ext uri="{FF2B5EF4-FFF2-40B4-BE49-F238E27FC236}">
+                <a16:creationId xmlns:a16="http://schemas.microsoft.com/office/drawing/2014/main" id="{443DC411-7966-8D5D-62A2-28602D021630}"/>
+              </a:ext>
+            </a:extLst>
+          </p:cNvPr>
+          <p:cNvSpPr txBox="1"/>
+          <p:nvPr/>
+        </p:nvSpPr>
+        <p:spPr>
+          <a:xfrm>
+            <a:off x="8278605" y="5591192"/>
+            <a:ext cx="1554400" cy="369332"/>
+          </a:xfrm>
+          <a:prstGeom prst="rect">
+            <a:avLst/>
+          </a:prstGeom>
+          <a:noFill/>
+        </p:spPr>
+        <p:txBody>
+          <a:bodyPr wrap="none" rtlCol="0">
+            <a:spAutoFit/>
+          </a:bodyPr>
+          <a:lstStyle/>
+          <a:p>
+            <a:r>
+              <a:rPr lang="tr-TR" dirty="0">
+                <a:solidFill>
+                  <a:srgbClr val="FF0000"/>
+                </a:solidFill>
+              </a:rPr>
+              <a:t>Tek Kişi Misal:</a:t>
+            </a:r>
+          </a:p>
+        </p:txBody>
+      </p:sp>
+      <p:sp>
+        <p:nvSpPr>
+          <p:cNvPr id="12" name="Metin kutusu 11">
+            <a:extLst>
+              <a:ext uri="{FF2B5EF4-FFF2-40B4-BE49-F238E27FC236}">
+                <a16:creationId xmlns:a16="http://schemas.microsoft.com/office/drawing/2014/main" id="{242FC698-6075-9DCC-159D-6F1FB9AAFDFD}"/>
+              </a:ext>
+            </a:extLst>
+          </p:cNvPr>
+          <p:cNvSpPr txBox="1"/>
+          <p:nvPr/>
+        </p:nvSpPr>
+        <p:spPr>
+          <a:xfrm>
+            <a:off x="8278605" y="5966277"/>
+            <a:ext cx="1311215" cy="369332"/>
+          </a:xfrm>
+          <a:prstGeom prst="rect">
+            <a:avLst/>
+          </a:prstGeom>
+          <a:noFill/>
+        </p:spPr>
+        <p:txBody>
+          <a:bodyPr wrap="square" rtlCol="0">
+            <a:spAutoFit/>
+          </a:bodyPr>
+          <a:lstStyle/>
+          <a:p>
+            <a:r>
+              <a:rPr lang="ar-AE" dirty="0"/>
+              <a:t>قَاتَلَهُمُ اللَّهُ</a:t>
+            </a:r>
+            <a:endParaRPr lang="tr-TR" dirty="0"/>
+          </a:p>
+        </p:txBody>
+      </p:sp>
+      <p:sp>
+        <p:nvSpPr>
+          <p:cNvPr id="13" name="Metin kutusu 12">
+            <a:extLst>
+              <a:ext uri="{FF2B5EF4-FFF2-40B4-BE49-F238E27FC236}">
+                <a16:creationId xmlns:a16="http://schemas.microsoft.com/office/drawing/2014/main" id="{9122CF18-F0FC-3F68-566C-94B47D65EF23}"/>
+              </a:ext>
+            </a:extLst>
+          </p:cNvPr>
+          <p:cNvSpPr txBox="1"/>
+          <p:nvPr/>
+        </p:nvSpPr>
+        <p:spPr>
+          <a:xfrm>
+            <a:off x="8241821" y="6335609"/>
+            <a:ext cx="2695998" cy="369332"/>
+          </a:xfrm>
+          <a:prstGeom prst="rect">
+            <a:avLst/>
+          </a:prstGeom>
+          <a:noFill/>
+        </p:spPr>
+        <p:txBody>
+          <a:bodyPr wrap="square" rtlCol="0">
+            <a:spAutoFit/>
+          </a:bodyPr>
+          <a:lstStyle/>
+          <a:p>
+            <a:r>
+              <a:rPr lang="tr-TR" dirty="0"/>
+              <a:t>Allah </a:t>
+            </a:r>
+            <a:r>
+              <a:rPr lang="tr-TR"/>
+              <a:t>Onları Katletsin.</a:t>
+            </a:r>
+            <a:endParaRPr lang="tr-TR" dirty="0"/>
+          </a:p>
+        </p:txBody>
+      </p:sp>
     </p:spTree>
     <p:extLst>
       <p:ext uri="{BB962C8B-B14F-4D97-AF65-F5344CB8AC3E}">
@@ -6815,6 +8354,187 @@
           </a:p>
         </p:txBody>
       </p:sp>
+      <p:sp>
+        <p:nvSpPr>
+          <p:cNvPr id="3" name="Metin kutusu 2">
+            <a:extLst>
+              <a:ext uri="{FF2B5EF4-FFF2-40B4-BE49-F238E27FC236}">
+                <a16:creationId xmlns:a16="http://schemas.microsoft.com/office/drawing/2014/main" id="{8B7060DF-2A7A-F63E-A901-D62DC998F296}"/>
+              </a:ext>
+            </a:extLst>
+          </p:cNvPr>
+          <p:cNvSpPr txBox="1"/>
+          <p:nvPr/>
+        </p:nvSpPr>
+        <p:spPr>
+          <a:xfrm>
+            <a:off x="242663" y="5104053"/>
+            <a:ext cx="782587" cy="369332"/>
+          </a:xfrm>
+          <a:prstGeom prst="rect">
+            <a:avLst/>
+          </a:prstGeom>
+          <a:noFill/>
+        </p:spPr>
+        <p:txBody>
+          <a:bodyPr wrap="none" rtlCol="0">
+            <a:spAutoFit/>
+          </a:bodyPr>
+          <a:lstStyle/>
+          <a:p>
+            <a:r>
+              <a:rPr lang="tr-TR" dirty="0">
+                <a:solidFill>
+                  <a:srgbClr val="FF0000"/>
+                </a:solidFill>
+              </a:rPr>
+              <a:t>Misal:</a:t>
+            </a:r>
+          </a:p>
+        </p:txBody>
+      </p:sp>
+      <p:sp>
+        <p:nvSpPr>
+          <p:cNvPr id="6" name="Metin kutusu 5">
+            <a:extLst>
+              <a:ext uri="{FF2B5EF4-FFF2-40B4-BE49-F238E27FC236}">
+                <a16:creationId xmlns:a16="http://schemas.microsoft.com/office/drawing/2014/main" id="{E02432A8-3EDD-F375-BF2C-A4425B873D2A}"/>
+              </a:ext>
+            </a:extLst>
+          </p:cNvPr>
+          <p:cNvSpPr txBox="1"/>
+          <p:nvPr/>
+        </p:nvSpPr>
+        <p:spPr>
+          <a:xfrm>
+            <a:off x="218069" y="5428449"/>
+            <a:ext cx="2812931" cy="369332"/>
+          </a:xfrm>
+          <a:prstGeom prst="rect">
+            <a:avLst/>
+          </a:prstGeom>
+          <a:noFill/>
+        </p:spPr>
+        <p:txBody>
+          <a:bodyPr wrap="square" rtlCol="0">
+            <a:spAutoFit/>
+          </a:bodyPr>
+          <a:lstStyle/>
+          <a:p>
+            <a:r>
+              <a:rPr lang="ar-AE" dirty="0"/>
+              <a:t>كَسَرْتُ الزُّجَاجَ </a:t>
+            </a:r>
+            <a:endParaRPr lang="tr-TR" dirty="0"/>
+          </a:p>
+        </p:txBody>
+      </p:sp>
+      <p:sp>
+        <p:nvSpPr>
+          <p:cNvPr id="10" name="Metin kutusu 9">
+            <a:extLst>
+              <a:ext uri="{FF2B5EF4-FFF2-40B4-BE49-F238E27FC236}">
+                <a16:creationId xmlns:a16="http://schemas.microsoft.com/office/drawing/2014/main" id="{5CB9E22E-E8A5-418C-F732-B2DADECFC7CD}"/>
+              </a:ext>
+            </a:extLst>
+          </p:cNvPr>
+          <p:cNvSpPr txBox="1"/>
+          <p:nvPr/>
+        </p:nvSpPr>
+        <p:spPr>
+          <a:xfrm>
+            <a:off x="240818" y="5797781"/>
+            <a:ext cx="3028591" cy="369332"/>
+          </a:xfrm>
+          <a:prstGeom prst="rect">
+            <a:avLst/>
+          </a:prstGeom>
+          <a:noFill/>
+        </p:spPr>
+        <p:txBody>
+          <a:bodyPr wrap="square" rtlCol="0">
+            <a:spAutoFit/>
+          </a:bodyPr>
+          <a:lstStyle/>
+          <a:p>
+            <a:r>
+              <a:rPr lang="tr-TR" dirty="0"/>
+              <a:t>Ben camı kırdım.</a:t>
+            </a:r>
+          </a:p>
+        </p:txBody>
+      </p:sp>
+      <p:sp>
+        <p:nvSpPr>
+          <p:cNvPr id="11" name="Metin kutusu 10">
+            <a:extLst>
+              <a:ext uri="{FF2B5EF4-FFF2-40B4-BE49-F238E27FC236}">
+                <a16:creationId xmlns:a16="http://schemas.microsoft.com/office/drawing/2014/main" id="{756193AF-6E9A-B434-3DB3-81B994356130}"/>
+              </a:ext>
+            </a:extLst>
+          </p:cNvPr>
+          <p:cNvSpPr txBox="1"/>
+          <p:nvPr/>
+        </p:nvSpPr>
+        <p:spPr>
+          <a:xfrm>
+            <a:off x="226381" y="6122177"/>
+            <a:ext cx="2812931" cy="369332"/>
+          </a:xfrm>
+          <a:prstGeom prst="rect">
+            <a:avLst/>
+          </a:prstGeom>
+          <a:noFill/>
+        </p:spPr>
+        <p:txBody>
+          <a:bodyPr wrap="square" rtlCol="0">
+            <a:spAutoFit/>
+          </a:bodyPr>
+          <a:lstStyle/>
+          <a:p>
+            <a:r>
+              <a:rPr lang="ar-AE" dirty="0"/>
+              <a:t>فَانْكَسَرَ الزُّجَاجُ</a:t>
+            </a:r>
+            <a:endParaRPr lang="tr-TR" dirty="0"/>
+          </a:p>
+        </p:txBody>
+      </p:sp>
+      <p:sp>
+        <p:nvSpPr>
+          <p:cNvPr id="12" name="Metin kutusu 11">
+            <a:extLst>
+              <a:ext uri="{FF2B5EF4-FFF2-40B4-BE49-F238E27FC236}">
+                <a16:creationId xmlns:a16="http://schemas.microsoft.com/office/drawing/2014/main" id="{26F0D5DA-0338-5DDC-8ED9-A60353D7016A}"/>
+              </a:ext>
+            </a:extLst>
+          </p:cNvPr>
+          <p:cNvSpPr txBox="1"/>
+          <p:nvPr/>
+        </p:nvSpPr>
+        <p:spPr>
+          <a:xfrm>
+            <a:off x="240818" y="6491509"/>
+            <a:ext cx="3028591" cy="369332"/>
+          </a:xfrm>
+          <a:prstGeom prst="rect">
+            <a:avLst/>
+          </a:prstGeom>
+          <a:noFill/>
+        </p:spPr>
+        <p:txBody>
+          <a:bodyPr wrap="square" rtlCol="0">
+            <a:spAutoFit/>
+          </a:bodyPr>
+          <a:lstStyle/>
+          <a:p>
+            <a:r>
+              <a:rPr lang="tr-TR" dirty="0"/>
+              <a:t>Şu camda hemen kırıldı</a:t>
+            </a:r>
+          </a:p>
+        </p:txBody>
+      </p:sp>
     </p:spTree>
     <p:extLst>
       <p:ext uri="{BB962C8B-B14F-4D97-AF65-F5344CB8AC3E}">
@@ -7437,6 +9157,187 @@
           </a:p>
         </p:txBody>
       </p:sp>
+      <p:sp>
+        <p:nvSpPr>
+          <p:cNvPr id="3" name="Metin kutusu 2">
+            <a:extLst>
+              <a:ext uri="{FF2B5EF4-FFF2-40B4-BE49-F238E27FC236}">
+                <a16:creationId xmlns:a16="http://schemas.microsoft.com/office/drawing/2014/main" id="{1CFC5862-95EC-21C8-FA65-A60214E31CD4}"/>
+              </a:ext>
+            </a:extLst>
+          </p:cNvPr>
+          <p:cNvSpPr txBox="1"/>
+          <p:nvPr/>
+        </p:nvSpPr>
+        <p:spPr>
+          <a:xfrm>
+            <a:off x="242663" y="5104053"/>
+            <a:ext cx="782587" cy="369332"/>
+          </a:xfrm>
+          <a:prstGeom prst="rect">
+            <a:avLst/>
+          </a:prstGeom>
+          <a:noFill/>
+        </p:spPr>
+        <p:txBody>
+          <a:bodyPr wrap="none" rtlCol="0">
+            <a:spAutoFit/>
+          </a:bodyPr>
+          <a:lstStyle/>
+          <a:p>
+            <a:r>
+              <a:rPr lang="tr-TR" dirty="0">
+                <a:solidFill>
+                  <a:srgbClr val="FF0000"/>
+                </a:solidFill>
+              </a:rPr>
+              <a:t>Misal:</a:t>
+            </a:r>
+          </a:p>
+        </p:txBody>
+      </p:sp>
+      <p:sp>
+        <p:nvSpPr>
+          <p:cNvPr id="6" name="Metin kutusu 5">
+            <a:extLst>
+              <a:ext uri="{FF2B5EF4-FFF2-40B4-BE49-F238E27FC236}">
+                <a16:creationId xmlns:a16="http://schemas.microsoft.com/office/drawing/2014/main" id="{FE7F2C9E-6707-4090-321F-3DF8ABBB1783}"/>
+              </a:ext>
+            </a:extLst>
+          </p:cNvPr>
+          <p:cNvSpPr txBox="1"/>
+          <p:nvPr/>
+        </p:nvSpPr>
+        <p:spPr>
+          <a:xfrm>
+            <a:off x="218069" y="5428449"/>
+            <a:ext cx="2812931" cy="369332"/>
+          </a:xfrm>
+          <a:prstGeom prst="rect">
+            <a:avLst/>
+          </a:prstGeom>
+          <a:noFill/>
+        </p:spPr>
+        <p:txBody>
+          <a:bodyPr wrap="square" rtlCol="0">
+            <a:spAutoFit/>
+          </a:bodyPr>
+          <a:lstStyle/>
+          <a:p>
+            <a:r>
+              <a:rPr lang="ar-AE" dirty="0"/>
+              <a:t>جَمَعْتُ الاِبِلِ </a:t>
+            </a:r>
+            <a:endParaRPr lang="tr-TR" dirty="0"/>
+          </a:p>
+        </p:txBody>
+      </p:sp>
+      <p:sp>
+        <p:nvSpPr>
+          <p:cNvPr id="10" name="Metin kutusu 9">
+            <a:extLst>
+              <a:ext uri="{FF2B5EF4-FFF2-40B4-BE49-F238E27FC236}">
+                <a16:creationId xmlns:a16="http://schemas.microsoft.com/office/drawing/2014/main" id="{7199B9BC-BE8B-EB87-4A32-E6376E1C4334}"/>
+              </a:ext>
+            </a:extLst>
+          </p:cNvPr>
+          <p:cNvSpPr txBox="1"/>
+          <p:nvPr/>
+        </p:nvSpPr>
+        <p:spPr>
+          <a:xfrm>
+            <a:off x="240818" y="5797781"/>
+            <a:ext cx="3028591" cy="369332"/>
+          </a:xfrm>
+          <a:prstGeom prst="rect">
+            <a:avLst/>
+          </a:prstGeom>
+          <a:noFill/>
+        </p:spPr>
+        <p:txBody>
+          <a:bodyPr wrap="square" rtlCol="0">
+            <a:spAutoFit/>
+          </a:bodyPr>
+          <a:lstStyle/>
+          <a:p>
+            <a:r>
+              <a:rPr lang="tr-TR" dirty="0"/>
+              <a:t>Ben develeri topladım.</a:t>
+            </a:r>
+          </a:p>
+        </p:txBody>
+      </p:sp>
+      <p:sp>
+        <p:nvSpPr>
+          <p:cNvPr id="11" name="Metin kutusu 10">
+            <a:extLst>
+              <a:ext uri="{FF2B5EF4-FFF2-40B4-BE49-F238E27FC236}">
+                <a16:creationId xmlns:a16="http://schemas.microsoft.com/office/drawing/2014/main" id="{24BA7104-E62C-FB4C-5C9D-8F9220720BD8}"/>
+              </a:ext>
+            </a:extLst>
+          </p:cNvPr>
+          <p:cNvSpPr txBox="1"/>
+          <p:nvPr/>
+        </p:nvSpPr>
+        <p:spPr>
+          <a:xfrm>
+            <a:off x="218069" y="6154497"/>
+            <a:ext cx="2812931" cy="369332"/>
+          </a:xfrm>
+          <a:prstGeom prst="rect">
+            <a:avLst/>
+          </a:prstGeom>
+          <a:noFill/>
+        </p:spPr>
+        <p:txBody>
+          <a:bodyPr wrap="square" rtlCol="0">
+            <a:spAutoFit/>
+          </a:bodyPr>
+          <a:lstStyle/>
+          <a:p>
+            <a:r>
+              <a:rPr lang="ar-AE" dirty="0"/>
+              <a:t>فَاجْتَمَعَ ذَالِكَ الاِبِلُ</a:t>
+            </a:r>
+            <a:endParaRPr lang="tr-TR" dirty="0"/>
+          </a:p>
+        </p:txBody>
+      </p:sp>
+      <p:sp>
+        <p:nvSpPr>
+          <p:cNvPr id="12" name="Metin kutusu 11">
+            <a:extLst>
+              <a:ext uri="{FF2B5EF4-FFF2-40B4-BE49-F238E27FC236}">
+                <a16:creationId xmlns:a16="http://schemas.microsoft.com/office/drawing/2014/main" id="{40B68953-278F-A5E5-D33A-8CA07F38431D}"/>
+              </a:ext>
+            </a:extLst>
+          </p:cNvPr>
+          <p:cNvSpPr txBox="1"/>
+          <p:nvPr/>
+        </p:nvSpPr>
+        <p:spPr>
+          <a:xfrm>
+            <a:off x="240818" y="6491509"/>
+            <a:ext cx="3242215" cy="369332"/>
+          </a:xfrm>
+          <a:prstGeom prst="rect">
+            <a:avLst/>
+          </a:prstGeom>
+          <a:noFill/>
+        </p:spPr>
+        <p:txBody>
+          <a:bodyPr wrap="square" rtlCol="0">
+            <a:spAutoFit/>
+          </a:bodyPr>
+          <a:lstStyle/>
+          <a:p>
+            <a:r>
+              <a:rPr lang="tr-TR" dirty="0"/>
+              <a:t>Şu develerde hemen toplandı.</a:t>
+            </a:r>
+          </a:p>
+        </p:txBody>
+      </p:sp>
     </p:spTree>
     <p:extLst>
       <p:ext uri="{BB962C8B-B14F-4D97-AF65-F5344CB8AC3E}">
@@ -8011,6 +9912,242 @@
           </a:p>
         </p:txBody>
       </p:sp>
+      <p:sp>
+        <p:nvSpPr>
+          <p:cNvPr id="13" name="Metin kutusu 12">
+            <a:extLst>
+              <a:ext uri="{FF2B5EF4-FFF2-40B4-BE49-F238E27FC236}">
+                <a16:creationId xmlns:a16="http://schemas.microsoft.com/office/drawing/2014/main" id="{E725CA31-5909-3E34-A82A-43DBBD315E32}"/>
+              </a:ext>
+            </a:extLst>
+          </p:cNvPr>
+          <p:cNvSpPr txBox="1"/>
+          <p:nvPr/>
+        </p:nvSpPr>
+        <p:spPr>
+          <a:xfrm>
+            <a:off x="240820" y="5664681"/>
+            <a:ext cx="1672253" cy="369332"/>
+          </a:xfrm>
+          <a:prstGeom prst="rect">
+            <a:avLst/>
+          </a:prstGeom>
+          <a:noFill/>
+        </p:spPr>
+        <p:txBody>
+          <a:bodyPr wrap="none" rtlCol="0">
+            <a:spAutoFit/>
+          </a:bodyPr>
+          <a:lstStyle/>
+          <a:p>
+            <a:r>
+              <a:rPr lang="tr-TR" dirty="0">
+                <a:solidFill>
+                  <a:srgbClr val="FF0000"/>
+                </a:solidFill>
+              </a:rPr>
+              <a:t>Renk İçin Misal</a:t>
+            </a:r>
+          </a:p>
+        </p:txBody>
+      </p:sp>
+      <p:sp>
+        <p:nvSpPr>
+          <p:cNvPr id="14" name="Metin kutusu 13">
+            <a:extLst>
+              <a:ext uri="{FF2B5EF4-FFF2-40B4-BE49-F238E27FC236}">
+                <a16:creationId xmlns:a16="http://schemas.microsoft.com/office/drawing/2014/main" id="{9AFA29D9-E02A-A727-AA1E-2F89206EBB96}"/>
+              </a:ext>
+            </a:extLst>
+          </p:cNvPr>
+          <p:cNvSpPr txBox="1"/>
+          <p:nvPr/>
+        </p:nvSpPr>
+        <p:spPr>
+          <a:xfrm>
+            <a:off x="240820" y="6039766"/>
+            <a:ext cx="2812931" cy="461665"/>
+          </a:xfrm>
+          <a:prstGeom prst="rect">
+            <a:avLst/>
+          </a:prstGeom>
+          <a:noFill/>
+        </p:spPr>
+        <p:txBody>
+          <a:bodyPr wrap="square" rtlCol="0">
+            <a:spAutoFit/>
+          </a:bodyPr>
+          <a:lstStyle/>
+          <a:p>
+            <a:r>
+              <a:rPr lang="ar-AE" sz="2400" dirty="0"/>
+              <a:t>اِحْمَرَّ</a:t>
+            </a:r>
+            <a:r>
+              <a:rPr lang="ar-AE" dirty="0"/>
+              <a:t> </a:t>
+            </a:r>
+            <a:r>
+              <a:rPr lang="ar-AE" sz="2400" dirty="0"/>
+              <a:t>زَيْدٌ</a:t>
+            </a:r>
+            <a:endParaRPr lang="tr-TR" dirty="0"/>
+          </a:p>
+        </p:txBody>
+      </p:sp>
+      <p:sp>
+        <p:nvSpPr>
+          <p:cNvPr id="15" name="Metin kutusu 14">
+            <a:extLst>
+              <a:ext uri="{FF2B5EF4-FFF2-40B4-BE49-F238E27FC236}">
+                <a16:creationId xmlns:a16="http://schemas.microsoft.com/office/drawing/2014/main" id="{3FBAE9AA-0A2C-AADC-6081-2C3DC8A185C3}"/>
+              </a:ext>
+            </a:extLst>
+          </p:cNvPr>
+          <p:cNvSpPr txBox="1"/>
+          <p:nvPr/>
+        </p:nvSpPr>
+        <p:spPr>
+          <a:xfrm>
+            <a:off x="240819" y="6335609"/>
+            <a:ext cx="3028591" cy="369332"/>
+          </a:xfrm>
+          <a:prstGeom prst="rect">
+            <a:avLst/>
+          </a:prstGeom>
+          <a:noFill/>
+        </p:spPr>
+        <p:txBody>
+          <a:bodyPr wrap="square" rtlCol="0">
+            <a:spAutoFit/>
+          </a:bodyPr>
+          <a:lstStyle/>
+          <a:p>
+            <a:r>
+              <a:rPr lang="tr-TR" dirty="0"/>
+              <a:t>Zeyd çok </a:t>
+            </a:r>
+            <a:r>
+              <a:rPr lang="tr-TR" dirty="0" err="1"/>
+              <a:t>kızard</a:t>
+            </a:r>
+            <a:r>
+              <a:rPr lang="tr-TR" dirty="0"/>
+              <a:t>.</a:t>
+            </a:r>
+          </a:p>
+        </p:txBody>
+      </p:sp>
+      <p:sp>
+        <p:nvSpPr>
+          <p:cNvPr id="16" name="Metin kutusu 15">
+            <a:extLst>
+              <a:ext uri="{FF2B5EF4-FFF2-40B4-BE49-F238E27FC236}">
+                <a16:creationId xmlns:a16="http://schemas.microsoft.com/office/drawing/2014/main" id="{15ED020D-8E2B-27B0-574D-5AA8496507E4}"/>
+              </a:ext>
+            </a:extLst>
+          </p:cNvPr>
+          <p:cNvSpPr txBox="1"/>
+          <p:nvPr/>
+        </p:nvSpPr>
+        <p:spPr>
+          <a:xfrm>
+            <a:off x="8278605" y="5591192"/>
+            <a:ext cx="1660391" cy="369332"/>
+          </a:xfrm>
+          <a:prstGeom prst="rect">
+            <a:avLst/>
+          </a:prstGeom>
+          <a:noFill/>
+        </p:spPr>
+        <p:txBody>
+          <a:bodyPr wrap="none" rtlCol="0">
+            <a:spAutoFit/>
+          </a:bodyPr>
+          <a:lstStyle/>
+          <a:p>
+            <a:r>
+              <a:rPr lang="tr-TR" dirty="0">
+                <a:solidFill>
+                  <a:srgbClr val="FF0000"/>
+                </a:solidFill>
+              </a:rPr>
+              <a:t>Ayıp İçin Misal:</a:t>
+            </a:r>
+          </a:p>
+        </p:txBody>
+      </p:sp>
+      <p:sp>
+        <p:nvSpPr>
+          <p:cNvPr id="17" name="Metin kutusu 16">
+            <a:extLst>
+              <a:ext uri="{FF2B5EF4-FFF2-40B4-BE49-F238E27FC236}">
+                <a16:creationId xmlns:a16="http://schemas.microsoft.com/office/drawing/2014/main" id="{E2362809-7658-CAD1-D1BD-DED21642C158}"/>
+              </a:ext>
+            </a:extLst>
+          </p:cNvPr>
+          <p:cNvSpPr txBox="1"/>
+          <p:nvPr/>
+        </p:nvSpPr>
+        <p:spPr>
+          <a:xfrm>
+            <a:off x="8278605" y="5966277"/>
+            <a:ext cx="1311215" cy="461665"/>
+          </a:xfrm>
+          <a:prstGeom prst="rect">
+            <a:avLst/>
+          </a:prstGeom>
+          <a:noFill/>
+        </p:spPr>
+        <p:txBody>
+          <a:bodyPr wrap="square" rtlCol="0">
+            <a:spAutoFit/>
+          </a:bodyPr>
+          <a:lstStyle/>
+          <a:p>
+            <a:r>
+              <a:rPr lang="ar-AE" sz="2400" dirty="0"/>
+              <a:t>اِعْوَرَّ زَيْدٌ</a:t>
+            </a:r>
+            <a:endParaRPr lang="tr-TR" sz="2400" dirty="0"/>
+          </a:p>
+        </p:txBody>
+      </p:sp>
+      <p:sp>
+        <p:nvSpPr>
+          <p:cNvPr id="18" name="Metin kutusu 17">
+            <a:extLst>
+              <a:ext uri="{FF2B5EF4-FFF2-40B4-BE49-F238E27FC236}">
+                <a16:creationId xmlns:a16="http://schemas.microsoft.com/office/drawing/2014/main" id="{33F84081-D7E9-6E67-4344-6A49B312A9E1}"/>
+              </a:ext>
+            </a:extLst>
+          </p:cNvPr>
+          <p:cNvSpPr txBox="1"/>
+          <p:nvPr/>
+        </p:nvSpPr>
+        <p:spPr>
+          <a:xfrm>
+            <a:off x="8241821" y="6335609"/>
+            <a:ext cx="2695998" cy="369332"/>
+          </a:xfrm>
+          <a:prstGeom prst="rect">
+            <a:avLst/>
+          </a:prstGeom>
+          <a:noFill/>
+        </p:spPr>
+        <p:txBody>
+          <a:bodyPr wrap="square" rtlCol="0">
+            <a:spAutoFit/>
+          </a:bodyPr>
+          <a:lstStyle/>
+          <a:p>
+            <a:r>
+              <a:rPr lang="tr-TR" dirty="0"/>
+              <a:t>Zeyd tek gözlü oldu.</a:t>
+            </a:r>
+          </a:p>
+        </p:txBody>
+      </p:sp>
     </p:spTree>
     <p:extLst>
       <p:ext uri="{BB962C8B-B14F-4D97-AF65-F5344CB8AC3E}">
@@ -8657,6 +10794,116 @@
           </a:p>
         </p:txBody>
       </p:sp>
+      <p:sp>
+        <p:nvSpPr>
+          <p:cNvPr id="3" name="Metin kutusu 2">
+            <a:extLst>
+              <a:ext uri="{FF2B5EF4-FFF2-40B4-BE49-F238E27FC236}">
+                <a16:creationId xmlns:a16="http://schemas.microsoft.com/office/drawing/2014/main" id="{3322415E-899F-D7D5-A92F-EDF3D27C65CC}"/>
+              </a:ext>
+            </a:extLst>
+          </p:cNvPr>
+          <p:cNvSpPr txBox="1"/>
+          <p:nvPr/>
+        </p:nvSpPr>
+        <p:spPr>
+          <a:xfrm>
+            <a:off x="240819" y="4830030"/>
+            <a:ext cx="1454244" cy="369332"/>
+          </a:xfrm>
+          <a:prstGeom prst="rect">
+            <a:avLst/>
+          </a:prstGeom>
+          <a:noFill/>
+        </p:spPr>
+        <p:txBody>
+          <a:bodyPr wrap="none" rtlCol="0">
+            <a:spAutoFit/>
+          </a:bodyPr>
+          <a:lstStyle/>
+          <a:p>
+            <a:r>
+              <a:rPr lang="tr-TR" dirty="0">
+                <a:solidFill>
+                  <a:srgbClr val="FF0000"/>
+                </a:solidFill>
+              </a:rPr>
+              <a:t>İki Kişi Misal:</a:t>
+            </a:r>
+          </a:p>
+        </p:txBody>
+      </p:sp>
+      <p:sp>
+        <p:nvSpPr>
+          <p:cNvPr id="6" name="Metin kutusu 5">
+            <a:extLst>
+              <a:ext uri="{FF2B5EF4-FFF2-40B4-BE49-F238E27FC236}">
+                <a16:creationId xmlns:a16="http://schemas.microsoft.com/office/drawing/2014/main" id="{1CDB71B0-0029-0FC4-87CB-25E67CF9FF43}"/>
+              </a:ext>
+            </a:extLst>
+          </p:cNvPr>
+          <p:cNvSpPr txBox="1"/>
+          <p:nvPr/>
+        </p:nvSpPr>
+        <p:spPr>
+          <a:xfrm>
+            <a:off x="240819" y="5480015"/>
+            <a:ext cx="2901392" cy="461665"/>
+          </a:xfrm>
+          <a:prstGeom prst="rect">
+            <a:avLst/>
+          </a:prstGeom>
+          <a:noFill/>
+        </p:spPr>
+        <p:txBody>
+          <a:bodyPr wrap="square" rtlCol="0">
+            <a:spAutoFit/>
+          </a:bodyPr>
+          <a:lstStyle/>
+          <a:p>
+            <a:r>
+              <a:rPr lang="ar-AE" sz="2400" dirty="0"/>
+              <a:t>تَعَلَّمْتُ العِلْمَ مَسْئَلَةً بَعْدَ مَسْئَلَةٍ</a:t>
+            </a:r>
+            <a:endParaRPr lang="tr-TR" sz="2400" dirty="0"/>
+          </a:p>
+        </p:txBody>
+      </p:sp>
+      <p:sp>
+        <p:nvSpPr>
+          <p:cNvPr id="10" name="Metin kutusu 9">
+            <a:extLst>
+              <a:ext uri="{FF2B5EF4-FFF2-40B4-BE49-F238E27FC236}">
+                <a16:creationId xmlns:a16="http://schemas.microsoft.com/office/drawing/2014/main" id="{D7A79653-B068-64C8-1354-6ADAEDF64559}"/>
+              </a:ext>
+            </a:extLst>
+          </p:cNvPr>
+          <p:cNvSpPr txBox="1"/>
+          <p:nvPr/>
+        </p:nvSpPr>
+        <p:spPr>
+          <a:xfrm>
+            <a:off x="240819" y="6130000"/>
+            <a:ext cx="3117523" cy="369332"/>
+          </a:xfrm>
+          <a:prstGeom prst="rect">
+            <a:avLst/>
+          </a:prstGeom>
+          <a:noFill/>
+        </p:spPr>
+        <p:txBody>
+          <a:bodyPr wrap="square" rtlCol="0">
+            <a:spAutoFit/>
+          </a:bodyPr>
+          <a:lstStyle/>
+          <a:p>
+            <a:r>
+              <a:rPr lang="tr-TR" dirty="0"/>
+              <a:t>İlmi mesele mesele öğrendim</a:t>
+            </a:r>
+          </a:p>
+        </p:txBody>
+      </p:sp>
     </p:spTree>
     <p:extLst>
       <p:ext uri="{BB962C8B-B14F-4D97-AF65-F5344CB8AC3E}">
@@ -9279,6 +11526,234 @@
           </a:p>
         </p:txBody>
       </p:sp>
+      <p:sp>
+        <p:nvSpPr>
+          <p:cNvPr id="3" name="Metin kutusu 2">
+            <a:extLst>
+              <a:ext uri="{FF2B5EF4-FFF2-40B4-BE49-F238E27FC236}">
+                <a16:creationId xmlns:a16="http://schemas.microsoft.com/office/drawing/2014/main" id="{5383C22D-E341-066F-75A7-19C27535530D}"/>
+              </a:ext>
+            </a:extLst>
+          </p:cNvPr>
+          <p:cNvSpPr txBox="1"/>
+          <p:nvPr/>
+        </p:nvSpPr>
+        <p:spPr>
+          <a:xfrm>
+            <a:off x="240820" y="5664681"/>
+            <a:ext cx="1454244" cy="369332"/>
+          </a:xfrm>
+          <a:prstGeom prst="rect">
+            <a:avLst/>
+          </a:prstGeom>
+          <a:noFill/>
+        </p:spPr>
+        <p:txBody>
+          <a:bodyPr wrap="none" rtlCol="0">
+            <a:spAutoFit/>
+          </a:bodyPr>
+          <a:lstStyle/>
+          <a:p>
+            <a:r>
+              <a:rPr lang="tr-TR" dirty="0">
+                <a:solidFill>
+                  <a:srgbClr val="FF0000"/>
+                </a:solidFill>
+              </a:rPr>
+              <a:t>İki Kişi Misal:</a:t>
+            </a:r>
+          </a:p>
+        </p:txBody>
+      </p:sp>
+      <p:sp>
+        <p:nvSpPr>
+          <p:cNvPr id="6" name="Metin kutusu 5">
+            <a:extLst>
+              <a:ext uri="{FF2B5EF4-FFF2-40B4-BE49-F238E27FC236}">
+                <a16:creationId xmlns:a16="http://schemas.microsoft.com/office/drawing/2014/main" id="{CFCB837A-4C75-A9E2-4DA8-0E0171B634EA}"/>
+              </a:ext>
+            </a:extLst>
+          </p:cNvPr>
+          <p:cNvSpPr txBox="1"/>
+          <p:nvPr/>
+        </p:nvSpPr>
+        <p:spPr>
+          <a:xfrm>
+            <a:off x="240820" y="6039766"/>
+            <a:ext cx="2812931" cy="461665"/>
+          </a:xfrm>
+          <a:prstGeom prst="rect">
+            <a:avLst/>
+          </a:prstGeom>
+          <a:noFill/>
+        </p:spPr>
+        <p:txBody>
+          <a:bodyPr wrap="square" rtlCol="0">
+            <a:spAutoFit/>
+          </a:bodyPr>
+          <a:lstStyle/>
+          <a:p>
+            <a:r>
+              <a:rPr lang="ar-AE" sz="2400" dirty="0"/>
+              <a:t>تَبَاعَدَ زَيْدٌ وَ عَمْرٌو</a:t>
+            </a:r>
+            <a:endParaRPr lang="tr-TR" sz="2400" dirty="0"/>
+          </a:p>
+        </p:txBody>
+      </p:sp>
+      <p:sp>
+        <p:nvSpPr>
+          <p:cNvPr id="10" name="Metin kutusu 9">
+            <a:extLst>
+              <a:ext uri="{FF2B5EF4-FFF2-40B4-BE49-F238E27FC236}">
+                <a16:creationId xmlns:a16="http://schemas.microsoft.com/office/drawing/2014/main" id="{D403B7B3-9272-072C-6E00-AB11B81E4068}"/>
+              </a:ext>
+            </a:extLst>
+          </p:cNvPr>
+          <p:cNvSpPr txBox="1"/>
+          <p:nvPr/>
+        </p:nvSpPr>
+        <p:spPr>
+          <a:xfrm>
+            <a:off x="180768" y="6418737"/>
+            <a:ext cx="3028591" cy="369332"/>
+          </a:xfrm>
+          <a:prstGeom prst="rect">
+            <a:avLst/>
+          </a:prstGeom>
+          <a:noFill/>
+        </p:spPr>
+        <p:txBody>
+          <a:bodyPr wrap="square" rtlCol="0">
+            <a:spAutoFit/>
+          </a:bodyPr>
+          <a:lstStyle/>
+          <a:p>
+            <a:r>
+              <a:rPr lang="tr-TR" dirty="0"/>
+              <a:t>Zeyd ve </a:t>
+            </a:r>
+            <a:r>
+              <a:rPr lang="tr-TR" dirty="0" err="1"/>
+              <a:t>Amr</a:t>
+            </a:r>
+            <a:r>
+              <a:rPr lang="tr-TR" dirty="0"/>
+              <a:t> uzaklaştı.</a:t>
+            </a:r>
+          </a:p>
+        </p:txBody>
+      </p:sp>
+      <p:sp>
+        <p:nvSpPr>
+          <p:cNvPr id="11" name="Metin kutusu 10">
+            <a:extLst>
+              <a:ext uri="{FF2B5EF4-FFF2-40B4-BE49-F238E27FC236}">
+                <a16:creationId xmlns:a16="http://schemas.microsoft.com/office/drawing/2014/main" id="{0ACA21DE-3CED-250D-6F86-71332F76B3D6}"/>
+              </a:ext>
+            </a:extLst>
+          </p:cNvPr>
+          <p:cNvSpPr txBox="1"/>
+          <p:nvPr/>
+        </p:nvSpPr>
+        <p:spPr>
+          <a:xfrm>
+            <a:off x="8278605" y="5591192"/>
+            <a:ext cx="2663293" cy="369332"/>
+          </a:xfrm>
+          <a:prstGeom prst="rect">
+            <a:avLst/>
+          </a:prstGeom>
+          <a:noFill/>
+        </p:spPr>
+        <p:txBody>
+          <a:bodyPr wrap="none" rtlCol="0">
+            <a:spAutoFit/>
+          </a:bodyPr>
+          <a:lstStyle/>
+          <a:p>
+            <a:r>
+              <a:rPr lang="tr-TR" dirty="0">
+                <a:solidFill>
+                  <a:srgbClr val="FF0000"/>
+                </a:solidFill>
+              </a:rPr>
+              <a:t>İkiden Fazla Kişiler Misal:</a:t>
+            </a:r>
+          </a:p>
+        </p:txBody>
+      </p:sp>
+      <p:sp>
+        <p:nvSpPr>
+          <p:cNvPr id="12" name="Metin kutusu 11">
+            <a:extLst>
+              <a:ext uri="{FF2B5EF4-FFF2-40B4-BE49-F238E27FC236}">
+                <a16:creationId xmlns:a16="http://schemas.microsoft.com/office/drawing/2014/main" id="{3D88EA6D-68F8-8E02-9EAF-4F0DBC6F7AB2}"/>
+              </a:ext>
+            </a:extLst>
+          </p:cNvPr>
+          <p:cNvSpPr txBox="1"/>
+          <p:nvPr/>
+        </p:nvSpPr>
+        <p:spPr>
+          <a:xfrm>
+            <a:off x="8278605" y="6034013"/>
+            <a:ext cx="1646791" cy="461665"/>
+          </a:xfrm>
+          <a:prstGeom prst="rect">
+            <a:avLst/>
+          </a:prstGeom>
+          <a:noFill/>
+        </p:spPr>
+        <p:txBody>
+          <a:bodyPr wrap="square" rtlCol="0">
+            <a:spAutoFit/>
+          </a:bodyPr>
+          <a:lstStyle/>
+          <a:p>
+            <a:r>
+              <a:rPr lang="ar-AE" sz="2400" dirty="0"/>
+              <a:t>تَصَالِحَ الْقَوْمُ</a:t>
+            </a:r>
+            <a:endParaRPr lang="tr-TR" sz="2400" dirty="0"/>
+          </a:p>
+        </p:txBody>
+      </p:sp>
+      <p:sp>
+        <p:nvSpPr>
+          <p:cNvPr id="13" name="Metin kutusu 12">
+            <a:extLst>
+              <a:ext uri="{FF2B5EF4-FFF2-40B4-BE49-F238E27FC236}">
+                <a16:creationId xmlns:a16="http://schemas.microsoft.com/office/drawing/2014/main" id="{12E07C86-93EE-7684-31EE-C88A51C6D5C6}"/>
+              </a:ext>
+            </a:extLst>
+          </p:cNvPr>
+          <p:cNvSpPr txBox="1"/>
+          <p:nvPr/>
+        </p:nvSpPr>
+        <p:spPr>
+          <a:xfrm>
+            <a:off x="8241821" y="6418737"/>
+            <a:ext cx="2695998" cy="369332"/>
+          </a:xfrm>
+          <a:prstGeom prst="rect">
+            <a:avLst/>
+          </a:prstGeom>
+          <a:noFill/>
+        </p:spPr>
+        <p:txBody>
+          <a:bodyPr wrap="square" rtlCol="0">
+            <a:spAutoFit/>
+          </a:bodyPr>
+          <a:lstStyle/>
+          <a:p>
+            <a:r>
+              <a:rPr lang="tr-TR" dirty="0"/>
+              <a:t>Kavim sulh yaptı.</a:t>
+            </a:r>
+          </a:p>
+        </p:txBody>
+      </p:sp>
     </p:spTree>
     <p:extLst>
       <p:ext uri="{BB962C8B-B14F-4D97-AF65-F5344CB8AC3E}">
@@ -9622,7 +12097,39 @@
                   <a:schemeClr val="tx1"/>
                 </a:solidFill>
               </a:rPr>
-              <a:t>, bazen lazım olur.</a:t>
+              <a:t>, bazen lazım olur. </a:t>
+            </a:r>
+            <a:r>
+              <a:rPr lang="tr-TR" dirty="0" err="1">
+                <a:solidFill>
+                  <a:schemeClr val="tx1"/>
+                </a:solidFill>
+              </a:rPr>
+              <a:t>Bazen’de</a:t>
+            </a:r>
+            <a:r>
+              <a:rPr lang="tr-TR" dirty="0">
+                <a:solidFill>
+                  <a:schemeClr val="tx1"/>
+                </a:solidFill>
+              </a:rPr>
+              <a:t> talep </a:t>
+            </a:r>
+            <a:r>
+              <a:rPr lang="tr-TR" dirty="0" err="1">
+                <a:solidFill>
+                  <a:schemeClr val="tx1"/>
+                </a:solidFill>
+              </a:rPr>
+              <a:t>içindirde</a:t>
+            </a:r>
+            <a:r>
+              <a:rPr lang="tr-TR" dirty="0">
+                <a:solidFill>
+                  <a:schemeClr val="tx1"/>
+                </a:solidFill>
+              </a:rPr>
+              <a:t> denmiştir.</a:t>
             </a:r>
             <a:endParaRPr lang="tr-TR" dirty="0">
               <a:solidFill>
@@ -9882,6 +12389,352 @@
                 </a:solidFill>
               </a:rPr>
               <a:t>3. NEVİ</a:t>
+            </a:r>
+          </a:p>
+        </p:txBody>
+      </p:sp>
+      <p:sp>
+        <p:nvSpPr>
+          <p:cNvPr id="3" name="Metin kutusu 2">
+            <a:extLst>
+              <a:ext uri="{FF2B5EF4-FFF2-40B4-BE49-F238E27FC236}">
+                <a16:creationId xmlns:a16="http://schemas.microsoft.com/office/drawing/2014/main" id="{D99AFECC-1A06-1A51-95BA-54F057057C9E}"/>
+              </a:ext>
+            </a:extLst>
+          </p:cNvPr>
+          <p:cNvSpPr txBox="1"/>
+          <p:nvPr/>
+        </p:nvSpPr>
+        <p:spPr>
+          <a:xfrm>
+            <a:off x="240820" y="5664681"/>
+            <a:ext cx="1773691" cy="369332"/>
+          </a:xfrm>
+          <a:prstGeom prst="rect">
+            <a:avLst/>
+          </a:prstGeom>
+          <a:noFill/>
+        </p:spPr>
+        <p:txBody>
+          <a:bodyPr wrap="none" rtlCol="0">
+            <a:spAutoFit/>
+          </a:bodyPr>
+          <a:lstStyle/>
+          <a:p>
+            <a:r>
+              <a:rPr lang="tr-TR" dirty="0" err="1">
+                <a:solidFill>
+                  <a:srgbClr val="FF0000"/>
+                </a:solidFill>
+              </a:rPr>
+              <a:t>Müteaddi</a:t>
+            </a:r>
+            <a:r>
+              <a:rPr lang="tr-TR" dirty="0">
+                <a:solidFill>
+                  <a:srgbClr val="FF0000"/>
+                </a:solidFill>
+              </a:rPr>
+              <a:t> Misal:</a:t>
+            </a:r>
+          </a:p>
+        </p:txBody>
+      </p:sp>
+      <p:sp>
+        <p:nvSpPr>
+          <p:cNvPr id="6" name="Metin kutusu 5">
+            <a:extLst>
+              <a:ext uri="{FF2B5EF4-FFF2-40B4-BE49-F238E27FC236}">
+                <a16:creationId xmlns:a16="http://schemas.microsoft.com/office/drawing/2014/main" id="{7B4810FB-E87B-D135-0EAF-C7FE5EB6A3D0}"/>
+              </a:ext>
+            </a:extLst>
+          </p:cNvPr>
+          <p:cNvSpPr txBox="1"/>
+          <p:nvPr/>
+        </p:nvSpPr>
+        <p:spPr>
+          <a:xfrm>
+            <a:off x="240820" y="6039766"/>
+            <a:ext cx="2812931" cy="461665"/>
+          </a:xfrm>
+          <a:prstGeom prst="rect">
+            <a:avLst/>
+          </a:prstGeom>
+          <a:noFill/>
+        </p:spPr>
+        <p:txBody>
+          <a:bodyPr wrap="square" rtlCol="0">
+            <a:spAutoFit/>
+          </a:bodyPr>
+          <a:lstStyle/>
+          <a:p>
+            <a:r>
+              <a:rPr lang="ar-AE" sz="2400" dirty="0"/>
+              <a:t>اِسْتَخْرَجَ زَيْدٌ الْمَالَ</a:t>
+            </a:r>
+            <a:endParaRPr lang="tr-TR" sz="2400" dirty="0"/>
+          </a:p>
+        </p:txBody>
+      </p:sp>
+      <p:sp>
+        <p:nvSpPr>
+          <p:cNvPr id="10" name="Metin kutusu 9">
+            <a:extLst>
+              <a:ext uri="{FF2B5EF4-FFF2-40B4-BE49-F238E27FC236}">
+                <a16:creationId xmlns:a16="http://schemas.microsoft.com/office/drawing/2014/main" id="{CA4B7A6D-57A0-14BC-6903-C7639B0C5878}"/>
+              </a:ext>
+            </a:extLst>
+          </p:cNvPr>
+          <p:cNvSpPr txBox="1"/>
+          <p:nvPr/>
+        </p:nvSpPr>
+        <p:spPr>
+          <a:xfrm>
+            <a:off x="240820" y="6481666"/>
+            <a:ext cx="3028591" cy="369332"/>
+          </a:xfrm>
+          <a:prstGeom prst="rect">
+            <a:avLst/>
+          </a:prstGeom>
+          <a:noFill/>
+        </p:spPr>
+        <p:txBody>
+          <a:bodyPr wrap="square" rtlCol="0">
+            <a:spAutoFit/>
+          </a:bodyPr>
+          <a:lstStyle/>
+          <a:p>
+            <a:r>
+              <a:rPr lang="tr-TR" dirty="0"/>
+              <a:t>Zeyd malı çıkardı.</a:t>
+            </a:r>
+          </a:p>
+        </p:txBody>
+      </p:sp>
+      <p:sp>
+        <p:nvSpPr>
+          <p:cNvPr id="11" name="Metin kutusu 10">
+            <a:extLst>
+              <a:ext uri="{FF2B5EF4-FFF2-40B4-BE49-F238E27FC236}">
+                <a16:creationId xmlns:a16="http://schemas.microsoft.com/office/drawing/2014/main" id="{374150D9-40BD-71F8-9DF8-6D20F5BC3C0C}"/>
+              </a:ext>
+            </a:extLst>
+          </p:cNvPr>
+          <p:cNvSpPr txBox="1"/>
+          <p:nvPr/>
+        </p:nvSpPr>
+        <p:spPr>
+          <a:xfrm>
+            <a:off x="8449264" y="5574566"/>
+            <a:ext cx="1423403" cy="369332"/>
+          </a:xfrm>
+          <a:prstGeom prst="rect">
+            <a:avLst/>
+          </a:prstGeom>
+          <a:noFill/>
+        </p:spPr>
+        <p:txBody>
+          <a:bodyPr wrap="none" rtlCol="0">
+            <a:spAutoFit/>
+          </a:bodyPr>
+          <a:lstStyle/>
+          <a:p>
+            <a:r>
+              <a:rPr lang="tr-TR" dirty="0">
+                <a:solidFill>
+                  <a:srgbClr val="FF0000"/>
+                </a:solidFill>
+              </a:rPr>
+              <a:t>Lazım Misal:</a:t>
+            </a:r>
+          </a:p>
+        </p:txBody>
+      </p:sp>
+      <p:sp>
+        <p:nvSpPr>
+          <p:cNvPr id="12" name="Metin kutusu 11">
+            <a:extLst>
+              <a:ext uri="{FF2B5EF4-FFF2-40B4-BE49-F238E27FC236}">
+                <a16:creationId xmlns:a16="http://schemas.microsoft.com/office/drawing/2014/main" id="{C0407972-7926-ECE5-E0FA-5775C6D29843}"/>
+              </a:ext>
+            </a:extLst>
+          </p:cNvPr>
+          <p:cNvSpPr txBox="1"/>
+          <p:nvPr/>
+        </p:nvSpPr>
+        <p:spPr>
+          <a:xfrm>
+            <a:off x="8449264" y="5949651"/>
+            <a:ext cx="2515223" cy="461665"/>
+          </a:xfrm>
+          <a:prstGeom prst="rect">
+            <a:avLst/>
+          </a:prstGeom>
+          <a:noFill/>
+        </p:spPr>
+        <p:txBody>
+          <a:bodyPr wrap="square" rtlCol="0">
+            <a:spAutoFit/>
+          </a:bodyPr>
+          <a:lstStyle/>
+          <a:p>
+            <a:r>
+              <a:rPr lang="ar-AE" sz="2400" dirty="0"/>
+              <a:t>اِسْتَخْرَجَ الطِّينُ</a:t>
+            </a:r>
+            <a:endParaRPr lang="tr-TR" sz="2400" dirty="0"/>
+          </a:p>
+        </p:txBody>
+      </p:sp>
+      <p:sp>
+        <p:nvSpPr>
+          <p:cNvPr id="13" name="Metin kutusu 12">
+            <a:extLst>
+              <a:ext uri="{FF2B5EF4-FFF2-40B4-BE49-F238E27FC236}">
+                <a16:creationId xmlns:a16="http://schemas.microsoft.com/office/drawing/2014/main" id="{BA3636F7-53C7-11C3-B133-EB0D305BA7D4}"/>
+              </a:ext>
+            </a:extLst>
+          </p:cNvPr>
+          <p:cNvSpPr txBox="1"/>
+          <p:nvPr/>
+        </p:nvSpPr>
+        <p:spPr>
+          <a:xfrm>
+            <a:off x="8412480" y="6481666"/>
+            <a:ext cx="2695998" cy="369332"/>
+          </a:xfrm>
+          <a:prstGeom prst="rect">
+            <a:avLst/>
+          </a:prstGeom>
+          <a:noFill/>
+        </p:spPr>
+        <p:txBody>
+          <a:bodyPr wrap="square" rtlCol="0">
+            <a:spAutoFit/>
+          </a:bodyPr>
+          <a:lstStyle/>
+          <a:p>
+            <a:r>
+              <a:rPr lang="tr-TR" dirty="0"/>
+              <a:t>Çamur </a:t>
+            </a:r>
+            <a:r>
+              <a:rPr lang="tr-TR" dirty="0" err="1"/>
+              <a:t>taşlatı</a:t>
+            </a:r>
+            <a:r>
+              <a:rPr lang="tr-TR" dirty="0"/>
+              <a:t>.</a:t>
+            </a:r>
+          </a:p>
+        </p:txBody>
+      </p:sp>
+      <p:sp>
+        <p:nvSpPr>
+          <p:cNvPr id="14" name="Metin kutusu 13">
+            <a:extLst>
+              <a:ext uri="{FF2B5EF4-FFF2-40B4-BE49-F238E27FC236}">
+                <a16:creationId xmlns:a16="http://schemas.microsoft.com/office/drawing/2014/main" id="{9A4ECD69-DCD0-7354-9195-730DD3F4FFF2}"/>
+              </a:ext>
+            </a:extLst>
+          </p:cNvPr>
+          <p:cNvSpPr txBox="1"/>
+          <p:nvPr/>
+        </p:nvSpPr>
+        <p:spPr>
+          <a:xfrm>
+            <a:off x="3616403" y="5759232"/>
+            <a:ext cx="1356718" cy="369332"/>
+          </a:xfrm>
+          <a:prstGeom prst="rect">
+            <a:avLst/>
+          </a:prstGeom>
+          <a:noFill/>
+        </p:spPr>
+        <p:txBody>
+          <a:bodyPr wrap="none" rtlCol="0">
+            <a:spAutoFit/>
+          </a:bodyPr>
+          <a:lstStyle/>
+          <a:p>
+            <a:r>
+              <a:rPr lang="tr-TR" dirty="0">
+                <a:solidFill>
+                  <a:srgbClr val="FF0000"/>
+                </a:solidFill>
+              </a:rPr>
+              <a:t>Talep Misal:</a:t>
+            </a:r>
+          </a:p>
+        </p:txBody>
+      </p:sp>
+      <p:sp>
+        <p:nvSpPr>
+          <p:cNvPr id="15" name="Metin kutusu 14">
+            <a:extLst>
+              <a:ext uri="{FF2B5EF4-FFF2-40B4-BE49-F238E27FC236}">
+                <a16:creationId xmlns:a16="http://schemas.microsoft.com/office/drawing/2014/main" id="{A01C367B-7F02-6933-0CE8-16C48EF75434}"/>
+              </a:ext>
+            </a:extLst>
+          </p:cNvPr>
+          <p:cNvSpPr txBox="1"/>
+          <p:nvPr/>
+        </p:nvSpPr>
+        <p:spPr>
+          <a:xfrm>
+            <a:off x="3822966" y="6120549"/>
+            <a:ext cx="2515223" cy="461665"/>
+          </a:xfrm>
+          <a:prstGeom prst="rect">
+            <a:avLst/>
+          </a:prstGeom>
+          <a:noFill/>
+        </p:spPr>
+        <p:txBody>
+          <a:bodyPr wrap="square" rtlCol="0">
+            <a:spAutoFit/>
+          </a:bodyPr>
+          <a:lstStyle/>
+          <a:p>
+            <a:r>
+              <a:rPr lang="ar-AE" sz="2400" dirty="0"/>
+              <a:t>اَسْتَغْفِرُ الله</a:t>
+            </a:r>
+            <a:endParaRPr lang="tr-TR" sz="2400" dirty="0"/>
+          </a:p>
+        </p:txBody>
+      </p:sp>
+      <p:sp>
+        <p:nvSpPr>
+          <p:cNvPr id="16" name="Metin kutusu 15">
+            <a:extLst>
+              <a:ext uri="{FF2B5EF4-FFF2-40B4-BE49-F238E27FC236}">
+                <a16:creationId xmlns:a16="http://schemas.microsoft.com/office/drawing/2014/main" id="{B3D58810-BA54-8762-06DA-23F6A7EECE26}"/>
+              </a:ext>
+            </a:extLst>
+          </p:cNvPr>
+          <p:cNvSpPr txBox="1"/>
+          <p:nvPr/>
+        </p:nvSpPr>
+        <p:spPr>
+          <a:xfrm>
+            <a:off x="3691806" y="6481666"/>
+            <a:ext cx="2891873" cy="369332"/>
+          </a:xfrm>
+          <a:prstGeom prst="rect">
+            <a:avLst/>
+          </a:prstGeom>
+          <a:noFill/>
+        </p:spPr>
+        <p:txBody>
+          <a:bodyPr wrap="square" rtlCol="0">
+            <a:spAutoFit/>
+          </a:bodyPr>
+          <a:lstStyle/>
+          <a:p>
+            <a:r>
+              <a:rPr lang="tr-TR" dirty="0"/>
+              <a:t>Allah’tan mağfiret dilerim.</a:t>
             </a:r>
           </a:p>
         </p:txBody>
@@ -10485,6 +13338,195 @@
           </a:p>
         </p:txBody>
       </p:sp>
+      <p:sp>
+        <p:nvSpPr>
+          <p:cNvPr id="3" name="Metin kutusu 2">
+            <a:extLst>
+              <a:ext uri="{FF2B5EF4-FFF2-40B4-BE49-F238E27FC236}">
+                <a16:creationId xmlns:a16="http://schemas.microsoft.com/office/drawing/2014/main" id="{8A2F94F4-3899-EBD3-726F-414C61C7870E}"/>
+              </a:ext>
+            </a:extLst>
+          </p:cNvPr>
+          <p:cNvSpPr txBox="1"/>
+          <p:nvPr/>
+        </p:nvSpPr>
+        <p:spPr>
+          <a:xfrm>
+            <a:off x="240819" y="4689335"/>
+            <a:ext cx="782587" cy="369332"/>
+          </a:xfrm>
+          <a:prstGeom prst="rect">
+            <a:avLst/>
+          </a:prstGeom>
+          <a:noFill/>
+        </p:spPr>
+        <p:txBody>
+          <a:bodyPr wrap="none" rtlCol="0">
+            <a:spAutoFit/>
+          </a:bodyPr>
+          <a:lstStyle/>
+          <a:p>
+            <a:r>
+              <a:rPr lang="tr-TR" dirty="0">
+                <a:solidFill>
+                  <a:srgbClr val="FF0000"/>
+                </a:solidFill>
+              </a:rPr>
+              <a:t>Misal:</a:t>
+            </a:r>
+          </a:p>
+        </p:txBody>
+      </p:sp>
+      <p:sp>
+        <p:nvSpPr>
+          <p:cNvPr id="6" name="Metin kutusu 5">
+            <a:extLst>
+              <a:ext uri="{FF2B5EF4-FFF2-40B4-BE49-F238E27FC236}">
+                <a16:creationId xmlns:a16="http://schemas.microsoft.com/office/drawing/2014/main" id="{F532CA6B-CC21-AB75-C253-6E684B64597C}"/>
+              </a:ext>
+            </a:extLst>
+          </p:cNvPr>
+          <p:cNvSpPr txBox="1"/>
+          <p:nvPr/>
+        </p:nvSpPr>
+        <p:spPr>
+          <a:xfrm>
+            <a:off x="240819" y="5113387"/>
+            <a:ext cx="2812931" cy="461665"/>
+          </a:xfrm>
+          <a:prstGeom prst="rect">
+            <a:avLst/>
+          </a:prstGeom>
+          <a:noFill/>
+        </p:spPr>
+        <p:txBody>
+          <a:bodyPr wrap="square" rtlCol="0">
+            <a:spAutoFit/>
+          </a:bodyPr>
+          <a:lstStyle/>
+          <a:p>
+            <a:r>
+              <a:rPr lang="ar-AE" sz="2400" dirty="0"/>
+              <a:t>عَشُبَ الاَرْضُ</a:t>
+            </a:r>
+            <a:endParaRPr lang="tr-TR" sz="2400" dirty="0"/>
+          </a:p>
+        </p:txBody>
+      </p:sp>
+      <p:sp>
+        <p:nvSpPr>
+          <p:cNvPr id="10" name="Metin kutusu 9">
+            <a:extLst>
+              <a:ext uri="{FF2B5EF4-FFF2-40B4-BE49-F238E27FC236}">
+                <a16:creationId xmlns:a16="http://schemas.microsoft.com/office/drawing/2014/main" id="{C58E938B-D441-DFF8-0128-7EB36F678159}"/>
+              </a:ext>
+            </a:extLst>
+          </p:cNvPr>
+          <p:cNvSpPr txBox="1"/>
+          <p:nvPr/>
+        </p:nvSpPr>
+        <p:spPr>
+          <a:xfrm>
+            <a:off x="132988" y="5614961"/>
+            <a:ext cx="3028591" cy="369332"/>
+          </a:xfrm>
+          <a:prstGeom prst="rect">
+            <a:avLst/>
+          </a:prstGeom>
+          <a:noFill/>
+        </p:spPr>
+        <p:txBody>
+          <a:bodyPr wrap="square" rtlCol="0">
+            <a:spAutoFit/>
+          </a:bodyPr>
+          <a:lstStyle/>
+          <a:p>
+            <a:r>
+              <a:rPr lang="tr-TR" dirty="0"/>
+              <a:t>Yeryüzü yeşerdi.</a:t>
+            </a:r>
+          </a:p>
+        </p:txBody>
+      </p:sp>
+      <p:sp>
+        <p:nvSpPr>
+          <p:cNvPr id="14" name="Metin kutusu 13">
+            <a:extLst>
+              <a:ext uri="{FF2B5EF4-FFF2-40B4-BE49-F238E27FC236}">
+                <a16:creationId xmlns:a16="http://schemas.microsoft.com/office/drawing/2014/main" id="{413E5B26-81CC-85D7-B2D2-3829E333EE96}"/>
+              </a:ext>
+            </a:extLst>
+          </p:cNvPr>
+          <p:cNvSpPr txBox="1"/>
+          <p:nvPr/>
+        </p:nvSpPr>
+        <p:spPr>
+          <a:xfrm>
+            <a:off x="166584" y="5999104"/>
+            <a:ext cx="2812931" cy="461665"/>
+          </a:xfrm>
+          <a:prstGeom prst="rect">
+            <a:avLst/>
+          </a:prstGeom>
+          <a:noFill/>
+        </p:spPr>
+        <p:txBody>
+          <a:bodyPr wrap="square" rtlCol="0">
+            <a:spAutoFit/>
+          </a:bodyPr>
+          <a:lstStyle/>
+          <a:p>
+            <a:r>
+              <a:rPr lang="ar-AE" sz="2400" dirty="0"/>
+              <a:t>اِعْشَوْشَبَ الاَرْضُ</a:t>
+            </a:r>
+            <a:endParaRPr lang="tr-TR" sz="2400" dirty="0"/>
+          </a:p>
+        </p:txBody>
+      </p:sp>
+      <p:sp>
+        <p:nvSpPr>
+          <p:cNvPr id="15" name="Metin kutusu 14">
+            <a:extLst>
+              <a:ext uri="{FF2B5EF4-FFF2-40B4-BE49-F238E27FC236}">
+                <a16:creationId xmlns:a16="http://schemas.microsoft.com/office/drawing/2014/main" id="{9090AD23-5044-668F-F012-B1021FDCADF0}"/>
+              </a:ext>
+            </a:extLst>
+          </p:cNvPr>
+          <p:cNvSpPr txBox="1"/>
+          <p:nvPr/>
+        </p:nvSpPr>
+        <p:spPr>
+          <a:xfrm>
+            <a:off x="166584" y="6460769"/>
+            <a:ext cx="3028591" cy="369332"/>
+          </a:xfrm>
+          <a:prstGeom prst="rect">
+            <a:avLst/>
+          </a:prstGeom>
+          <a:noFill/>
+        </p:spPr>
+        <p:txBody>
+          <a:bodyPr wrap="square" rtlCol="0">
+            <a:spAutoFit/>
+          </a:bodyPr>
+          <a:lstStyle/>
+          <a:p>
+            <a:r>
+              <a:rPr lang="tr-TR" dirty="0"/>
+              <a:t>Yeryüzü</a:t>
+            </a:r>
+            <a:r>
+              <a:rPr lang="ar-AE" dirty="0"/>
+              <a:t> </a:t>
+            </a:r>
+            <a:r>
+              <a:rPr lang="tr-TR" dirty="0"/>
+              <a:t>çok yeşerdi.</a:t>
+            </a:r>
+          </a:p>
+        </p:txBody>
+      </p:sp>
     </p:spTree>
     <p:extLst>
       <p:ext uri="{BB962C8B-B14F-4D97-AF65-F5344CB8AC3E}">
@@ -11092,6 +14134,187 @@
           </a:p>
         </p:txBody>
       </p:sp>
+      <p:sp>
+        <p:nvSpPr>
+          <p:cNvPr id="3" name="Metin kutusu 2">
+            <a:extLst>
+              <a:ext uri="{FF2B5EF4-FFF2-40B4-BE49-F238E27FC236}">
+                <a16:creationId xmlns:a16="http://schemas.microsoft.com/office/drawing/2014/main" id="{25F1822C-A65A-2AD6-A822-88BC22C7F0B8}"/>
+              </a:ext>
+            </a:extLst>
+          </p:cNvPr>
+          <p:cNvSpPr txBox="1"/>
+          <p:nvPr/>
+        </p:nvSpPr>
+        <p:spPr>
+          <a:xfrm>
+            <a:off x="336527" y="4795866"/>
+            <a:ext cx="782587" cy="369332"/>
+          </a:xfrm>
+          <a:prstGeom prst="rect">
+            <a:avLst/>
+          </a:prstGeom>
+          <a:noFill/>
+        </p:spPr>
+        <p:txBody>
+          <a:bodyPr wrap="none" rtlCol="0">
+            <a:spAutoFit/>
+          </a:bodyPr>
+          <a:lstStyle/>
+          <a:p>
+            <a:r>
+              <a:rPr lang="tr-TR" dirty="0">
+                <a:solidFill>
+                  <a:srgbClr val="FF0000"/>
+                </a:solidFill>
+              </a:rPr>
+              <a:t>Misal:</a:t>
+            </a:r>
+          </a:p>
+        </p:txBody>
+      </p:sp>
+      <p:sp>
+        <p:nvSpPr>
+          <p:cNvPr id="6" name="Metin kutusu 5">
+            <a:extLst>
+              <a:ext uri="{FF2B5EF4-FFF2-40B4-BE49-F238E27FC236}">
+                <a16:creationId xmlns:a16="http://schemas.microsoft.com/office/drawing/2014/main" id="{95E29101-413C-1D88-6C39-09F5891FE832}"/>
+              </a:ext>
+            </a:extLst>
+          </p:cNvPr>
+          <p:cNvSpPr txBox="1"/>
+          <p:nvPr/>
+        </p:nvSpPr>
+        <p:spPr>
+          <a:xfrm>
+            <a:off x="336527" y="5164239"/>
+            <a:ext cx="2812931" cy="461665"/>
+          </a:xfrm>
+          <a:prstGeom prst="rect">
+            <a:avLst/>
+          </a:prstGeom>
+          <a:noFill/>
+        </p:spPr>
+        <p:txBody>
+          <a:bodyPr wrap="square" rtlCol="0">
+            <a:spAutoFit/>
+          </a:bodyPr>
+          <a:lstStyle/>
+          <a:p>
+            <a:r>
+              <a:rPr lang="ar-AE" sz="2400" dirty="0"/>
+              <a:t>جَلَذَ الاِبِلُ</a:t>
+            </a:r>
+            <a:endParaRPr lang="tr-TR" sz="2400" dirty="0"/>
+          </a:p>
+        </p:txBody>
+      </p:sp>
+      <p:sp>
+        <p:nvSpPr>
+          <p:cNvPr id="10" name="Metin kutusu 9">
+            <a:extLst>
+              <a:ext uri="{FF2B5EF4-FFF2-40B4-BE49-F238E27FC236}">
+                <a16:creationId xmlns:a16="http://schemas.microsoft.com/office/drawing/2014/main" id="{586E817A-E968-F21C-A84C-74F5E590DD12}"/>
+              </a:ext>
+            </a:extLst>
+          </p:cNvPr>
+          <p:cNvSpPr txBox="1"/>
+          <p:nvPr/>
+        </p:nvSpPr>
+        <p:spPr>
+          <a:xfrm>
+            <a:off x="336527" y="5572149"/>
+            <a:ext cx="3246258" cy="369332"/>
+          </a:xfrm>
+          <a:prstGeom prst="rect">
+            <a:avLst/>
+          </a:prstGeom>
+          <a:noFill/>
+        </p:spPr>
+        <p:txBody>
+          <a:bodyPr wrap="square" rtlCol="0">
+            <a:spAutoFit/>
+          </a:bodyPr>
+          <a:lstStyle/>
+          <a:p>
+            <a:r>
+              <a:rPr lang="tr-TR" dirty="0"/>
+              <a:t>Develer az bir sürat ile yürüdü.</a:t>
+            </a:r>
+          </a:p>
+        </p:txBody>
+      </p:sp>
+      <p:sp>
+        <p:nvSpPr>
+          <p:cNvPr id="15" name="Metin kutusu 14">
+            <a:extLst>
+              <a:ext uri="{FF2B5EF4-FFF2-40B4-BE49-F238E27FC236}">
+                <a16:creationId xmlns:a16="http://schemas.microsoft.com/office/drawing/2014/main" id="{56444D58-53F1-C018-ACE0-D5884D66AC5A}"/>
+              </a:ext>
+            </a:extLst>
+          </p:cNvPr>
+          <p:cNvSpPr txBox="1"/>
+          <p:nvPr/>
+        </p:nvSpPr>
+        <p:spPr>
+          <a:xfrm>
+            <a:off x="336527" y="6384458"/>
+            <a:ext cx="3028591" cy="369332"/>
+          </a:xfrm>
+          <a:prstGeom prst="rect">
+            <a:avLst/>
+          </a:prstGeom>
+          <a:noFill/>
+        </p:spPr>
+        <p:txBody>
+          <a:bodyPr wrap="square" rtlCol="0">
+            <a:spAutoFit/>
+          </a:bodyPr>
+          <a:lstStyle/>
+          <a:p>
+            <a:r>
+              <a:rPr lang="tr-TR" dirty="0"/>
+              <a:t>Develer süratli yürüdü.</a:t>
+            </a:r>
+          </a:p>
+        </p:txBody>
+      </p:sp>
+      <p:sp>
+        <p:nvSpPr>
+          <p:cNvPr id="18" name="Metin kutusu 17">
+            <a:extLst>
+              <a:ext uri="{FF2B5EF4-FFF2-40B4-BE49-F238E27FC236}">
+                <a16:creationId xmlns:a16="http://schemas.microsoft.com/office/drawing/2014/main" id="{A32D877E-9718-3020-2609-A6A8BEA46053}"/>
+              </a:ext>
+            </a:extLst>
+          </p:cNvPr>
+          <p:cNvSpPr txBox="1"/>
+          <p:nvPr/>
+        </p:nvSpPr>
+        <p:spPr>
+          <a:xfrm>
+            <a:off x="336526" y="5933452"/>
+            <a:ext cx="2812931" cy="461665"/>
+          </a:xfrm>
+          <a:prstGeom prst="rect">
+            <a:avLst/>
+          </a:prstGeom>
+          <a:noFill/>
+        </p:spPr>
+        <p:txBody>
+          <a:bodyPr wrap="square" rtlCol="0">
+            <a:spAutoFit/>
+          </a:bodyPr>
+          <a:lstStyle/>
+          <a:p>
+            <a:r>
+              <a:rPr lang="ar-AE" sz="2400" dirty="0"/>
+              <a:t>اِجْلَوَّذَ الاِبِلُ</a:t>
+            </a:r>
+            <a:endParaRPr lang="tr-TR" sz="2400" dirty="0"/>
+          </a:p>
+        </p:txBody>
+      </p:sp>
     </p:spTree>
     <p:extLst>
       <p:ext uri="{BB962C8B-B14F-4D97-AF65-F5344CB8AC3E}">
@@ -12542,6 +15765,274 @@
           </a:p>
         </p:txBody>
       </p:sp>
+      <p:sp>
+        <p:nvSpPr>
+          <p:cNvPr id="14" name="Metin kutusu 13">
+            <a:extLst>
+              <a:ext uri="{FF2B5EF4-FFF2-40B4-BE49-F238E27FC236}">
+                <a16:creationId xmlns:a16="http://schemas.microsoft.com/office/drawing/2014/main" id="{03D86960-53FD-AAC9-63D0-44633BEE3D70}"/>
+              </a:ext>
+            </a:extLst>
+          </p:cNvPr>
+          <p:cNvSpPr txBox="1"/>
+          <p:nvPr/>
+        </p:nvSpPr>
+        <p:spPr>
+          <a:xfrm>
+            <a:off x="336527" y="4795866"/>
+            <a:ext cx="782587" cy="369332"/>
+          </a:xfrm>
+          <a:prstGeom prst="rect">
+            <a:avLst/>
+          </a:prstGeom>
+          <a:noFill/>
+        </p:spPr>
+        <p:txBody>
+          <a:bodyPr wrap="none" rtlCol="0">
+            <a:spAutoFit/>
+          </a:bodyPr>
+          <a:lstStyle/>
+          <a:p>
+            <a:r>
+              <a:rPr lang="tr-TR" dirty="0">
+                <a:solidFill>
+                  <a:srgbClr val="FF0000"/>
+                </a:solidFill>
+              </a:rPr>
+              <a:t>Misal:</a:t>
+            </a:r>
+          </a:p>
+        </p:txBody>
+      </p:sp>
+      <p:sp>
+        <p:nvSpPr>
+          <p:cNvPr id="15" name="Metin kutusu 14">
+            <a:extLst>
+              <a:ext uri="{FF2B5EF4-FFF2-40B4-BE49-F238E27FC236}">
+                <a16:creationId xmlns:a16="http://schemas.microsoft.com/office/drawing/2014/main" id="{0BD51D84-9E2D-2D69-C0F9-B236B320E0DA}"/>
+              </a:ext>
+            </a:extLst>
+          </p:cNvPr>
+          <p:cNvSpPr txBox="1"/>
+          <p:nvPr/>
+        </p:nvSpPr>
+        <p:spPr>
+          <a:xfrm>
+            <a:off x="336527" y="5164239"/>
+            <a:ext cx="2812931" cy="461665"/>
+          </a:xfrm>
+          <a:prstGeom prst="rect">
+            <a:avLst/>
+          </a:prstGeom>
+          <a:noFill/>
+        </p:spPr>
+        <p:txBody>
+          <a:bodyPr wrap="square" rtlCol="0">
+            <a:spAutoFit/>
+          </a:bodyPr>
+          <a:lstStyle/>
+          <a:p>
+            <a:r>
+              <a:rPr lang="ar-AE" sz="2400" dirty="0"/>
+              <a:t>حَمُرَ زَيْدٌ</a:t>
+            </a:r>
+            <a:endParaRPr lang="tr-TR" sz="2400" dirty="0"/>
+          </a:p>
+        </p:txBody>
+      </p:sp>
+      <p:sp>
+        <p:nvSpPr>
+          <p:cNvPr id="16" name="Metin kutusu 15">
+            <a:extLst>
+              <a:ext uri="{FF2B5EF4-FFF2-40B4-BE49-F238E27FC236}">
+                <a16:creationId xmlns:a16="http://schemas.microsoft.com/office/drawing/2014/main" id="{4E75F418-A8F3-7AE4-A436-876C196C3570}"/>
+              </a:ext>
+            </a:extLst>
+          </p:cNvPr>
+          <p:cNvSpPr txBox="1"/>
+          <p:nvPr/>
+        </p:nvSpPr>
+        <p:spPr>
+          <a:xfrm>
+            <a:off x="336527" y="5572149"/>
+            <a:ext cx="3028591" cy="369332"/>
+          </a:xfrm>
+          <a:prstGeom prst="rect">
+            <a:avLst/>
+          </a:prstGeom>
+          <a:noFill/>
+        </p:spPr>
+        <p:txBody>
+          <a:bodyPr wrap="square" rtlCol="0">
+            <a:spAutoFit/>
+          </a:bodyPr>
+          <a:lstStyle/>
+          <a:p>
+            <a:r>
+              <a:rPr lang="tr-TR" dirty="0"/>
+              <a:t>Zeyd kızardı.</a:t>
+            </a:r>
+          </a:p>
+        </p:txBody>
+      </p:sp>
+      <p:sp>
+        <p:nvSpPr>
+          <p:cNvPr id="17" name="Metin kutusu 16">
+            <a:extLst>
+              <a:ext uri="{FF2B5EF4-FFF2-40B4-BE49-F238E27FC236}">
+                <a16:creationId xmlns:a16="http://schemas.microsoft.com/office/drawing/2014/main" id="{DDC6E4F7-214D-FC39-98E8-B6F3740C900B}"/>
+              </a:ext>
+            </a:extLst>
+          </p:cNvPr>
+          <p:cNvSpPr txBox="1"/>
+          <p:nvPr/>
+        </p:nvSpPr>
+        <p:spPr>
+          <a:xfrm>
+            <a:off x="336527" y="5949866"/>
+            <a:ext cx="2812931" cy="461665"/>
+          </a:xfrm>
+          <a:prstGeom prst="rect">
+            <a:avLst/>
+          </a:prstGeom>
+          <a:noFill/>
+        </p:spPr>
+        <p:txBody>
+          <a:bodyPr wrap="square" rtlCol="0">
+            <a:spAutoFit/>
+          </a:bodyPr>
+          <a:lstStyle/>
+          <a:p>
+            <a:r>
+              <a:rPr lang="ar-AE" sz="2400" dirty="0"/>
+              <a:t>اِحْمَرَّ زَيْدٌ</a:t>
+            </a:r>
+            <a:endParaRPr lang="tr-TR" sz="2400" dirty="0"/>
+          </a:p>
+        </p:txBody>
+      </p:sp>
+      <p:sp>
+        <p:nvSpPr>
+          <p:cNvPr id="18" name="Metin kutusu 17">
+            <a:extLst>
+              <a:ext uri="{FF2B5EF4-FFF2-40B4-BE49-F238E27FC236}">
+                <a16:creationId xmlns:a16="http://schemas.microsoft.com/office/drawing/2014/main" id="{A8CAB398-E376-7549-94F3-D9473D8C121F}"/>
+              </a:ext>
+            </a:extLst>
+          </p:cNvPr>
+          <p:cNvSpPr txBox="1"/>
+          <p:nvPr/>
+        </p:nvSpPr>
+        <p:spPr>
+          <a:xfrm>
+            <a:off x="336527" y="6384458"/>
+            <a:ext cx="3028591" cy="369332"/>
+          </a:xfrm>
+          <a:prstGeom prst="rect">
+            <a:avLst/>
+          </a:prstGeom>
+          <a:noFill/>
+        </p:spPr>
+        <p:txBody>
+          <a:bodyPr wrap="square" rtlCol="0">
+            <a:spAutoFit/>
+          </a:bodyPr>
+          <a:lstStyle/>
+          <a:p>
+            <a:r>
+              <a:rPr lang="tr-TR" dirty="0"/>
+              <a:t>Zeyd</a:t>
+            </a:r>
+            <a:r>
+              <a:rPr lang="ar-AE" dirty="0"/>
+              <a:t> </a:t>
+            </a:r>
+            <a:r>
+              <a:rPr lang="tr-TR" dirty="0"/>
+              <a:t>çok kızardı. (mübalağa)</a:t>
+            </a:r>
+          </a:p>
+        </p:txBody>
+      </p:sp>
+      <p:sp>
+        <p:nvSpPr>
+          <p:cNvPr id="19" name="Metin kutusu 18">
+            <a:extLst>
+              <a:ext uri="{FF2B5EF4-FFF2-40B4-BE49-F238E27FC236}">
+                <a16:creationId xmlns:a16="http://schemas.microsoft.com/office/drawing/2014/main" id="{164E4CCA-9CBB-2DE4-6A0F-DB6FDEEE4E3F}"/>
+              </a:ext>
+            </a:extLst>
+          </p:cNvPr>
+          <p:cNvSpPr txBox="1"/>
+          <p:nvPr/>
+        </p:nvSpPr>
+        <p:spPr>
+          <a:xfrm>
+            <a:off x="3950180" y="6001866"/>
+            <a:ext cx="2812931" cy="461665"/>
+          </a:xfrm>
+          <a:prstGeom prst="rect">
+            <a:avLst/>
+          </a:prstGeom>
+          <a:noFill/>
+        </p:spPr>
+        <p:txBody>
+          <a:bodyPr wrap="square" rtlCol="0">
+            <a:spAutoFit/>
+          </a:bodyPr>
+          <a:lstStyle/>
+          <a:p>
+            <a:r>
+              <a:rPr lang="ar-AE" sz="2400" dirty="0"/>
+              <a:t>اِحْمَارَّ زَيْدٌ</a:t>
+            </a:r>
+            <a:endParaRPr lang="tr-TR" sz="2400" dirty="0"/>
+          </a:p>
+        </p:txBody>
+      </p:sp>
+      <p:sp>
+        <p:nvSpPr>
+          <p:cNvPr id="20" name="Metin kutusu 19">
+            <a:extLst>
+              <a:ext uri="{FF2B5EF4-FFF2-40B4-BE49-F238E27FC236}">
+                <a16:creationId xmlns:a16="http://schemas.microsoft.com/office/drawing/2014/main" id="{3EA84498-48F1-3F42-0575-1551889C5CA5}"/>
+              </a:ext>
+            </a:extLst>
+          </p:cNvPr>
+          <p:cNvSpPr txBox="1"/>
+          <p:nvPr/>
+        </p:nvSpPr>
+        <p:spPr>
+          <a:xfrm>
+            <a:off x="3950179" y="6384458"/>
+            <a:ext cx="6035290" cy="369332"/>
+          </a:xfrm>
+          <a:prstGeom prst="rect">
+            <a:avLst/>
+          </a:prstGeom>
+          <a:noFill/>
+        </p:spPr>
+        <p:txBody>
+          <a:bodyPr wrap="square" rtlCol="0">
+            <a:spAutoFit/>
+          </a:bodyPr>
+          <a:lstStyle/>
+          <a:p>
+            <a:r>
+              <a:rPr lang="tr-TR" dirty="0"/>
+              <a:t>Zeyd</a:t>
+            </a:r>
+            <a:r>
+              <a:rPr lang="ar-AE" dirty="0"/>
+              <a:t> </a:t>
+            </a:r>
+            <a:r>
+              <a:rPr lang="tr-TR" dirty="0"/>
+              <a:t>ziyade mübalağa ile kızardı. (mübalağa ziyadesiyle)</a:t>
+            </a:r>
+          </a:p>
+        </p:txBody>
+      </p:sp>
     </p:spTree>
     <p:extLst>
       <p:ext uri="{BB962C8B-B14F-4D97-AF65-F5344CB8AC3E}">
@@ -18507,6 +21998,242 @@
                 </a:solidFill>
               </a:rPr>
               <a:t>1. NEVİ</a:t>
+            </a:r>
+          </a:p>
+        </p:txBody>
+      </p:sp>
+      <p:sp>
+        <p:nvSpPr>
+          <p:cNvPr id="3" name="Metin kutusu 2">
+            <a:extLst>
+              <a:ext uri="{FF2B5EF4-FFF2-40B4-BE49-F238E27FC236}">
+                <a16:creationId xmlns:a16="http://schemas.microsoft.com/office/drawing/2014/main" id="{65C6BDEB-7525-0D16-56B9-F9CC421B7411}"/>
+              </a:ext>
+            </a:extLst>
+          </p:cNvPr>
+          <p:cNvSpPr txBox="1"/>
+          <p:nvPr/>
+        </p:nvSpPr>
+        <p:spPr>
+          <a:xfrm>
+            <a:off x="240820" y="5664681"/>
+            <a:ext cx="1773691" cy="369332"/>
+          </a:xfrm>
+          <a:prstGeom prst="rect">
+            <a:avLst/>
+          </a:prstGeom>
+          <a:noFill/>
+        </p:spPr>
+        <p:txBody>
+          <a:bodyPr wrap="none" rtlCol="0">
+            <a:spAutoFit/>
+          </a:bodyPr>
+          <a:lstStyle/>
+          <a:p>
+            <a:r>
+              <a:rPr lang="tr-TR" dirty="0" err="1">
+                <a:solidFill>
+                  <a:srgbClr val="FF0000"/>
+                </a:solidFill>
+              </a:rPr>
+              <a:t>Müteaddi</a:t>
+            </a:r>
+            <a:r>
+              <a:rPr lang="tr-TR" dirty="0">
+                <a:solidFill>
+                  <a:srgbClr val="FF0000"/>
+                </a:solidFill>
+              </a:rPr>
+              <a:t> Misal:</a:t>
+            </a:r>
+          </a:p>
+        </p:txBody>
+      </p:sp>
+      <p:sp>
+        <p:nvSpPr>
+          <p:cNvPr id="6" name="Metin kutusu 5">
+            <a:extLst>
+              <a:ext uri="{FF2B5EF4-FFF2-40B4-BE49-F238E27FC236}">
+                <a16:creationId xmlns:a16="http://schemas.microsoft.com/office/drawing/2014/main" id="{B3F13410-D683-4E17-0A56-18995211AA72}"/>
+              </a:ext>
+            </a:extLst>
+          </p:cNvPr>
+          <p:cNvSpPr txBox="1"/>
+          <p:nvPr/>
+        </p:nvSpPr>
+        <p:spPr>
+          <a:xfrm>
+            <a:off x="240820" y="6039766"/>
+            <a:ext cx="2812931" cy="369332"/>
+          </a:xfrm>
+          <a:prstGeom prst="rect">
+            <a:avLst/>
+          </a:prstGeom>
+          <a:noFill/>
+        </p:spPr>
+        <p:txBody>
+          <a:bodyPr wrap="square" rtlCol="0">
+            <a:spAutoFit/>
+          </a:bodyPr>
+          <a:lstStyle/>
+          <a:p>
+            <a:r>
+              <a:rPr lang="ar-AE" dirty="0"/>
+              <a:t>اَكْرَمَ زَيْدٌ عَمْرًا</a:t>
+            </a:r>
+            <a:endParaRPr lang="tr-TR" dirty="0"/>
+          </a:p>
+        </p:txBody>
+      </p:sp>
+      <p:sp>
+        <p:nvSpPr>
+          <p:cNvPr id="10" name="Metin kutusu 9">
+            <a:extLst>
+              <a:ext uri="{FF2B5EF4-FFF2-40B4-BE49-F238E27FC236}">
+                <a16:creationId xmlns:a16="http://schemas.microsoft.com/office/drawing/2014/main" id="{CB0076CA-2B77-37BC-A3CC-D73616A7C50B}"/>
+              </a:ext>
+            </a:extLst>
+          </p:cNvPr>
+          <p:cNvSpPr txBox="1"/>
+          <p:nvPr/>
+        </p:nvSpPr>
+        <p:spPr>
+          <a:xfrm>
+            <a:off x="240819" y="6335609"/>
+            <a:ext cx="3028591" cy="369332"/>
+          </a:xfrm>
+          <a:prstGeom prst="rect">
+            <a:avLst/>
+          </a:prstGeom>
+          <a:noFill/>
+        </p:spPr>
+        <p:txBody>
+          <a:bodyPr wrap="square" rtlCol="0">
+            <a:spAutoFit/>
+          </a:bodyPr>
+          <a:lstStyle/>
+          <a:p>
+            <a:r>
+              <a:rPr lang="tr-TR" dirty="0"/>
+              <a:t>Zeyd </a:t>
+            </a:r>
+            <a:r>
+              <a:rPr lang="tr-TR" dirty="0" err="1"/>
+              <a:t>Amr’a</a:t>
+            </a:r>
+            <a:r>
+              <a:rPr lang="tr-TR" dirty="0"/>
+              <a:t> İkram Etti.</a:t>
+            </a:r>
+          </a:p>
+        </p:txBody>
+      </p:sp>
+      <p:sp>
+        <p:nvSpPr>
+          <p:cNvPr id="11" name="Metin kutusu 10">
+            <a:extLst>
+              <a:ext uri="{FF2B5EF4-FFF2-40B4-BE49-F238E27FC236}">
+                <a16:creationId xmlns:a16="http://schemas.microsoft.com/office/drawing/2014/main" id="{CC133AA7-6B40-E5BF-5C7B-DF5E8121FA16}"/>
+              </a:ext>
+            </a:extLst>
+          </p:cNvPr>
+          <p:cNvSpPr txBox="1"/>
+          <p:nvPr/>
+        </p:nvSpPr>
+        <p:spPr>
+          <a:xfrm>
+            <a:off x="8278605" y="5591192"/>
+            <a:ext cx="1423403" cy="369332"/>
+          </a:xfrm>
+          <a:prstGeom prst="rect">
+            <a:avLst/>
+          </a:prstGeom>
+          <a:noFill/>
+        </p:spPr>
+        <p:txBody>
+          <a:bodyPr wrap="none" rtlCol="0">
+            <a:spAutoFit/>
+          </a:bodyPr>
+          <a:lstStyle/>
+          <a:p>
+            <a:r>
+              <a:rPr lang="tr-TR" dirty="0">
+                <a:solidFill>
+                  <a:srgbClr val="FF0000"/>
+                </a:solidFill>
+              </a:rPr>
+              <a:t>Lazım Misal:</a:t>
+            </a:r>
+          </a:p>
+        </p:txBody>
+      </p:sp>
+      <p:sp>
+        <p:nvSpPr>
+          <p:cNvPr id="12" name="Metin kutusu 11">
+            <a:extLst>
+              <a:ext uri="{FF2B5EF4-FFF2-40B4-BE49-F238E27FC236}">
+                <a16:creationId xmlns:a16="http://schemas.microsoft.com/office/drawing/2014/main" id="{2D074D9A-A2F0-A4FF-2C61-A81F38431ED9}"/>
+              </a:ext>
+            </a:extLst>
+          </p:cNvPr>
+          <p:cNvSpPr txBox="1"/>
+          <p:nvPr/>
+        </p:nvSpPr>
+        <p:spPr>
+          <a:xfrm>
+            <a:off x="8278605" y="5966277"/>
+            <a:ext cx="1311215" cy="369332"/>
+          </a:xfrm>
+          <a:prstGeom prst="rect">
+            <a:avLst/>
+          </a:prstGeom>
+          <a:noFill/>
+        </p:spPr>
+        <p:txBody>
+          <a:bodyPr wrap="square" rtlCol="0">
+            <a:spAutoFit/>
+          </a:bodyPr>
+          <a:lstStyle/>
+          <a:p>
+            <a:r>
+              <a:rPr lang="ar-AE" dirty="0"/>
+              <a:t>اَصْبَحَ اَلرَّجُلُ</a:t>
+            </a:r>
+            <a:endParaRPr lang="tr-TR" dirty="0"/>
+          </a:p>
+        </p:txBody>
+      </p:sp>
+      <p:sp>
+        <p:nvSpPr>
+          <p:cNvPr id="13" name="Metin kutusu 12">
+            <a:extLst>
+              <a:ext uri="{FF2B5EF4-FFF2-40B4-BE49-F238E27FC236}">
+                <a16:creationId xmlns:a16="http://schemas.microsoft.com/office/drawing/2014/main" id="{C766A4B3-36C5-EE21-BC2A-D7A92E0742E9}"/>
+              </a:ext>
+            </a:extLst>
+          </p:cNvPr>
+          <p:cNvSpPr txBox="1"/>
+          <p:nvPr/>
+        </p:nvSpPr>
+        <p:spPr>
+          <a:xfrm>
+            <a:off x="8241821" y="6335609"/>
+            <a:ext cx="2695998" cy="369332"/>
+          </a:xfrm>
+          <a:prstGeom prst="rect">
+            <a:avLst/>
+          </a:prstGeom>
+          <a:noFill/>
+        </p:spPr>
+        <p:txBody>
+          <a:bodyPr wrap="square" rtlCol="0">
+            <a:spAutoFit/>
+          </a:bodyPr>
+          <a:lstStyle/>
+          <a:p>
+            <a:r>
+              <a:rPr lang="tr-TR" dirty="0"/>
+              <a:t>Adam Sabahladı.</a:t>
             </a:r>
           </a:p>
         </p:txBody>
